--- a/docs/content/one_way_anova/one_way_anova_activity.pptx
+++ b/docs/content/one_way_anova/one_way_anova_activity.pptx
@@ -6,6 +6,26 @@
   </p:sldMasterIdLst>
   <p:sldIdLst>
     <p:sldId id="256" r:id="rId2"/>
+    <p:sldId id="257" r:id="rId3"/>
+    <p:sldId id="258" r:id="rId4"/>
+    <p:sldId id="259" r:id="rId5"/>
+    <p:sldId id="260" r:id="rId6"/>
+    <p:sldId id="261" r:id="rId7"/>
+    <p:sldId id="262" r:id="rId8"/>
+    <p:sldId id="263" r:id="rId9"/>
+    <p:sldId id="264" r:id="rId10"/>
+    <p:sldId id="265" r:id="rId11"/>
+    <p:sldId id="266" r:id="rId12"/>
+    <p:sldId id="267" r:id="rId13"/>
+    <p:sldId id="268" r:id="rId14"/>
+    <p:sldId id="269" r:id="rId15"/>
+    <p:sldId id="270" r:id="rId16"/>
+    <p:sldId id="271" r:id="rId17"/>
+    <p:sldId id="272" r:id="rId18"/>
+    <p:sldId id="273" r:id="rId19"/>
+    <p:sldId id="274" r:id="rId20"/>
+    <p:sldId id="275" r:id="rId21"/>
+    <p:sldId id="276" r:id="rId22"/>
   </p:sldIdLst>
   <p:sldSz cx="9144000" cy="5143500" type="screen16x9"/>
   <p:notesSz cx="6858000" cy="9144000"/>
@@ -3279,7 +3299,7 @@
             </a:pPr>
             <a:r>
               <a:rPr/>
-              <a:t>Lecture 11</a:t>
+              <a:t>Worksheet 11 — One-Way ANOVA with Palmer Penguins</a:t>
             </a:r>
           </a:p>
         </p:txBody>
@@ -3309,7 +3329,6088 @@
             </a:pPr>
             <a:r>
               <a:rPr/>
+              <a:t>Comparing three species, checking assumptions, and post-hoc tests with emmeans</a:t>
+            </a:r>
+            <a:br/>
+            <a:br/>
+            <a:r>
+              <a:rPr/>
               <a:t>Bill Perry</a:t>
+            </a:r>
+          </a:p>
+        </p:txBody>
+      </p:sp>
+      <p:sp>
+        <p:nvSpPr>
+          <p:cNvPr id="4" name="Date Placeholder 3"/>
+          <p:cNvSpPr>
+            <a:spLocks noGrp="1"/>
+          </p:cNvSpPr>
+          <p:nvPr>
+            <p:ph idx="10" sz="half" type="dt"/>
+          </p:nvPr>
+        </p:nvSpPr>
+        <p:spPr/>
+        <p:txBody>
+          <a:bodyPr/>
+          <a:lstStyle/>
+          <a:p>
+            <a:pPr lvl="0" indent="0" marL="0">
+              <a:buNone/>
+            </a:pPr>
+            <a:r>
+              <a:rPr/>
+              <a:t>2026-07-05</a:t>
+            </a:r>
+          </a:p>
+        </p:txBody>
+      </p:sp>
+    </p:spTree>
+  </p:cSld>
+</p:sld>
+</file>
+
+<file path=ppt/slides/slide10.xml><?xml version="1.0" encoding="utf-8"?>
+<p:sld xmlns:a="http://schemas.openxmlformats.org/drawingml/2006/main" xmlns:r="http://schemas.openxmlformats.org/officeDocument/2006/relationships" xmlns:p="http://schemas.openxmlformats.org/presentationml/2006/main">
+  <p:cSld>
+    <p:spTree>
+      <p:nvGrpSpPr>
+        <p:cNvPr id="1" name=""/>
+        <p:cNvGrpSpPr/>
+        <p:nvPr/>
+      </p:nvGrpSpPr>
+      <p:grpSpPr>
+        <a:xfrm>
+          <a:off x="0" y="0"/>
+          <a:ext cx="0" cy="0"/>
+          <a:chOff x="0" y="0"/>
+          <a:chExt cx="0" cy="0"/>
+        </a:xfrm>
+      </p:grpSpPr>
+      <p:sp>
+        <p:nvSpPr>
+          <p:cNvPr id="2" name="Title 1"/>
+          <p:cNvSpPr>
+            <a:spLocks noGrp="1"/>
+          </p:cNvSpPr>
+          <p:nvPr>
+            <p:ph type="title"/>
+          </p:nvPr>
+        </p:nvSpPr>
+        <p:spPr>
+          <a:xfrm>
+            <a:off x="0" y="0"/>
+            <a:ext cx="9144000" cy="582780"/>
+          </a:xfrm>
+        </p:spPr>
+        <p:txBody>
+          <a:bodyPr/>
+          <a:lstStyle/>
+          <a:p>
+            <a:pPr lvl="0" indent="0" marL="0">
+              <a:buNone/>
+            </a:pPr>
+            <a:r>
+              <a:rPr/>
+              <a:t>Part 6 · Assumption 2 — equal variance</a:t>
+            </a:r>
+          </a:p>
+        </p:txBody>
+      </p:sp>
+      <p:sp>
+        <p:nvSpPr>
+          <p:cNvPr id="3" name="Content Placeholder 2"/>
+          <p:cNvSpPr>
+            <a:spLocks noGrp="1"/>
+          </p:cNvSpPr>
+          <p:nvPr>
+            <p:ph idx="1"/>
+          </p:nvPr>
+        </p:nvSpPr>
+        <p:spPr/>
+        <p:txBody>
+          <a:bodyPr/>
+          <a:lstStyle/>
+          <a:p>
+            <a:pPr lvl="0" indent="0" marL="1270000">
+              <a:buNone/>
+            </a:pPr>
+            <a:r>
+              <a:rPr sz="2000"/>
+              <a:t>🔮 </a:t>
+            </a:r>
+            <a:r>
+              <a:rPr sz="2000" b="1"/>
+              <a:t>Predict first:</a:t>
+            </a:r>
+            <a:r>
+              <a:rPr sz="2000"/>
+              <a:t> From the box heights in Part 2, predict — will Levene’s test say the variances are equal (</a:t>
+            </a:r>
+            <a:r>
+              <a:rPr sz="2000" i="1"/>
+              <a:t>p</a:t>
+            </a:r>
+            <a:r>
+              <a:rPr sz="2000"/>
+              <a:t> &gt; 0.05) or unequal?</a:t>
+            </a:r>
+          </a:p>
+          <a:p>
+            <a:pPr lvl="0" indent="0" marL="0">
+              <a:buNone/>
+            </a:pPr>
+            <a:r>
+              <a:rPr b="1"/>
+              <a:t>▶ Run this:</a:t>
+            </a:r>
+          </a:p>
+          <a:p>
+            <a:pPr lvl="0" indent="0">
+              <a:buNone/>
+            </a:pPr>
+            <a:r>
+              <a:rPr>
+                <a:solidFill>
+                  <a:srgbClr val="5E5E5E"/>
+                </a:solidFill>
+                <a:latin typeface="Courier"/>
+              </a:rPr>
+              <a:t># Levene's test — H0: all groups have equal variance ----</a:t>
+            </a:r>
+            <a:br/>
+            <a:r>
+              <a:rPr>
+                <a:solidFill>
+                  <a:srgbClr val="4758AB"/>
+                </a:solidFill>
+                <a:latin typeface="Courier"/>
+              </a:rPr>
+              <a:t>leveneTest</a:t>
+            </a:r>
+            <a:r>
+              <a:rPr>
+                <a:solidFill>
+                  <a:srgbClr val="003B4F"/>
+                </a:solidFill>
+                <a:latin typeface="Courier"/>
+              </a:rPr>
+              <a:t>(body_mass_g </a:t>
+            </a:r>
+            <a:r>
+              <a:rPr>
+                <a:solidFill>
+                  <a:srgbClr val="5E5E5E"/>
+                </a:solidFill>
+                <a:latin typeface="Courier"/>
+              </a:rPr>
+              <a:t>~</a:t>
+            </a:r>
+            <a:r>
+              <a:rPr>
+                <a:solidFill>
+                  <a:srgbClr val="003B4F"/>
+                </a:solidFill>
+                <a:latin typeface="Courier"/>
+              </a:rPr>
+              <a:t> species, </a:t>
+            </a:r>
+            <a:r>
+              <a:rPr>
+                <a:solidFill>
+                  <a:srgbClr val="657422"/>
+                </a:solidFill>
+                <a:latin typeface="Courier"/>
+              </a:rPr>
+              <a:t>data =</a:t>
+            </a:r>
+            <a:r>
+              <a:rPr>
+                <a:solidFill>
+                  <a:srgbClr val="003B4F"/>
+                </a:solidFill>
+                <a:latin typeface="Courier"/>
+              </a:rPr>
+              <a:t> penguins_df)</a:t>
+            </a:r>
+          </a:p>
+          <a:p>
+            <a:pPr lvl="0" indent="0" marL="0">
+              <a:buNone/>
+            </a:pPr>
+            <a:r>
+              <a:rPr/>
+              <a:t>✏️ </a:t>
+            </a:r>
+            <a:r>
+              <a:rPr b="1"/>
+              <a:t>Your turn:</a:t>
+            </a:r>
+            <a:r>
+              <a:rPr/>
+              <a:t> Record and decide.</a:t>
+            </a:r>
+          </a:p>
+          <a:p>
+            <a:pPr lvl="0" indent="0">
+              <a:buNone/>
+            </a:pPr>
+            <a:r>
+              <a:rPr>
+                <a:latin typeface="Courier"/>
+              </a:rPr>
+              <a:t>Levene's F =            p =
+Variances equal?  Y / N
+If NOT equal, which test would you use instead? (hint: Welch)</a:t>
+            </a:r>
+          </a:p>
+        </p:txBody>
+      </p:sp>
+    </p:spTree>
+  </p:cSld>
+</p:sld>
+</file>
+
+<file path=ppt/slides/slide11.xml><?xml version="1.0" encoding="utf-8"?>
+<p:sld xmlns:a="http://schemas.openxmlformats.org/drawingml/2006/main" xmlns:r="http://schemas.openxmlformats.org/officeDocument/2006/relationships" xmlns:p="http://schemas.openxmlformats.org/presentationml/2006/main">
+  <p:cSld>
+    <p:spTree>
+      <p:nvGrpSpPr>
+        <p:cNvPr id="1" name=""/>
+        <p:cNvGrpSpPr/>
+        <p:nvPr/>
+      </p:nvGrpSpPr>
+      <p:grpSpPr>
+        <a:xfrm>
+          <a:off x="0" y="0"/>
+          <a:ext cx="0" cy="0"/>
+          <a:chOff x="0" y="0"/>
+          <a:chExt cx="0" cy="0"/>
+        </a:xfrm>
+      </p:grpSpPr>
+      <p:sp>
+        <p:nvSpPr>
+          <p:cNvPr id="3" name="Content Placeholder 2"/>
+          <p:cNvSpPr>
+            <a:spLocks noGrp="1"/>
+          </p:cNvSpPr>
+          <p:nvPr>
+            <p:ph idx="1"/>
+          </p:nvPr>
+        </p:nvSpPr>
+        <p:spPr/>
+        <p:txBody>
+          <a:bodyPr/>
+          <a:lstStyle/>
+          <a:p>
+            <a:pPr lvl="0" indent="0" marL="0">
+              <a:spcBef>
+                <a:spcPts val="3000"/>
+              </a:spcBef>
+              <a:buNone/>
+            </a:pPr>
+            <a:r>
+              <a:rPr sz="2000" b="1"/>
+              <a:t>🧩 Chunk 3 — Run the ANOVA </a:t>
+            </a:r>
+            <a:r>
+              <a:rPr sz="2000" b="1" i="1"/>
+              <a:t>(after lecture Chunk 3)</a:t>
+            </a:r>
+          </a:p>
+          <a:p>
+            <a:pPr lvl="0" indent="0" marL="1270000">
+              <a:buNone/>
+            </a:pPr>
+            <a:r>
+              <a:rPr sz="2000"/>
+              <a:t>Parts 7–8: read the F table two ways.</a:t>
+            </a:r>
+          </a:p>
+        </p:txBody>
+      </p:sp>
+    </p:spTree>
+  </p:cSld>
+</p:sld>
+</file>
+
+<file path=ppt/slides/slide12.xml><?xml version="1.0" encoding="utf-8"?>
+<p:sld xmlns:a="http://schemas.openxmlformats.org/drawingml/2006/main" xmlns:r="http://schemas.openxmlformats.org/officeDocument/2006/relationships" xmlns:p="http://schemas.openxmlformats.org/presentationml/2006/main">
+  <p:cSld>
+    <p:spTree>
+      <p:nvGrpSpPr>
+        <p:cNvPr id="1" name=""/>
+        <p:cNvGrpSpPr/>
+        <p:nvPr/>
+      </p:nvGrpSpPr>
+      <p:grpSpPr>
+        <a:xfrm>
+          <a:off x="0" y="0"/>
+          <a:ext cx="0" cy="0"/>
+          <a:chOff x="0" y="0"/>
+          <a:chExt cx="0" cy="0"/>
+        </a:xfrm>
+      </p:grpSpPr>
+      <p:sp>
+        <p:nvSpPr>
+          <p:cNvPr id="2" name="Title 1"/>
+          <p:cNvSpPr>
+            <a:spLocks noGrp="1"/>
+          </p:cNvSpPr>
+          <p:nvPr>
+            <p:ph type="title"/>
+          </p:nvPr>
+        </p:nvSpPr>
+        <p:spPr>
+          <a:xfrm>
+            <a:off x="0" y="0"/>
+            <a:ext cx="9144000" cy="582780"/>
+          </a:xfrm>
+        </p:spPr>
+        <p:txBody>
+          <a:bodyPr/>
+          <a:lstStyle/>
+          <a:p>
+            <a:pPr lvl="0" indent="0" marL="0">
+              <a:buNone/>
+            </a:pPr>
+            <a:r>
+              <a:rPr/>
+              <a:t>Part 7 · Run the ANOVA</a:t>
+            </a:r>
+          </a:p>
+        </p:txBody>
+      </p:sp>
+      <p:sp>
+        <p:nvSpPr>
+          <p:cNvPr id="3" name="Content Placeholder 2"/>
+          <p:cNvSpPr>
+            <a:spLocks noGrp="1"/>
+          </p:cNvSpPr>
+          <p:nvPr>
+            <p:ph idx="1"/>
+          </p:nvPr>
+        </p:nvSpPr>
+        <p:spPr/>
+        <p:txBody>
+          <a:bodyPr/>
+          <a:lstStyle/>
+          <a:p>
+            <a:pPr lvl="0" indent="0" marL="1270000">
+              <a:buNone/>
+            </a:pPr>
+            <a:r>
+              <a:rPr sz="2000"/>
+              <a:t>🔮 </a:t>
+            </a:r>
+            <a:r>
+              <a:rPr sz="2000" b="1"/>
+              <a:t>Predict first:</a:t>
+            </a:r>
+            <a:r>
+              <a:rPr sz="2000"/>
+              <a:t> The boxplot looked very separated. Predict the </a:t>
+            </a:r>
+            <a:r>
+              <a:rPr sz="2000" i="1"/>
+              <a:t>p</a:t>
+            </a:r>
+            <a:r>
+              <a:rPr sz="2000"/>
+              <a:t>-value — near 0.5, near 0.05, or far below 0.001?</a:t>
+            </a:r>
+          </a:p>
+          <a:p>
+            <a:pPr lvl="0" indent="0" marL="0">
+              <a:buNone/>
+            </a:pPr>
+            <a:r>
+              <a:rPr b="1"/>
+              <a:t>▶ Run this:</a:t>
+            </a:r>
+          </a:p>
+          <a:p>
+            <a:pPr lvl="0" indent="0">
+              <a:buNone/>
+            </a:pPr>
+            <a:r>
+              <a:rPr>
+                <a:solidFill>
+                  <a:srgbClr val="5E5E5E"/>
+                </a:solidFill>
+                <a:latin typeface="Courier"/>
+              </a:rPr>
+              <a:t># Classic ANOVA table ------------------------------------</a:t>
+            </a:r>
+            <a:br/>
+            <a:r>
+              <a:rPr>
+                <a:solidFill>
+                  <a:srgbClr val="003B4F"/>
+                </a:solidFill>
+                <a:latin typeface="Courier"/>
+              </a:rPr>
+              <a:t>mass_aov &lt;- </a:t>
+            </a:r>
+            <a:r>
+              <a:rPr>
+                <a:solidFill>
+                  <a:srgbClr val="4758AB"/>
+                </a:solidFill>
+                <a:latin typeface="Courier"/>
+              </a:rPr>
+              <a:t>aov</a:t>
+            </a:r>
+            <a:r>
+              <a:rPr>
+                <a:solidFill>
+                  <a:srgbClr val="003B4F"/>
+                </a:solidFill>
+                <a:latin typeface="Courier"/>
+              </a:rPr>
+              <a:t>(body_mass_g </a:t>
+            </a:r>
+            <a:r>
+              <a:rPr>
+                <a:solidFill>
+                  <a:srgbClr val="5E5E5E"/>
+                </a:solidFill>
+                <a:latin typeface="Courier"/>
+              </a:rPr>
+              <a:t>~</a:t>
+            </a:r>
+            <a:r>
+              <a:rPr>
+                <a:solidFill>
+                  <a:srgbClr val="003B4F"/>
+                </a:solidFill>
+                <a:latin typeface="Courier"/>
+              </a:rPr>
+              <a:t> species, </a:t>
+            </a:r>
+            <a:r>
+              <a:rPr>
+                <a:solidFill>
+                  <a:srgbClr val="657422"/>
+                </a:solidFill>
+                <a:latin typeface="Courier"/>
+              </a:rPr>
+              <a:t>data =</a:t>
+            </a:r>
+            <a:r>
+              <a:rPr>
+                <a:solidFill>
+                  <a:srgbClr val="003B4F"/>
+                </a:solidFill>
+                <a:latin typeface="Courier"/>
+              </a:rPr>
+              <a:t> penguins_df)</a:t>
+            </a:r>
+            <a:br/>
+            <a:r>
+              <a:rPr>
+                <a:solidFill>
+                  <a:srgbClr val="4758AB"/>
+                </a:solidFill>
+                <a:latin typeface="Courier"/>
+              </a:rPr>
+              <a:t>summary</a:t>
+            </a:r>
+            <a:r>
+              <a:rPr>
+                <a:solidFill>
+                  <a:srgbClr val="003B4F"/>
+                </a:solidFill>
+                <a:latin typeface="Courier"/>
+              </a:rPr>
+              <a:t>(mass_aov)</a:t>
+            </a:r>
+          </a:p>
+          <a:p>
+            <a:pPr lvl="0" indent="0" marL="0">
+              <a:buNone/>
+            </a:pPr>
+            <a:r>
+              <a:rPr/>
+              <a:t>✏️ </a:t>
+            </a:r>
+            <a:r>
+              <a:rPr b="1"/>
+              <a:t>Your turn:</a:t>
+            </a:r>
+            <a:r>
+              <a:rPr/>
+              <a:t> Read the F table.</a:t>
+            </a:r>
+          </a:p>
+          <a:p>
+            <a:pPr lvl="0" indent="0">
+              <a:buNone/>
+            </a:pPr>
+            <a:r>
+              <a:rPr>
+                <a:latin typeface="Courier"/>
+              </a:rPr>
+              <a:t>Df (between, within) =        ,
+F value =
+p-value =
+Reject H₀ at α = 0.05?  Y / N</a:t>
+            </a:r>
+          </a:p>
+        </p:txBody>
+      </p:sp>
+    </p:spTree>
+  </p:cSld>
+</p:sld>
+</file>
+
+<file path=ppt/slides/slide13.xml><?xml version="1.0" encoding="utf-8"?>
+<p:sld xmlns:a="http://schemas.openxmlformats.org/drawingml/2006/main" xmlns:r="http://schemas.openxmlformats.org/officeDocument/2006/relationships" xmlns:p="http://schemas.openxmlformats.org/presentationml/2006/main">
+  <p:cSld>
+    <p:spTree>
+      <p:nvGrpSpPr>
+        <p:cNvPr id="1" name=""/>
+        <p:cNvGrpSpPr/>
+        <p:nvPr/>
+      </p:nvGrpSpPr>
+      <p:grpSpPr>
+        <a:xfrm>
+          <a:off x="0" y="0"/>
+          <a:ext cx="0" cy="0"/>
+          <a:chOff x="0" y="0"/>
+          <a:chExt cx="0" cy="0"/>
+        </a:xfrm>
+      </p:grpSpPr>
+      <p:sp>
+        <p:nvSpPr>
+          <p:cNvPr id="2" name="Title 1"/>
+          <p:cNvSpPr>
+            <a:spLocks noGrp="1"/>
+          </p:cNvSpPr>
+          <p:nvPr>
+            <p:ph type="title"/>
+          </p:nvPr>
+        </p:nvSpPr>
+        <p:spPr>
+          <a:xfrm>
+            <a:off x="0" y="0"/>
+            <a:ext cx="9144000" cy="582780"/>
+          </a:xfrm>
+        </p:spPr>
+        <p:txBody>
+          <a:bodyPr/>
+          <a:lstStyle/>
+          <a:p>
+            <a:pPr lvl="0" indent="0" marL="0">
+              <a:buNone/>
+            </a:pPr>
+            <a:r>
+              <a:rPr/>
+              <a:t>Part 8 · The same table with </a:t>
+            </a:r>
+            <a:r>
+              <a:rPr>
+                <a:latin typeface="Courier"/>
+              </a:rPr>
+              <a:t>car::Anova()</a:t>
+            </a:r>
+          </a:p>
+        </p:txBody>
+      </p:sp>
+      <p:sp>
+        <p:nvSpPr>
+          <p:cNvPr id="3" name="Content Placeholder 2"/>
+          <p:cNvSpPr>
+            <a:spLocks noGrp="1"/>
+          </p:cNvSpPr>
+          <p:nvPr>
+            <p:ph idx="1"/>
+          </p:nvPr>
+        </p:nvSpPr>
+        <p:spPr/>
+        <p:txBody>
+          <a:bodyPr/>
+          <a:lstStyle/>
+          <a:p>
+            <a:pPr lvl="0" indent="0" marL="0">
+              <a:buNone/>
+            </a:pPr>
+            <a:r>
+              <a:rPr b="1"/>
+              <a:t>▶ Run this:</a:t>
+            </a:r>
+          </a:p>
+          <a:p>
+            <a:pPr lvl="0" indent="0">
+              <a:buNone/>
+            </a:pPr>
+            <a:r>
+              <a:rPr>
+                <a:solidFill>
+                  <a:srgbClr val="5E5E5E"/>
+                </a:solidFill>
+                <a:latin typeface="Courier"/>
+              </a:rPr>
+              <a:t># Type II sums of squares (the habit to build) ----------</a:t>
+            </a:r>
+            <a:br/>
+            <a:r>
+              <a:rPr>
+                <a:solidFill>
+                  <a:srgbClr val="4758AB"/>
+                </a:solidFill>
+                <a:latin typeface="Courier"/>
+              </a:rPr>
+              <a:t>Anova</a:t>
+            </a:r>
+            <a:r>
+              <a:rPr>
+                <a:solidFill>
+                  <a:srgbClr val="003B4F"/>
+                </a:solidFill>
+                <a:latin typeface="Courier"/>
+              </a:rPr>
+              <a:t>(mass_model, </a:t>
+            </a:r>
+            <a:r>
+              <a:rPr>
+                <a:solidFill>
+                  <a:srgbClr val="657422"/>
+                </a:solidFill>
+                <a:latin typeface="Courier"/>
+              </a:rPr>
+              <a:t>type =</a:t>
+            </a:r>
+            <a:r>
+              <a:rPr>
+                <a:solidFill>
+                  <a:srgbClr val="003B4F"/>
+                </a:solidFill>
+                <a:latin typeface="Courier"/>
+              </a:rPr>
+              <a:t> </a:t>
+            </a:r>
+            <a:r>
+              <a:rPr>
+                <a:solidFill>
+                  <a:srgbClr val="20794D"/>
+                </a:solidFill>
+                <a:latin typeface="Courier"/>
+              </a:rPr>
+              <a:t>"II"</a:t>
+            </a:r>
+            <a:r>
+              <a:rPr>
+                <a:solidFill>
+                  <a:srgbClr val="003B4F"/>
+                </a:solidFill>
+                <a:latin typeface="Courier"/>
+              </a:rPr>
+              <a:t>)</a:t>
+            </a:r>
+          </a:p>
+          <a:p>
+            <a:pPr lvl="0" indent="0" marL="1270000">
+              <a:buNone/>
+            </a:pPr>
+            <a:r>
+              <a:rPr sz="2000"/>
+              <a:t>⚠️ </a:t>
+            </a:r>
+            <a:r>
+              <a:rPr sz="2000" b="1"/>
+              <a:t>Watch out!</a:t>
+            </a:r>
+            <a:r>
+              <a:rPr sz="2000"/>
+              <a:t> Lowercase </a:t>
+            </a:r>
+            <a:r>
+              <a:rPr sz="2000">
+                <a:latin typeface="Courier"/>
+              </a:rPr>
+              <a:t>anova()</a:t>
+            </a:r>
+            <a:r>
+              <a:rPr sz="2000"/>
+              <a:t> (base R) and capital </a:t>
+            </a:r>
+            <a:r>
+              <a:rPr sz="2000">
+                <a:latin typeface="Courier"/>
+              </a:rPr>
+              <a:t>Anova()</a:t>
+            </a:r>
+            <a:r>
+              <a:rPr sz="2000"/>
+              <a:t> (car) are different functions. If R says </a:t>
+            </a:r>
+            <a:r>
+              <a:rPr sz="2000">
+                <a:latin typeface="Courier"/>
+              </a:rPr>
+              <a:t>could not find function "Anova"</a:t>
+            </a:r>
+            <a:r>
+              <a:rPr sz="2000"/>
+              <a:t>, you forgot </a:t>
+            </a:r>
+            <a:r>
+              <a:rPr sz="2000">
+                <a:latin typeface="Courier"/>
+              </a:rPr>
+              <a:t>library(car)</a:t>
+            </a:r>
+            <a:r>
+              <a:rPr sz="2000"/>
+              <a:t>.</a:t>
+            </a:r>
+          </a:p>
+          <a:p>
+            <a:pPr lvl="0" indent="0" marL="0">
+              <a:buNone/>
+            </a:pPr>
+            <a:r>
+              <a:rPr/>
+              <a:t>✏️ </a:t>
+            </a:r>
+            <a:r>
+              <a:rPr b="1"/>
+              <a:t>Your turn:</a:t>
+            </a:r>
+            <a:r>
+              <a:rPr/>
+              <a:t> Does </a:t>
+            </a:r>
+            <a:r>
+              <a:rPr>
+                <a:latin typeface="Courier"/>
+              </a:rPr>
+              <a:t>Anova()</a:t>
+            </a:r>
+            <a:r>
+              <a:rPr/>
+              <a:t> give the same F and p as </a:t>
+            </a:r>
+            <a:r>
+              <a:rPr>
+                <a:latin typeface="Courier"/>
+              </a:rPr>
+              <a:t>summary(mass_aov)</a:t>
+            </a:r>
+            <a:r>
+              <a:rPr/>
+              <a:t>? (For one predictor it should.)</a:t>
+            </a:r>
+          </a:p>
+          <a:p>
+            <a:pPr lvl="0" indent="0">
+              <a:buNone/>
+            </a:pPr>
+            <a:r>
+              <a:rPr>
+                <a:latin typeface="Courier"/>
+              </a:rPr>
+              <a:t>Match?  Y / N
+Why do we prefer Anova(type = "II") as a habit? (hint: unbalanced / two-way later)</a:t>
+            </a:r>
+          </a:p>
+        </p:txBody>
+      </p:sp>
+    </p:spTree>
+  </p:cSld>
+</p:sld>
+</file>
+
+<file path=ppt/slides/slide14.xml><?xml version="1.0" encoding="utf-8"?>
+<p:sld xmlns:a="http://schemas.openxmlformats.org/drawingml/2006/main" xmlns:r="http://schemas.openxmlformats.org/officeDocument/2006/relationships" xmlns:p="http://schemas.openxmlformats.org/presentationml/2006/main">
+  <p:cSld>
+    <p:spTree>
+      <p:nvGrpSpPr>
+        <p:cNvPr id="1" name=""/>
+        <p:cNvGrpSpPr/>
+        <p:nvPr/>
+      </p:nvGrpSpPr>
+      <p:grpSpPr>
+        <a:xfrm>
+          <a:off x="0" y="0"/>
+          <a:ext cx="0" cy="0"/>
+          <a:chOff x="0" y="0"/>
+          <a:chExt cx="0" cy="0"/>
+        </a:xfrm>
+      </p:grpSpPr>
+      <p:sp>
+        <p:nvSpPr>
+          <p:cNvPr id="3" name="Content Placeholder 2"/>
+          <p:cNvSpPr>
+            <a:spLocks noGrp="1"/>
+          </p:cNvSpPr>
+          <p:nvPr>
+            <p:ph idx="1"/>
+          </p:nvPr>
+        </p:nvSpPr>
+        <p:spPr/>
+        <p:txBody>
+          <a:bodyPr/>
+          <a:lstStyle/>
+          <a:p>
+            <a:pPr lvl="0" indent="0" marL="0">
+              <a:spcBef>
+                <a:spcPts val="3000"/>
+              </a:spcBef>
+              <a:buNone/>
+            </a:pPr>
+            <a:r>
+              <a:rPr sz="2000" b="1"/>
+              <a:t>🧩 Chunk 4 — Which groups differ? </a:t>
+            </a:r>
+            <a:r>
+              <a:rPr sz="2000" b="1" i="1"/>
+              <a:t>(after lecture Chunk 4)</a:t>
+            </a:r>
+          </a:p>
+          <a:p>
+            <a:pPr lvl="0" indent="0" marL="1270000">
+              <a:buNone/>
+            </a:pPr>
+            <a:r>
+              <a:rPr sz="2000"/>
+              <a:t>Parts 9–11: post-hoc comparisons, letters, plot, and the write-up.</a:t>
+            </a:r>
+          </a:p>
+        </p:txBody>
+      </p:sp>
+    </p:spTree>
+  </p:cSld>
+</p:sld>
+</file>
+
+<file path=ppt/slides/slide15.xml><?xml version="1.0" encoding="utf-8"?>
+<p:sld xmlns:a="http://schemas.openxmlformats.org/drawingml/2006/main" xmlns:r="http://schemas.openxmlformats.org/officeDocument/2006/relationships" xmlns:p="http://schemas.openxmlformats.org/presentationml/2006/main">
+  <p:cSld>
+    <p:spTree>
+      <p:nvGrpSpPr>
+        <p:cNvPr id="1" name=""/>
+        <p:cNvGrpSpPr/>
+        <p:nvPr/>
+      </p:nvGrpSpPr>
+      <p:grpSpPr>
+        <a:xfrm>
+          <a:off x="0" y="0"/>
+          <a:ext cx="0" cy="0"/>
+          <a:chOff x="0" y="0"/>
+          <a:chExt cx="0" cy="0"/>
+        </a:xfrm>
+      </p:grpSpPr>
+      <p:sp>
+        <p:nvSpPr>
+          <p:cNvPr id="2" name="Title 1"/>
+          <p:cNvSpPr>
+            <a:spLocks noGrp="1"/>
+          </p:cNvSpPr>
+          <p:nvPr>
+            <p:ph type="title"/>
+          </p:nvPr>
+        </p:nvSpPr>
+        <p:spPr>
+          <a:xfrm>
+            <a:off x="0" y="0"/>
+            <a:ext cx="9144000" cy="582780"/>
+          </a:xfrm>
+        </p:spPr>
+        <p:txBody>
+          <a:bodyPr/>
+          <a:lstStyle/>
+          <a:p>
+            <a:pPr lvl="0" indent="0" marL="0">
+              <a:buNone/>
+            </a:pPr>
+            <a:r>
+              <a:rPr/>
+              <a:t>Part 9 · Post-hoc — which species differ?</a:t>
+            </a:r>
+          </a:p>
+        </p:txBody>
+      </p:sp>
+      <p:sp>
+        <p:nvSpPr>
+          <p:cNvPr id="3" name="Content Placeholder 2"/>
+          <p:cNvSpPr>
+            <a:spLocks noGrp="1"/>
+          </p:cNvSpPr>
+          <p:nvPr>
+            <p:ph idx="1"/>
+          </p:nvPr>
+        </p:nvSpPr>
+        <p:spPr/>
+        <p:txBody>
+          <a:bodyPr/>
+          <a:lstStyle/>
+          <a:p>
+            <a:pPr lvl="0" indent="0" marL="1270000">
+              <a:buNone/>
+            </a:pPr>
+            <a:r>
+              <a:rPr sz="2000"/>
+              <a:t>🔮 </a:t>
+            </a:r>
+            <a:r>
+              <a:rPr sz="2000" b="1"/>
+              <a:t>Predict first:</a:t>
+            </a:r>
+            <a:r>
+              <a:rPr sz="2000"/>
+              <a:t> Will </a:t>
+            </a:r>
+            <a:r>
+              <a:rPr sz="2000" b="1"/>
+              <a:t>all three</a:t>
+            </a:r>
+            <a:r>
+              <a:rPr sz="2000"/>
+              <a:t> species differ from each other, or will two be statistically tied? Commit before you run it.</a:t>
+            </a:r>
+          </a:p>
+          <a:p>
+            <a:pPr lvl="0" indent="0" marL="0">
+              <a:buNone/>
+            </a:pPr>
+            <a:r>
+              <a:rPr b="1"/>
+              <a:t>▶ Run this:</a:t>
+            </a:r>
+          </a:p>
+          <a:p>
+            <a:pPr lvl="0" indent="0">
+              <a:buNone/>
+            </a:pPr>
+            <a:r>
+              <a:rPr>
+                <a:solidFill>
+                  <a:srgbClr val="5E5E5E"/>
+                </a:solidFill>
+                <a:latin typeface="Courier"/>
+              </a:rPr>
+              <a:t># Estimated marginal means + Tukey-adjusted pairs -------</a:t>
+            </a:r>
+            <a:br/>
+            <a:r>
+              <a:rPr>
+                <a:solidFill>
+                  <a:srgbClr val="003B4F"/>
+                </a:solidFill>
+                <a:latin typeface="Courier"/>
+              </a:rPr>
+              <a:t>mass_emm &lt;- </a:t>
+            </a:r>
+            <a:r>
+              <a:rPr>
+                <a:solidFill>
+                  <a:srgbClr val="4758AB"/>
+                </a:solidFill>
+                <a:latin typeface="Courier"/>
+              </a:rPr>
+              <a:t>emmeans</a:t>
+            </a:r>
+            <a:r>
+              <a:rPr>
+                <a:solidFill>
+                  <a:srgbClr val="003B4F"/>
+                </a:solidFill>
+                <a:latin typeface="Courier"/>
+              </a:rPr>
+              <a:t>(mass_model, pairwise </a:t>
+            </a:r>
+            <a:r>
+              <a:rPr>
+                <a:solidFill>
+                  <a:srgbClr val="5E5E5E"/>
+                </a:solidFill>
+                <a:latin typeface="Courier"/>
+              </a:rPr>
+              <a:t>~</a:t>
+            </a:r>
+            <a:r>
+              <a:rPr>
+                <a:solidFill>
+                  <a:srgbClr val="003B4F"/>
+                </a:solidFill>
+                <a:latin typeface="Courier"/>
+              </a:rPr>
+              <a:t> species)</a:t>
+            </a:r>
+            <a:br/>
+            <a:br/>
+            <a:r>
+              <a:rPr>
+                <a:solidFill>
+                  <a:srgbClr val="003B4F"/>
+                </a:solidFill>
+                <a:latin typeface="Courier"/>
+              </a:rPr>
+              <a:t>mass_emm</a:t>
+            </a:r>
+            <a:r>
+              <a:rPr>
+                <a:solidFill>
+                  <a:srgbClr val="5E5E5E"/>
+                </a:solidFill>
+                <a:latin typeface="Courier"/>
+              </a:rPr>
+              <a:t>$</a:t>
+            </a:r>
+            <a:r>
+              <a:rPr>
+                <a:solidFill>
+                  <a:srgbClr val="003B4F"/>
+                </a:solidFill>
+                <a:latin typeface="Courier"/>
+              </a:rPr>
+              <a:t>contrasts</a:t>
+            </a:r>
+          </a:p>
+          <a:p>
+            <a:pPr lvl="0" indent="0" marL="0">
+              <a:buNone/>
+            </a:pPr>
+            <a:r>
+              <a:rPr/>
+              <a:t>✏️ </a:t>
+            </a:r>
+            <a:r>
+              <a:rPr b="1"/>
+              <a:t>Your turn:</a:t>
+            </a:r>
+            <a:r>
+              <a:rPr/>
+              <a:t> Record each pairwise comparison.</a:t>
+            </a:r>
+          </a:p>
+          <a:p>
+            <a:pPr lvl="0" indent="0">
+              <a:buNone/>
+            </a:pPr>
+            <a:r>
+              <a:rPr>
+                <a:latin typeface="Courier"/>
+              </a:rPr>
+              <a:t>Adelie  vs Chinstrap:  p =        different?  Y / N
+Adelie  vs Gentoo:     p =        different?  Y / N
+Chinstrap vs Gentoo:   p =        different?  Y / N</a:t>
+            </a:r>
+          </a:p>
+          <a:p>
+            <a:pPr lvl="0" indent="0" marL="0">
+              <a:buNone/>
+            </a:pPr>
+            <a:r>
+              <a:rPr b="1"/>
+              <a:t>▶ Run this (compact letter display):</a:t>
+            </a:r>
+          </a:p>
+          <a:p>
+            <a:pPr lvl="0" indent="0">
+              <a:buNone/>
+            </a:pPr>
+            <a:r>
+              <a:rPr>
+                <a:solidFill>
+                  <a:srgbClr val="5E5E5E"/>
+                </a:solidFill>
+                <a:latin typeface="Courier"/>
+              </a:rPr>
+              <a:t># Groups sharing a letter are NOT different -------------</a:t>
+            </a:r>
+            <a:br/>
+            <a:r>
+              <a:rPr>
+                <a:solidFill>
+                  <a:srgbClr val="003B4F"/>
+                </a:solidFill>
+                <a:latin typeface="Courier"/>
+              </a:rPr>
+              <a:t>multcomp</a:t>
+            </a:r>
+            <a:r>
+              <a:rPr>
+                <a:solidFill>
+                  <a:srgbClr val="5E5E5E"/>
+                </a:solidFill>
+                <a:latin typeface="Courier"/>
+              </a:rPr>
+              <a:t>::</a:t>
+            </a:r>
+            <a:r>
+              <a:rPr>
+                <a:solidFill>
+                  <a:srgbClr val="4758AB"/>
+                </a:solidFill>
+                <a:latin typeface="Courier"/>
+              </a:rPr>
+              <a:t>cld</a:t>
+            </a:r>
+            <a:r>
+              <a:rPr>
+                <a:solidFill>
+                  <a:srgbClr val="003B4F"/>
+                </a:solidFill>
+                <a:latin typeface="Courier"/>
+              </a:rPr>
+              <a:t>(mass_emm</a:t>
+            </a:r>
+            <a:r>
+              <a:rPr>
+                <a:solidFill>
+                  <a:srgbClr val="5E5E5E"/>
+                </a:solidFill>
+                <a:latin typeface="Courier"/>
+              </a:rPr>
+              <a:t>$</a:t>
+            </a:r>
+            <a:r>
+              <a:rPr>
+                <a:solidFill>
+                  <a:srgbClr val="003B4F"/>
+                </a:solidFill>
+                <a:latin typeface="Courier"/>
+              </a:rPr>
+              <a:t>emmeans, </a:t>
+            </a:r>
+            <a:r>
+              <a:rPr>
+                <a:solidFill>
+                  <a:srgbClr val="657422"/>
+                </a:solidFill>
+                <a:latin typeface="Courier"/>
+              </a:rPr>
+              <a:t>Letters =</a:t>
+            </a:r>
+            <a:r>
+              <a:rPr>
+                <a:solidFill>
+                  <a:srgbClr val="003B4F"/>
+                </a:solidFill>
+                <a:latin typeface="Courier"/>
+              </a:rPr>
+              <a:t> letters)</a:t>
+            </a:r>
+          </a:p>
+          <a:p>
+            <a:pPr lvl="0" indent="0" marL="0">
+              <a:buNone/>
+            </a:pPr>
+            <a:r>
+              <a:rPr/>
+              <a:t>✏️ </a:t>
+            </a:r>
+            <a:r>
+              <a:rPr b="1"/>
+              <a:t>Your turn:</a:t>
+            </a:r>
+            <a:r>
+              <a:rPr/>
+              <a:t> Write the letter for each species. Do any share a letter?</a:t>
+            </a:r>
+          </a:p>
+          <a:p>
+            <a:pPr lvl="0" indent="0">
+              <a:buNone/>
+            </a:pPr>
+            <a:r>
+              <a:rPr>
+                <a:latin typeface="Courier"/>
+              </a:rPr>
+              <a:t>Adelie:      Chinstrap:      Gentoo:
+Any species share a letter (i.e. not different)?  Y / N</a:t>
+            </a:r>
+          </a:p>
+        </p:txBody>
+      </p:sp>
+    </p:spTree>
+  </p:cSld>
+</p:sld>
+</file>
+
+<file path=ppt/slides/slide16.xml><?xml version="1.0" encoding="utf-8"?>
+<p:sld xmlns:a="http://schemas.openxmlformats.org/drawingml/2006/main" xmlns:r="http://schemas.openxmlformats.org/officeDocument/2006/relationships" xmlns:p="http://schemas.openxmlformats.org/presentationml/2006/main">
+  <p:cSld>
+    <p:spTree>
+      <p:nvGrpSpPr>
+        <p:cNvPr id="1" name=""/>
+        <p:cNvGrpSpPr/>
+        <p:nvPr/>
+      </p:nvGrpSpPr>
+      <p:grpSpPr>
+        <a:xfrm>
+          <a:off x="0" y="0"/>
+          <a:ext cx="0" cy="0"/>
+          <a:chOff x="0" y="0"/>
+          <a:chExt cx="0" cy="0"/>
+        </a:xfrm>
+      </p:grpSpPr>
+      <p:sp>
+        <p:nvSpPr>
+          <p:cNvPr id="2" name="Title 1"/>
+          <p:cNvSpPr>
+            <a:spLocks noGrp="1"/>
+          </p:cNvSpPr>
+          <p:nvPr>
+            <p:ph type="title"/>
+          </p:nvPr>
+        </p:nvSpPr>
+        <p:spPr>
+          <a:xfrm>
+            <a:off x="0" y="0"/>
+            <a:ext cx="9144000" cy="582780"/>
+          </a:xfrm>
+        </p:spPr>
+        <p:txBody>
+          <a:bodyPr/>
+          <a:lstStyle/>
+          <a:p>
+            <a:pPr lvl="0" indent="0" marL="0">
+              <a:buNone/>
+            </a:pPr>
+            <a:r>
+              <a:rPr/>
+              <a:t>Part 10 · Plot the result</a:t>
+            </a:r>
+          </a:p>
+        </p:txBody>
+      </p:sp>
+      <p:sp>
+        <p:nvSpPr>
+          <p:cNvPr id="3" name="Content Placeholder 2"/>
+          <p:cNvSpPr>
+            <a:spLocks noGrp="1"/>
+          </p:cNvSpPr>
+          <p:nvPr>
+            <p:ph idx="1"/>
+          </p:nvPr>
+        </p:nvSpPr>
+        <p:spPr/>
+        <p:txBody>
+          <a:bodyPr/>
+          <a:lstStyle/>
+          <a:p>
+            <a:pPr lvl="0" indent="0" marL="0">
+              <a:buNone/>
+            </a:pPr>
+            <a:r>
+              <a:rPr b="1"/>
+              <a:t>▶ Run this:</a:t>
+            </a:r>
+          </a:p>
+          <a:p>
+            <a:pPr lvl="0" indent="0">
+              <a:buNone/>
+            </a:pPr>
+            <a:r>
+              <a:rPr>
+                <a:solidFill>
+                  <a:srgbClr val="5E5E5E"/>
+                </a:solidFill>
+                <a:latin typeface="Courier"/>
+              </a:rPr>
+              <a:t># Estimated means with 95% CI ---------------------------</a:t>
+            </a:r>
+            <a:br/>
+            <a:r>
+              <a:rPr>
+                <a:solidFill>
+                  <a:srgbClr val="003B4F"/>
+                </a:solidFill>
+                <a:latin typeface="Courier"/>
+              </a:rPr>
+              <a:t>mass_emm_plot &lt;- </a:t>
+            </a:r>
+            <a:r>
+              <a:rPr>
+                <a:solidFill>
+                  <a:srgbClr val="4758AB"/>
+                </a:solidFill>
+                <a:latin typeface="Courier"/>
+              </a:rPr>
+              <a:t>as.data.frame</a:t>
+            </a:r>
+            <a:r>
+              <a:rPr>
+                <a:solidFill>
+                  <a:srgbClr val="003B4F"/>
+                </a:solidFill>
+                <a:latin typeface="Courier"/>
+              </a:rPr>
+              <a:t>(mass_emm</a:t>
+            </a:r>
+            <a:r>
+              <a:rPr>
+                <a:solidFill>
+                  <a:srgbClr val="5E5E5E"/>
+                </a:solidFill>
+                <a:latin typeface="Courier"/>
+              </a:rPr>
+              <a:t>$</a:t>
+            </a:r>
+            <a:r>
+              <a:rPr>
+                <a:solidFill>
+                  <a:srgbClr val="003B4F"/>
+                </a:solidFill>
+                <a:latin typeface="Courier"/>
+              </a:rPr>
+              <a:t>emmeans) </a:t>
+            </a:r>
+            <a:r>
+              <a:rPr>
+                <a:solidFill>
+                  <a:srgbClr val="5E5E5E"/>
+                </a:solidFill>
+                <a:latin typeface="Courier"/>
+              </a:rPr>
+              <a:t>%&gt;%</a:t>
+            </a:r>
+            <a:br/>
+            <a:r>
+              <a:rPr>
+                <a:solidFill>
+                  <a:srgbClr val="003B4F"/>
+                </a:solidFill>
+                <a:latin typeface="Courier"/>
+              </a:rPr>
+              <a:t>  </a:t>
+            </a:r>
+            <a:r>
+              <a:rPr>
+                <a:solidFill>
+                  <a:srgbClr val="4758AB"/>
+                </a:solidFill>
+                <a:latin typeface="Courier"/>
+              </a:rPr>
+              <a:t>ggplot</a:t>
+            </a:r>
+            <a:r>
+              <a:rPr>
+                <a:solidFill>
+                  <a:srgbClr val="003B4F"/>
+                </a:solidFill>
+                <a:latin typeface="Courier"/>
+              </a:rPr>
+              <a:t>(</a:t>
+            </a:r>
+            <a:r>
+              <a:rPr>
+                <a:solidFill>
+                  <a:srgbClr val="4758AB"/>
+                </a:solidFill>
+                <a:latin typeface="Courier"/>
+              </a:rPr>
+              <a:t>aes</a:t>
+            </a:r>
+            <a:r>
+              <a:rPr>
+                <a:solidFill>
+                  <a:srgbClr val="003B4F"/>
+                </a:solidFill>
+                <a:latin typeface="Courier"/>
+              </a:rPr>
+              <a:t>(</a:t>
+            </a:r>
+            <a:r>
+              <a:rPr>
+                <a:solidFill>
+                  <a:srgbClr val="657422"/>
+                </a:solidFill>
+                <a:latin typeface="Courier"/>
+              </a:rPr>
+              <a:t>x =</a:t>
+            </a:r>
+            <a:r>
+              <a:rPr>
+                <a:solidFill>
+                  <a:srgbClr val="003B4F"/>
+                </a:solidFill>
+                <a:latin typeface="Courier"/>
+              </a:rPr>
+              <a:t> species, </a:t>
+            </a:r>
+            <a:r>
+              <a:rPr>
+                <a:solidFill>
+                  <a:srgbClr val="657422"/>
+                </a:solidFill>
+                <a:latin typeface="Courier"/>
+              </a:rPr>
+              <a:t>y =</a:t>
+            </a:r>
+            <a:r>
+              <a:rPr>
+                <a:solidFill>
+                  <a:srgbClr val="003B4F"/>
+                </a:solidFill>
+                <a:latin typeface="Courier"/>
+              </a:rPr>
+              <a:t> emmean, </a:t>
+            </a:r>
+            <a:r>
+              <a:rPr>
+                <a:solidFill>
+                  <a:srgbClr val="657422"/>
+                </a:solidFill>
+                <a:latin typeface="Courier"/>
+              </a:rPr>
+              <a:t>color =</a:t>
+            </a:r>
+            <a:r>
+              <a:rPr>
+                <a:solidFill>
+                  <a:srgbClr val="003B4F"/>
+                </a:solidFill>
+                <a:latin typeface="Courier"/>
+              </a:rPr>
+              <a:t> species)) </a:t>
+            </a:r>
+            <a:r>
+              <a:rPr>
+                <a:solidFill>
+                  <a:srgbClr val="5E5E5E"/>
+                </a:solidFill>
+                <a:latin typeface="Courier"/>
+              </a:rPr>
+              <a:t>+</a:t>
+            </a:r>
+            <a:br/>
+            <a:r>
+              <a:rPr>
+                <a:solidFill>
+                  <a:srgbClr val="003B4F"/>
+                </a:solidFill>
+                <a:latin typeface="Courier"/>
+              </a:rPr>
+              <a:t>  </a:t>
+            </a:r>
+            <a:r>
+              <a:rPr>
+                <a:solidFill>
+                  <a:srgbClr val="4758AB"/>
+                </a:solidFill>
+                <a:latin typeface="Courier"/>
+              </a:rPr>
+              <a:t>geom_point</a:t>
+            </a:r>
+            <a:r>
+              <a:rPr>
+                <a:solidFill>
+                  <a:srgbClr val="003B4F"/>
+                </a:solidFill>
+                <a:latin typeface="Courier"/>
+              </a:rPr>
+              <a:t>(</a:t>
+            </a:r>
+            <a:r>
+              <a:rPr>
+                <a:solidFill>
+                  <a:srgbClr val="657422"/>
+                </a:solidFill>
+                <a:latin typeface="Courier"/>
+              </a:rPr>
+              <a:t>size =</a:t>
+            </a:r>
+            <a:r>
+              <a:rPr>
+                <a:solidFill>
+                  <a:srgbClr val="003B4F"/>
+                </a:solidFill>
+                <a:latin typeface="Courier"/>
+              </a:rPr>
+              <a:t> </a:t>
+            </a:r>
+            <a:r>
+              <a:rPr>
+                <a:solidFill>
+                  <a:srgbClr val="AD0000"/>
+                </a:solidFill>
+                <a:latin typeface="Courier"/>
+              </a:rPr>
+              <a:t>3</a:t>
+            </a:r>
+            <a:r>
+              <a:rPr>
+                <a:solidFill>
+                  <a:srgbClr val="003B4F"/>
+                </a:solidFill>
+                <a:latin typeface="Courier"/>
+              </a:rPr>
+              <a:t>) </a:t>
+            </a:r>
+            <a:r>
+              <a:rPr>
+                <a:solidFill>
+                  <a:srgbClr val="5E5E5E"/>
+                </a:solidFill>
+                <a:latin typeface="Courier"/>
+              </a:rPr>
+              <a:t>+</a:t>
+            </a:r>
+            <a:br/>
+            <a:r>
+              <a:rPr>
+                <a:solidFill>
+                  <a:srgbClr val="003B4F"/>
+                </a:solidFill>
+                <a:latin typeface="Courier"/>
+              </a:rPr>
+              <a:t>  </a:t>
+            </a:r>
+            <a:r>
+              <a:rPr>
+                <a:solidFill>
+                  <a:srgbClr val="4758AB"/>
+                </a:solidFill>
+                <a:latin typeface="Courier"/>
+              </a:rPr>
+              <a:t>geom_errorbar</a:t>
+            </a:r>
+            <a:r>
+              <a:rPr>
+                <a:solidFill>
+                  <a:srgbClr val="003B4F"/>
+                </a:solidFill>
+                <a:latin typeface="Courier"/>
+              </a:rPr>
+              <a:t>(</a:t>
+            </a:r>
+            <a:r>
+              <a:rPr>
+                <a:solidFill>
+                  <a:srgbClr val="4758AB"/>
+                </a:solidFill>
+                <a:latin typeface="Courier"/>
+              </a:rPr>
+              <a:t>aes</a:t>
+            </a:r>
+            <a:r>
+              <a:rPr>
+                <a:solidFill>
+                  <a:srgbClr val="003B4F"/>
+                </a:solidFill>
+                <a:latin typeface="Courier"/>
+              </a:rPr>
+              <a:t>(</a:t>
+            </a:r>
+            <a:r>
+              <a:rPr>
+                <a:solidFill>
+                  <a:srgbClr val="657422"/>
+                </a:solidFill>
+                <a:latin typeface="Courier"/>
+              </a:rPr>
+              <a:t>ymin =</a:t>
+            </a:r>
+            <a:r>
+              <a:rPr>
+                <a:solidFill>
+                  <a:srgbClr val="003B4F"/>
+                </a:solidFill>
+                <a:latin typeface="Courier"/>
+              </a:rPr>
+              <a:t> lower.CL, </a:t>
+            </a:r>
+            <a:r>
+              <a:rPr>
+                <a:solidFill>
+                  <a:srgbClr val="657422"/>
+                </a:solidFill>
+                <a:latin typeface="Courier"/>
+              </a:rPr>
+              <a:t>ymax =</a:t>
+            </a:r>
+            <a:r>
+              <a:rPr>
+                <a:solidFill>
+                  <a:srgbClr val="003B4F"/>
+                </a:solidFill>
+                <a:latin typeface="Courier"/>
+              </a:rPr>
+              <a:t> upper.CL),</a:t>
+            </a:r>
+            <a:br/>
+            <a:r>
+              <a:rPr>
+                <a:solidFill>
+                  <a:srgbClr val="003B4F"/>
+                </a:solidFill>
+                <a:latin typeface="Courier"/>
+              </a:rPr>
+              <a:t>                </a:t>
+            </a:r>
+            <a:r>
+              <a:rPr>
+                <a:solidFill>
+                  <a:srgbClr val="657422"/>
+                </a:solidFill>
+                <a:latin typeface="Courier"/>
+              </a:rPr>
+              <a:t>width =</a:t>
+            </a:r>
+            <a:r>
+              <a:rPr>
+                <a:solidFill>
+                  <a:srgbClr val="003B4F"/>
+                </a:solidFill>
+                <a:latin typeface="Courier"/>
+              </a:rPr>
+              <a:t> </a:t>
+            </a:r>
+            <a:r>
+              <a:rPr>
+                <a:solidFill>
+                  <a:srgbClr val="AD0000"/>
+                </a:solidFill>
+                <a:latin typeface="Courier"/>
+              </a:rPr>
+              <a:t>0.15</a:t>
+            </a:r>
+            <a:r>
+              <a:rPr>
+                <a:solidFill>
+                  <a:srgbClr val="003B4F"/>
+                </a:solidFill>
+                <a:latin typeface="Courier"/>
+              </a:rPr>
+              <a:t>, </a:t>
+            </a:r>
+            <a:r>
+              <a:rPr>
+                <a:solidFill>
+                  <a:srgbClr val="657422"/>
+                </a:solidFill>
+                <a:latin typeface="Courier"/>
+              </a:rPr>
+              <a:t>linewidth =</a:t>
+            </a:r>
+            <a:r>
+              <a:rPr>
+                <a:solidFill>
+                  <a:srgbClr val="003B4F"/>
+                </a:solidFill>
+                <a:latin typeface="Courier"/>
+              </a:rPr>
+              <a:t> </a:t>
+            </a:r>
+            <a:r>
+              <a:rPr>
+                <a:solidFill>
+                  <a:srgbClr val="AD0000"/>
+                </a:solidFill>
+                <a:latin typeface="Courier"/>
+              </a:rPr>
+              <a:t>0.9</a:t>
+            </a:r>
+            <a:r>
+              <a:rPr>
+                <a:solidFill>
+                  <a:srgbClr val="003B4F"/>
+                </a:solidFill>
+                <a:latin typeface="Courier"/>
+              </a:rPr>
+              <a:t>) </a:t>
+            </a:r>
+            <a:r>
+              <a:rPr>
+                <a:solidFill>
+                  <a:srgbClr val="5E5E5E"/>
+                </a:solidFill>
+                <a:latin typeface="Courier"/>
+              </a:rPr>
+              <a:t>+</a:t>
+            </a:r>
+            <a:br/>
+            <a:r>
+              <a:rPr>
+                <a:solidFill>
+                  <a:srgbClr val="003B4F"/>
+                </a:solidFill>
+                <a:latin typeface="Courier"/>
+              </a:rPr>
+              <a:t>  </a:t>
+            </a:r>
+            <a:r>
+              <a:rPr>
+                <a:solidFill>
+                  <a:srgbClr val="4758AB"/>
+                </a:solidFill>
+                <a:latin typeface="Courier"/>
+              </a:rPr>
+              <a:t>labs</a:t>
+            </a:r>
+            <a:r>
+              <a:rPr>
+                <a:solidFill>
+                  <a:srgbClr val="003B4F"/>
+                </a:solidFill>
+                <a:latin typeface="Courier"/>
+              </a:rPr>
+              <a:t>(</a:t>
+            </a:r>
+            <a:r>
+              <a:rPr>
+                <a:solidFill>
+                  <a:srgbClr val="657422"/>
+                </a:solidFill>
+                <a:latin typeface="Courier"/>
+              </a:rPr>
+              <a:t>x =</a:t>
+            </a:r>
+            <a:r>
+              <a:rPr>
+                <a:solidFill>
+                  <a:srgbClr val="003B4F"/>
+                </a:solidFill>
+                <a:latin typeface="Courier"/>
+              </a:rPr>
+              <a:t> </a:t>
+            </a:r>
+            <a:r>
+              <a:rPr>
+                <a:solidFill>
+                  <a:srgbClr val="20794D"/>
+                </a:solidFill>
+                <a:latin typeface="Courier"/>
+              </a:rPr>
+              <a:t>"Species"</a:t>
+            </a:r>
+            <a:r>
+              <a:rPr>
+                <a:solidFill>
+                  <a:srgbClr val="003B4F"/>
+                </a:solidFill>
+                <a:latin typeface="Courier"/>
+              </a:rPr>
+              <a:t>, </a:t>
+            </a:r>
+            <a:r>
+              <a:rPr>
+                <a:solidFill>
+                  <a:srgbClr val="657422"/>
+                </a:solidFill>
+                <a:latin typeface="Courier"/>
+              </a:rPr>
+              <a:t>y =</a:t>
+            </a:r>
+            <a:r>
+              <a:rPr>
+                <a:solidFill>
+                  <a:srgbClr val="003B4F"/>
+                </a:solidFill>
+                <a:latin typeface="Courier"/>
+              </a:rPr>
+              <a:t> </a:t>
+            </a:r>
+            <a:r>
+              <a:rPr>
+                <a:solidFill>
+                  <a:srgbClr val="20794D"/>
+                </a:solidFill>
+                <a:latin typeface="Courier"/>
+              </a:rPr>
+              <a:t>"Estimated mean mass (g)"</a:t>
+            </a:r>
+            <a:r>
+              <a:rPr>
+                <a:solidFill>
+                  <a:srgbClr val="003B4F"/>
+                </a:solidFill>
+                <a:latin typeface="Courier"/>
+              </a:rPr>
+              <a:t>) </a:t>
+            </a:r>
+            <a:r>
+              <a:rPr>
+                <a:solidFill>
+                  <a:srgbClr val="5E5E5E"/>
+                </a:solidFill>
+                <a:latin typeface="Courier"/>
+              </a:rPr>
+              <a:t>+</a:t>
+            </a:r>
+            <a:br/>
+            <a:r>
+              <a:rPr>
+                <a:solidFill>
+                  <a:srgbClr val="003B4F"/>
+                </a:solidFill>
+                <a:latin typeface="Courier"/>
+              </a:rPr>
+              <a:t>  </a:t>
+            </a:r>
+            <a:r>
+              <a:rPr>
+                <a:solidFill>
+                  <a:srgbClr val="4758AB"/>
+                </a:solidFill>
+                <a:latin typeface="Courier"/>
+              </a:rPr>
+              <a:t>theme_minimal</a:t>
+            </a:r>
+            <a:r>
+              <a:rPr>
+                <a:solidFill>
+                  <a:srgbClr val="003B4F"/>
+                </a:solidFill>
+                <a:latin typeface="Courier"/>
+              </a:rPr>
+              <a:t>() </a:t>
+            </a:r>
+            <a:r>
+              <a:rPr>
+                <a:solidFill>
+                  <a:srgbClr val="5E5E5E"/>
+                </a:solidFill>
+                <a:latin typeface="Courier"/>
+              </a:rPr>
+              <a:t>+</a:t>
+            </a:r>
+            <a:br/>
+            <a:r>
+              <a:rPr>
+                <a:solidFill>
+                  <a:srgbClr val="003B4F"/>
+                </a:solidFill>
+                <a:latin typeface="Courier"/>
+              </a:rPr>
+              <a:t>  </a:t>
+            </a:r>
+            <a:r>
+              <a:rPr>
+                <a:solidFill>
+                  <a:srgbClr val="4758AB"/>
+                </a:solidFill>
+                <a:latin typeface="Courier"/>
+              </a:rPr>
+              <a:t>theme</a:t>
+            </a:r>
+            <a:r>
+              <a:rPr>
+                <a:solidFill>
+                  <a:srgbClr val="003B4F"/>
+                </a:solidFill>
+                <a:latin typeface="Courier"/>
+              </a:rPr>
+              <a:t>(</a:t>
+            </a:r>
+            <a:r>
+              <a:rPr>
+                <a:solidFill>
+                  <a:srgbClr val="657422"/>
+                </a:solidFill>
+                <a:latin typeface="Courier"/>
+              </a:rPr>
+              <a:t>legend.position =</a:t>
+            </a:r>
+            <a:r>
+              <a:rPr>
+                <a:solidFill>
+                  <a:srgbClr val="003B4F"/>
+                </a:solidFill>
+                <a:latin typeface="Courier"/>
+              </a:rPr>
+              <a:t> </a:t>
+            </a:r>
+            <a:r>
+              <a:rPr>
+                <a:solidFill>
+                  <a:srgbClr val="20794D"/>
+                </a:solidFill>
+                <a:latin typeface="Courier"/>
+              </a:rPr>
+              <a:t>"none"</a:t>
+            </a:r>
+            <a:r>
+              <a:rPr>
+                <a:solidFill>
+                  <a:srgbClr val="003B4F"/>
+                </a:solidFill>
+                <a:latin typeface="Courier"/>
+              </a:rPr>
+              <a:t>)</a:t>
+            </a:r>
+            <a:br/>
+            <a:br/>
+            <a:r>
+              <a:rPr>
+                <a:solidFill>
+                  <a:srgbClr val="003B4F"/>
+                </a:solidFill>
+                <a:latin typeface="Courier"/>
+              </a:rPr>
+              <a:t>mass_emm_plot</a:t>
+            </a:r>
+          </a:p>
+          <a:p>
+            <a:pPr lvl="0" indent="0">
+              <a:buNone/>
+            </a:pPr>
+            <a:r>
+              <a:rPr>
+                <a:solidFill>
+                  <a:srgbClr val="5E5E5E"/>
+                </a:solidFill>
+                <a:latin typeface="Courier"/>
+              </a:rPr>
+              <a:t># Save it to the figures folder -------------------------</a:t>
+            </a:r>
+            <a:br/>
+            <a:r>
+              <a:rPr>
+                <a:solidFill>
+                  <a:srgbClr val="4758AB"/>
+                </a:solidFill>
+                <a:latin typeface="Courier"/>
+              </a:rPr>
+              <a:t>ggsave</a:t>
+            </a:r>
+            <a:r>
+              <a:rPr>
+                <a:solidFill>
+                  <a:srgbClr val="003B4F"/>
+                </a:solidFill>
+                <a:latin typeface="Courier"/>
+              </a:rPr>
+              <a:t>(</a:t>
+            </a:r>
+            <a:r>
+              <a:rPr>
+                <a:solidFill>
+                  <a:srgbClr val="20794D"/>
+                </a:solidFill>
+                <a:latin typeface="Courier"/>
+              </a:rPr>
+              <a:t>"figures/penguin_mass_emmeans.png"</a:t>
+            </a:r>
+            <a:r>
+              <a:rPr>
+                <a:solidFill>
+                  <a:srgbClr val="003B4F"/>
+                </a:solidFill>
+                <a:latin typeface="Courier"/>
+              </a:rPr>
+              <a:t>,</a:t>
+            </a:r>
+            <a:br/>
+            <a:r>
+              <a:rPr>
+                <a:solidFill>
+                  <a:srgbClr val="003B4F"/>
+                </a:solidFill>
+                <a:latin typeface="Courier"/>
+              </a:rPr>
+              <a:t>       </a:t>
+            </a:r>
+            <a:r>
+              <a:rPr>
+                <a:solidFill>
+                  <a:srgbClr val="657422"/>
+                </a:solidFill>
+                <a:latin typeface="Courier"/>
+              </a:rPr>
+              <a:t>plot =</a:t>
+            </a:r>
+            <a:r>
+              <a:rPr>
+                <a:solidFill>
+                  <a:srgbClr val="003B4F"/>
+                </a:solidFill>
+                <a:latin typeface="Courier"/>
+              </a:rPr>
+              <a:t> mass_emm_plot,</a:t>
+            </a:r>
+            <a:br/>
+            <a:r>
+              <a:rPr>
+                <a:solidFill>
+                  <a:srgbClr val="003B4F"/>
+                </a:solidFill>
+                <a:latin typeface="Courier"/>
+              </a:rPr>
+              <a:t>       </a:t>
+            </a:r>
+            <a:r>
+              <a:rPr>
+                <a:solidFill>
+                  <a:srgbClr val="657422"/>
+                </a:solidFill>
+                <a:latin typeface="Courier"/>
+              </a:rPr>
+              <a:t>width =</a:t>
+            </a:r>
+            <a:r>
+              <a:rPr>
+                <a:solidFill>
+                  <a:srgbClr val="003B4F"/>
+                </a:solidFill>
+                <a:latin typeface="Courier"/>
+              </a:rPr>
+              <a:t> </a:t>
+            </a:r>
+            <a:r>
+              <a:rPr>
+                <a:solidFill>
+                  <a:srgbClr val="AD0000"/>
+                </a:solidFill>
+                <a:latin typeface="Courier"/>
+              </a:rPr>
+              <a:t>5</a:t>
+            </a:r>
+            <a:r>
+              <a:rPr>
+                <a:solidFill>
+                  <a:srgbClr val="003B4F"/>
+                </a:solidFill>
+                <a:latin typeface="Courier"/>
+              </a:rPr>
+              <a:t>, </a:t>
+            </a:r>
+            <a:r>
+              <a:rPr>
+                <a:solidFill>
+                  <a:srgbClr val="657422"/>
+                </a:solidFill>
+                <a:latin typeface="Courier"/>
+              </a:rPr>
+              <a:t>height =</a:t>
+            </a:r>
+            <a:r>
+              <a:rPr>
+                <a:solidFill>
+                  <a:srgbClr val="003B4F"/>
+                </a:solidFill>
+                <a:latin typeface="Courier"/>
+              </a:rPr>
+              <a:t> </a:t>
+            </a:r>
+            <a:r>
+              <a:rPr>
+                <a:solidFill>
+                  <a:srgbClr val="AD0000"/>
+                </a:solidFill>
+                <a:latin typeface="Courier"/>
+              </a:rPr>
+              <a:t>5</a:t>
+            </a:r>
+            <a:r>
+              <a:rPr>
+                <a:solidFill>
+                  <a:srgbClr val="003B4F"/>
+                </a:solidFill>
+                <a:latin typeface="Courier"/>
+              </a:rPr>
+              <a:t>, </a:t>
+            </a:r>
+            <a:r>
+              <a:rPr>
+                <a:solidFill>
+                  <a:srgbClr val="657422"/>
+                </a:solidFill>
+                <a:latin typeface="Courier"/>
+              </a:rPr>
+              <a:t>units =</a:t>
+            </a:r>
+            <a:r>
+              <a:rPr>
+                <a:solidFill>
+                  <a:srgbClr val="003B4F"/>
+                </a:solidFill>
+                <a:latin typeface="Courier"/>
+              </a:rPr>
+              <a:t> </a:t>
+            </a:r>
+            <a:r>
+              <a:rPr>
+                <a:solidFill>
+                  <a:srgbClr val="20794D"/>
+                </a:solidFill>
+                <a:latin typeface="Courier"/>
+              </a:rPr>
+              <a:t>"in"</a:t>
+            </a:r>
+            <a:r>
+              <a:rPr>
+                <a:solidFill>
+                  <a:srgbClr val="003B4F"/>
+                </a:solidFill>
+                <a:latin typeface="Courier"/>
+              </a:rPr>
+              <a:t>, </a:t>
+            </a:r>
+            <a:r>
+              <a:rPr>
+                <a:solidFill>
+                  <a:srgbClr val="657422"/>
+                </a:solidFill>
+                <a:latin typeface="Courier"/>
+              </a:rPr>
+              <a:t>dpi =</a:t>
+            </a:r>
+            <a:r>
+              <a:rPr>
+                <a:solidFill>
+                  <a:srgbClr val="003B4F"/>
+                </a:solidFill>
+                <a:latin typeface="Courier"/>
+              </a:rPr>
+              <a:t> </a:t>
+            </a:r>
+            <a:r>
+              <a:rPr>
+                <a:solidFill>
+                  <a:srgbClr val="AD0000"/>
+                </a:solidFill>
+                <a:latin typeface="Courier"/>
+              </a:rPr>
+              <a:t>300</a:t>
+            </a:r>
+            <a:r>
+              <a:rPr>
+                <a:solidFill>
+                  <a:srgbClr val="003B4F"/>
+                </a:solidFill>
+                <a:latin typeface="Courier"/>
+              </a:rPr>
+              <a:t>)</a:t>
+            </a:r>
+          </a:p>
+          <a:p>
+            <a:pPr lvl="0" indent="0" marL="0">
+              <a:buNone/>
+            </a:pPr>
+            <a:r>
+              <a:rPr/>
+              <a:t>✏️ </a:t>
+            </a:r>
+            <a:r>
+              <a:rPr b="1"/>
+              <a:t>Your turn:</a:t>
+            </a:r>
+            <a:r>
+              <a:rPr/>
+              <a:t> Do any of the confidence intervals overlap? What does that suggest?</a:t>
+            </a:r>
+          </a:p>
+          <a:p>
+            <a:pPr lvl="0" indent="0">
+              <a:buNone/>
+            </a:pPr>
+            <a:r>
+              <a:rPr>
+                <a:latin typeface="Courier"/>
+              </a:rPr>
+              <a:t>Your answer:</a:t>
+            </a:r>
+          </a:p>
+        </p:txBody>
+      </p:sp>
+    </p:spTree>
+  </p:cSld>
+</p:sld>
+</file>
+
+<file path=ppt/slides/slide17.xml><?xml version="1.0" encoding="utf-8"?>
+<p:sld xmlns:a="http://schemas.openxmlformats.org/drawingml/2006/main" xmlns:r="http://schemas.openxmlformats.org/officeDocument/2006/relationships" xmlns:p="http://schemas.openxmlformats.org/presentationml/2006/main">
+  <p:cSld>
+    <p:spTree>
+      <p:nvGrpSpPr>
+        <p:cNvPr id="1" name=""/>
+        <p:cNvGrpSpPr/>
+        <p:nvPr/>
+      </p:nvGrpSpPr>
+      <p:grpSpPr>
+        <a:xfrm>
+          <a:off x="0" y="0"/>
+          <a:ext cx="0" cy="0"/>
+          <a:chOff x="0" y="0"/>
+          <a:chExt cx="0" cy="0"/>
+        </a:xfrm>
+      </p:grpSpPr>
+      <p:sp>
+        <p:nvSpPr>
+          <p:cNvPr id="2" name="Title 1"/>
+          <p:cNvSpPr>
+            <a:spLocks noGrp="1"/>
+          </p:cNvSpPr>
+          <p:nvPr>
+            <p:ph type="title"/>
+          </p:nvPr>
+        </p:nvSpPr>
+        <p:spPr>
+          <a:xfrm>
+            <a:off x="0" y="0"/>
+            <a:ext cx="9144000" cy="582780"/>
+          </a:xfrm>
+        </p:spPr>
+        <p:txBody>
+          <a:bodyPr/>
+          <a:lstStyle/>
+          <a:p>
+            <a:pPr lvl="0" indent="0" marL="0">
+              <a:buNone/>
+            </a:pPr>
+            <a:r>
+              <a:rPr/>
+              <a:t>Part 11 · Write a results sentence</a:t>
+            </a:r>
+          </a:p>
+        </p:txBody>
+      </p:sp>
+      <p:sp>
+        <p:nvSpPr>
+          <p:cNvPr id="3" name="Content Placeholder 2"/>
+          <p:cNvSpPr>
+            <a:spLocks noGrp="1"/>
+          </p:cNvSpPr>
+          <p:nvPr>
+            <p:ph idx="1"/>
+          </p:nvPr>
+        </p:nvSpPr>
+        <p:spPr/>
+        <p:txBody>
+          <a:bodyPr/>
+          <a:lstStyle/>
+          <a:p>
+            <a:pPr lvl="0" indent="0" marL="0">
+              <a:buNone/>
+            </a:pPr>
+            <a:r>
+              <a:rPr/>
+              <a:t>✏️ </a:t>
+            </a:r>
+            <a:r>
+              <a:rPr b="1"/>
+              <a:t>Your turn:</a:t>
+            </a:r>
+            <a:r>
+              <a:rPr/>
+              <a:t> Write a complete results sentence. Include the test, F, both df, the </a:t>
+            </a:r>
+            <a:r>
+              <a:rPr i="1"/>
+              <a:t>p</a:t>
+            </a:r>
+            <a:r>
+              <a:rPr/>
+              <a:t>-value, the post-hoc outcome, and the direction (which is heaviest).</a:t>
+            </a:r>
+          </a:p>
+          <a:p>
+            <a:pPr lvl="0" indent="0">
+              <a:buNone/>
+            </a:pPr>
+            <a:r>
+              <a:rPr>
+                <a:latin typeface="Courier"/>
+              </a:rPr>
+              <a:t>Template:
+"Body mass differed significantly among the three penguin species
+(one-way ANOVA: F(__, __) = ____, p ____). Tukey-adjusted comparisons
+showed that ____________________, with __________ heaviest."
+Your sentence:</a:t>
+            </a:r>
+          </a:p>
+        </p:txBody>
+      </p:sp>
+    </p:spTree>
+  </p:cSld>
+</p:sld>
+</file>
+
+<file path=ppt/slides/slide18.xml><?xml version="1.0" encoding="utf-8"?>
+<p:sld xmlns:a="http://schemas.openxmlformats.org/drawingml/2006/main" xmlns:r="http://schemas.openxmlformats.org/officeDocument/2006/relationships" xmlns:p="http://schemas.openxmlformats.org/presentationml/2006/main">
+  <p:cSld>
+    <p:spTree>
+      <p:nvGrpSpPr>
+        <p:cNvPr id="1" name=""/>
+        <p:cNvGrpSpPr/>
+        <p:nvPr/>
+      </p:nvGrpSpPr>
+      <p:grpSpPr>
+        <a:xfrm>
+          <a:off x="0" y="0"/>
+          <a:ext cx="0" cy="0"/>
+          <a:chOff x="0" y="0"/>
+          <a:chExt cx="0" cy="0"/>
+        </a:xfrm>
+      </p:grpSpPr>
+      <p:sp>
+        <p:nvSpPr>
+          <p:cNvPr id="2" name="Title 1"/>
+          <p:cNvSpPr>
+            <a:spLocks noGrp="1"/>
+          </p:cNvSpPr>
+          <p:nvPr>
+            <p:ph type="title"/>
+          </p:nvPr>
+        </p:nvSpPr>
+        <p:spPr>
+          <a:xfrm>
+            <a:off x="0" y="0"/>
+            <a:ext cx="9144000" cy="582780"/>
+          </a:xfrm>
+        </p:spPr>
+        <p:txBody>
+          <a:bodyPr/>
+          <a:lstStyle/>
+          <a:p>
+            <a:pPr lvl="0" indent="0" marL="0">
+              <a:buNone/>
+            </a:pPr>
+            <a:r>
+              <a:rPr/>
+              <a:t>Part 12 · Review and checkpoint</a:t>
+            </a:r>
+          </a:p>
+        </p:txBody>
+      </p:sp>
+      <p:sp>
+        <p:nvSpPr>
+          <p:cNvPr id="3" name="Content Placeholder 2"/>
+          <p:cNvSpPr>
+            <a:spLocks noGrp="1"/>
+          </p:cNvSpPr>
+          <p:nvPr>
+            <p:ph idx="1"/>
+          </p:nvPr>
+        </p:nvSpPr>
+        <p:spPr/>
+        <p:txBody>
+          <a:bodyPr/>
+          <a:lstStyle/>
+          <a:p>
+            <a:pPr lvl="0" indent="0" marL="0">
+              <a:buNone/>
+            </a:pPr>
+            <a:r>
+              <a:rPr/>
+              <a:t>At this point you should be able to:</a:t>
+            </a:r>
+          </a:p>
+          <a:p>
+            <a:pPr lvl="0"/>
+            <a:r>
+              <a:rPr/>
+              <a:t>☐ Explain why many t-tests inflate the false-positive rate</a:t>
+            </a:r>
+          </a:p>
+          <a:p>
+            <a:pPr lvl="0"/>
+            <a:r>
+              <a:rPr/>
+              <a:t>☐ State ANOVA hypotheses with μ notation</a:t>
+            </a:r>
+          </a:p>
+          <a:p>
+            <a:pPr lvl="0"/>
+            <a:r>
+              <a:rPr/>
+              <a:t>☐ Fit </a:t>
+            </a:r>
+            <a:r>
+              <a:rPr>
+                <a:latin typeface="Courier"/>
+              </a:rPr>
+              <a:t>lm(Y ~ group)</a:t>
+            </a:r>
+            <a:r>
+              <a:rPr/>
+              <a:t> and check residual normality + equal variance</a:t>
+            </a:r>
+          </a:p>
+          <a:p>
+            <a:pPr lvl="0"/>
+            <a:r>
+              <a:rPr/>
+              <a:t>☐ Read the F table from </a:t>
+            </a:r>
+            <a:r>
+              <a:rPr>
+                <a:latin typeface="Courier"/>
+              </a:rPr>
+              <a:t>aov()</a:t>
+            </a:r>
+            <a:r>
+              <a:rPr/>
+              <a:t> and </a:t>
+            </a:r>
+            <a:r>
+              <a:rPr>
+                <a:latin typeface="Courier"/>
+              </a:rPr>
+              <a:t>car::Anova(type = "II")</a:t>
+            </a:r>
+          </a:p>
+          <a:p>
+            <a:pPr lvl="0"/>
+            <a:r>
+              <a:rPr/>
+              <a:t>☐ Run </a:t>
+            </a:r>
+            <a:r>
+              <a:rPr>
+                <a:latin typeface="Courier"/>
+              </a:rPr>
+              <a:t>emmeans(model, pairwise ~ group)</a:t>
+            </a:r>
+            <a:r>
+              <a:rPr/>
+              <a:t> and read the pairwise p-values</a:t>
+            </a:r>
+          </a:p>
+          <a:p>
+            <a:pPr lvl="0"/>
+            <a:r>
+              <a:rPr/>
+              <a:t>☐ Interpret a compact letter display</a:t>
+            </a:r>
+          </a:p>
+          <a:p>
+            <a:pPr lvl="0"/>
+            <a:r>
+              <a:rPr/>
+              <a:t>☐ Write a complete ANOVA results sentence</a:t>
+            </a:r>
+          </a:p>
+          <a:p>
+            <a:pPr lvl="0" indent="0" marL="0">
+              <a:buNone/>
+            </a:pPr>
+            <a:r>
+              <a:rPr/>
+              <a:t>✏️ </a:t>
+            </a:r>
+            <a:r>
+              <a:rPr b="1"/>
+              <a:t>Your turn — before you move on:</a:t>
+            </a:r>
+            <a:r>
+              <a:rPr/>
+              <a:t> Run your whole script top to bottom with </a:t>
+            </a:r>
+            <a:r>
+              <a:rPr b="1"/>
+              <a:t>Ctrl/Cmd + Shift + Enter</a:t>
+            </a:r>
+            <a:r>
+              <a:rPr/>
+              <a:t>. Does it run cleanly?</a:t>
+            </a:r>
+          </a:p>
+          <a:p>
+            <a:pPr lvl="0" indent="0">
+              <a:buNone/>
+            </a:pPr>
+            <a:r>
+              <a:rPr>
+                <a:latin typeface="Courier"/>
+              </a:rPr>
+              <a:t>Ran cleanly?  Y / N
+If not, what error appeared:</a:t>
+            </a:r>
+          </a:p>
+        </p:txBody>
+      </p:sp>
+    </p:spTree>
+  </p:cSld>
+</p:sld>
+</file>
+
+<file path=ppt/slides/slide19.xml><?xml version="1.0" encoding="utf-8"?>
+<p:sld xmlns:a="http://schemas.openxmlformats.org/drawingml/2006/main" xmlns:r="http://schemas.openxmlformats.org/officeDocument/2006/relationships" xmlns:p="http://schemas.openxmlformats.org/presentationml/2006/main">
+  <p:cSld>
+    <p:spTree>
+      <p:nvGrpSpPr>
+        <p:cNvPr id="1" name=""/>
+        <p:cNvGrpSpPr/>
+        <p:nvPr/>
+      </p:nvGrpSpPr>
+      <p:grpSpPr>
+        <a:xfrm>
+          <a:off x="0" y="0"/>
+          <a:ext cx="0" cy="0"/>
+          <a:chOff x="0" y="0"/>
+          <a:chExt cx="0" cy="0"/>
+        </a:xfrm>
+      </p:grpSpPr>
+      <p:sp>
+        <p:nvSpPr>
+          <p:cNvPr id="2" name="Title 1"/>
+          <p:cNvSpPr>
+            <a:spLocks noGrp="1"/>
+          </p:cNvSpPr>
+          <p:nvPr>
+            <p:ph type="title"/>
+          </p:nvPr>
+        </p:nvSpPr>
+        <p:spPr>
+          <a:xfrm>
+            <a:off x="0" y="0"/>
+            <a:ext cx="9144000" cy="582780"/>
+          </a:xfrm>
+        </p:spPr>
+        <p:txBody>
+          <a:bodyPr/>
+          <a:lstStyle/>
+          <a:p>
+            <a:pPr lvl="0" indent="0" marL="0">
+              <a:buNone/>
+            </a:pPr>
+            <a:r>
+              <a:rPr/>
+              <a:t>Part 13 · Going further</a:t>
+            </a:r>
+          </a:p>
+        </p:txBody>
+      </p:sp>
+      <p:sp>
+        <p:nvSpPr>
+          <p:cNvPr id="3" name="Content Placeholder 2"/>
+          <p:cNvSpPr>
+            <a:spLocks noGrp="1"/>
+          </p:cNvSpPr>
+          <p:nvPr>
+            <p:ph idx="1"/>
+          </p:nvPr>
+        </p:nvSpPr>
+        <p:spPr/>
+        <p:txBody>
+          <a:bodyPr/>
+          <a:lstStyle/>
+          <a:p>
+            <a:pPr lvl="0" indent="0" marL="1270000">
+              <a:buNone/>
+            </a:pPr>
+            <a:r>
+              <a:rPr sz="2000"/>
+              <a:t>Optional — do this if you finish early or want to push deeper.</a:t>
+            </a:r>
+          </a:p>
+          <a:p>
+            <a:pPr lvl="0" indent="0" marL="0">
+              <a:spcBef>
+                <a:spcPts val="3000"/>
+              </a:spcBef>
+              <a:buNone/>
+            </a:pPr>
+            <a:r>
+              <a:rPr b="1"/>
+              <a:t>Try a different response variable</a:t>
+            </a:r>
+          </a:p>
+          <a:p>
+            <a:pPr lvl="0" indent="0" marL="0">
+              <a:buNone/>
+            </a:pPr>
+            <a:r>
+              <a:rPr b="1"/>
+              <a:t>▶ Try this:</a:t>
+            </a:r>
+            <a:r>
+              <a:rPr/>
+              <a:t> repeat the whole workflow for </a:t>
+            </a:r>
+            <a:r>
+              <a:rPr>
+                <a:latin typeface="Courier"/>
+              </a:rPr>
+              <a:t>flipper_length_mm</a:t>
+            </a:r>
+            <a:r>
+              <a:rPr/>
+              <a:t> instead of body mass.</a:t>
+            </a:r>
+          </a:p>
+          <a:p>
+            <a:pPr lvl="0" indent="0">
+              <a:buNone/>
+            </a:pPr>
+            <a:r>
+              <a:rPr>
+                <a:solidFill>
+                  <a:srgbClr val="5E5E5E"/>
+                </a:solidFill>
+                <a:latin typeface="Courier"/>
+              </a:rPr>
+              <a:t># One-way ANOVA on flipper length -----------------------</a:t>
+            </a:r>
+            <a:br/>
+            <a:r>
+              <a:rPr>
+                <a:solidFill>
+                  <a:srgbClr val="003B4F"/>
+                </a:solidFill>
+                <a:latin typeface="Courier"/>
+              </a:rPr>
+              <a:t>flipper_df &lt;- penguins </a:t>
+            </a:r>
+            <a:r>
+              <a:rPr>
+                <a:solidFill>
+                  <a:srgbClr val="5E5E5E"/>
+                </a:solidFill>
+                <a:latin typeface="Courier"/>
+              </a:rPr>
+              <a:t>%&gt;%</a:t>
+            </a:r>
+            <a:r>
+              <a:rPr>
+                <a:solidFill>
+                  <a:srgbClr val="003B4F"/>
+                </a:solidFill>
+                <a:latin typeface="Courier"/>
+              </a:rPr>
+              <a:t> </a:t>
+            </a:r>
+            <a:r>
+              <a:rPr>
+                <a:solidFill>
+                  <a:srgbClr val="4758AB"/>
+                </a:solidFill>
+                <a:latin typeface="Courier"/>
+              </a:rPr>
+              <a:t>drop_na</a:t>
+            </a:r>
+            <a:r>
+              <a:rPr>
+                <a:solidFill>
+                  <a:srgbClr val="003B4F"/>
+                </a:solidFill>
+                <a:latin typeface="Courier"/>
+              </a:rPr>
+              <a:t>(flipper_length_mm, species)</a:t>
+            </a:r>
+            <a:br/>
+            <a:r>
+              <a:rPr>
+                <a:solidFill>
+                  <a:srgbClr val="003B4F"/>
+                </a:solidFill>
+                <a:latin typeface="Courier"/>
+              </a:rPr>
+              <a:t>flipper_model &lt;- </a:t>
+            </a:r>
+            <a:r>
+              <a:rPr>
+                <a:solidFill>
+                  <a:srgbClr val="4758AB"/>
+                </a:solidFill>
+                <a:latin typeface="Courier"/>
+              </a:rPr>
+              <a:t>lm</a:t>
+            </a:r>
+            <a:r>
+              <a:rPr>
+                <a:solidFill>
+                  <a:srgbClr val="003B4F"/>
+                </a:solidFill>
+                <a:latin typeface="Courier"/>
+              </a:rPr>
+              <a:t>(flipper_length_mm </a:t>
+            </a:r>
+            <a:r>
+              <a:rPr>
+                <a:solidFill>
+                  <a:srgbClr val="5E5E5E"/>
+                </a:solidFill>
+                <a:latin typeface="Courier"/>
+              </a:rPr>
+              <a:t>~</a:t>
+            </a:r>
+            <a:r>
+              <a:rPr>
+                <a:solidFill>
+                  <a:srgbClr val="003B4F"/>
+                </a:solidFill>
+                <a:latin typeface="Courier"/>
+              </a:rPr>
+              <a:t> species, </a:t>
+            </a:r>
+            <a:r>
+              <a:rPr>
+                <a:solidFill>
+                  <a:srgbClr val="657422"/>
+                </a:solidFill>
+                <a:latin typeface="Courier"/>
+              </a:rPr>
+              <a:t>data =</a:t>
+            </a:r>
+            <a:r>
+              <a:rPr>
+                <a:solidFill>
+                  <a:srgbClr val="003B4F"/>
+                </a:solidFill>
+                <a:latin typeface="Courier"/>
+              </a:rPr>
+              <a:t> flipper_df)</a:t>
+            </a:r>
+            <a:br/>
+            <a:br/>
+            <a:r>
+              <a:rPr>
+                <a:solidFill>
+                  <a:srgbClr val="4758AB"/>
+                </a:solidFill>
+                <a:latin typeface="Courier"/>
+              </a:rPr>
+              <a:t>Anova</a:t>
+            </a:r>
+            <a:r>
+              <a:rPr>
+                <a:solidFill>
+                  <a:srgbClr val="003B4F"/>
+                </a:solidFill>
+                <a:latin typeface="Courier"/>
+              </a:rPr>
+              <a:t>(flipper_model, </a:t>
+            </a:r>
+            <a:r>
+              <a:rPr>
+                <a:solidFill>
+                  <a:srgbClr val="657422"/>
+                </a:solidFill>
+                <a:latin typeface="Courier"/>
+              </a:rPr>
+              <a:t>type =</a:t>
+            </a:r>
+            <a:r>
+              <a:rPr>
+                <a:solidFill>
+                  <a:srgbClr val="003B4F"/>
+                </a:solidFill>
+                <a:latin typeface="Courier"/>
+              </a:rPr>
+              <a:t> </a:t>
+            </a:r>
+            <a:r>
+              <a:rPr>
+                <a:solidFill>
+                  <a:srgbClr val="20794D"/>
+                </a:solidFill>
+                <a:latin typeface="Courier"/>
+              </a:rPr>
+              <a:t>"II"</a:t>
+            </a:r>
+            <a:r>
+              <a:rPr>
+                <a:solidFill>
+                  <a:srgbClr val="003B4F"/>
+                </a:solidFill>
+                <a:latin typeface="Courier"/>
+              </a:rPr>
+              <a:t>)</a:t>
+            </a:r>
+            <a:br/>
+            <a:r>
+              <a:rPr>
+                <a:solidFill>
+                  <a:srgbClr val="4758AB"/>
+                </a:solidFill>
+                <a:latin typeface="Courier"/>
+              </a:rPr>
+              <a:t>emmeans</a:t>
+            </a:r>
+            <a:r>
+              <a:rPr>
+                <a:solidFill>
+                  <a:srgbClr val="003B4F"/>
+                </a:solidFill>
+                <a:latin typeface="Courier"/>
+              </a:rPr>
+              <a:t>(flipper_model, pairwise </a:t>
+            </a:r>
+            <a:r>
+              <a:rPr>
+                <a:solidFill>
+                  <a:srgbClr val="5E5E5E"/>
+                </a:solidFill>
+                <a:latin typeface="Courier"/>
+              </a:rPr>
+              <a:t>~</a:t>
+            </a:r>
+            <a:r>
+              <a:rPr>
+                <a:solidFill>
+                  <a:srgbClr val="003B4F"/>
+                </a:solidFill>
+                <a:latin typeface="Courier"/>
+              </a:rPr>
+              <a:t> species)</a:t>
+            </a:r>
+            <a:r>
+              <a:rPr>
+                <a:solidFill>
+                  <a:srgbClr val="5E5E5E"/>
+                </a:solidFill>
+                <a:latin typeface="Courier"/>
+              </a:rPr>
+              <a:t>$</a:t>
+            </a:r>
+            <a:r>
+              <a:rPr>
+                <a:solidFill>
+                  <a:srgbClr val="003B4F"/>
+                </a:solidFill>
+                <a:latin typeface="Courier"/>
+              </a:rPr>
+              <a:t>contrasts</a:t>
+            </a:r>
+          </a:p>
+          <a:p>
+            <a:pPr lvl="0" indent="0" marL="0">
+              <a:buNone/>
+            </a:pPr>
+            <a:r>
+              <a:rPr/>
+              <a:t>✏️ </a:t>
+            </a:r>
+            <a:r>
+              <a:rPr b="1"/>
+              <a:t>Your turn:</a:t>
+            </a:r>
+            <a:r>
+              <a:rPr/>
+              <a:t> Do the species differ in flipper length the same way they differ in mass?</a:t>
+            </a:r>
+          </a:p>
+          <a:p>
+            <a:pPr lvl="0" indent="0">
+              <a:buNone/>
+            </a:pPr>
+            <a:r>
+              <a:rPr>
+                <a:latin typeface="Courier"/>
+              </a:rPr>
+              <a:t>Your answer:</a:t>
+            </a:r>
+          </a:p>
+          <a:p>
+            <a:pPr lvl="0" indent="0" marL="0">
+              <a:spcBef>
+                <a:spcPts val="3000"/>
+              </a:spcBef>
+              <a:buNone/>
+            </a:pPr>
+            <a:r>
+              <a:rPr b="1"/>
+              <a:t>Compare across islands</a:t>
+            </a:r>
+          </a:p>
+          <a:p>
+            <a:pPr lvl="0" indent="0" marL="0">
+              <a:buNone/>
+            </a:pPr>
+            <a:r>
+              <a:rPr b="1"/>
+              <a:t>▶ Try this:</a:t>
+            </a:r>
+            <a:r>
+              <a:rPr/>
+              <a:t> use </a:t>
+            </a:r>
+            <a:r>
+              <a:rPr>
+                <a:latin typeface="Courier"/>
+              </a:rPr>
+              <a:t>island</a:t>
+            </a:r>
+            <a:r>
+              <a:rPr/>
+              <a:t> as the grouping variable instead of </a:t>
+            </a:r>
+            <a:r>
+              <a:rPr>
+                <a:latin typeface="Courier"/>
+              </a:rPr>
+              <a:t>species</a:t>
+            </a:r>
+            <a:r>
+              <a:rPr/>
+              <a:t>.</a:t>
+            </a:r>
+          </a:p>
+          <a:p>
+            <a:pPr lvl="0" indent="0">
+              <a:buNone/>
+            </a:pPr>
+            <a:r>
+              <a:rPr>
+                <a:solidFill>
+                  <a:srgbClr val="003B4F"/>
+                </a:solidFill>
+                <a:latin typeface="Courier"/>
+              </a:rPr>
+              <a:t>island_df &lt;- penguins </a:t>
+            </a:r>
+            <a:r>
+              <a:rPr>
+                <a:solidFill>
+                  <a:srgbClr val="5E5E5E"/>
+                </a:solidFill>
+                <a:latin typeface="Courier"/>
+              </a:rPr>
+              <a:t>%&gt;%</a:t>
+            </a:r>
+            <a:r>
+              <a:rPr>
+                <a:solidFill>
+                  <a:srgbClr val="003B4F"/>
+                </a:solidFill>
+                <a:latin typeface="Courier"/>
+              </a:rPr>
+              <a:t> </a:t>
+            </a:r>
+            <a:r>
+              <a:rPr>
+                <a:solidFill>
+                  <a:srgbClr val="4758AB"/>
+                </a:solidFill>
+                <a:latin typeface="Courier"/>
+              </a:rPr>
+              <a:t>drop_na</a:t>
+            </a:r>
+            <a:r>
+              <a:rPr>
+                <a:solidFill>
+                  <a:srgbClr val="003B4F"/>
+                </a:solidFill>
+                <a:latin typeface="Courier"/>
+              </a:rPr>
+              <a:t>(body_mass_g, island)</a:t>
+            </a:r>
+            <a:br/>
+            <a:r>
+              <a:rPr>
+                <a:solidFill>
+                  <a:srgbClr val="003B4F"/>
+                </a:solidFill>
+                <a:latin typeface="Courier"/>
+              </a:rPr>
+              <a:t>island_model &lt;- </a:t>
+            </a:r>
+            <a:r>
+              <a:rPr>
+                <a:solidFill>
+                  <a:srgbClr val="4758AB"/>
+                </a:solidFill>
+                <a:latin typeface="Courier"/>
+              </a:rPr>
+              <a:t>lm</a:t>
+            </a:r>
+            <a:r>
+              <a:rPr>
+                <a:solidFill>
+                  <a:srgbClr val="003B4F"/>
+                </a:solidFill>
+                <a:latin typeface="Courier"/>
+              </a:rPr>
+              <a:t>(body_mass_g </a:t>
+            </a:r>
+            <a:r>
+              <a:rPr>
+                <a:solidFill>
+                  <a:srgbClr val="5E5E5E"/>
+                </a:solidFill>
+                <a:latin typeface="Courier"/>
+              </a:rPr>
+              <a:t>~</a:t>
+            </a:r>
+            <a:r>
+              <a:rPr>
+                <a:solidFill>
+                  <a:srgbClr val="003B4F"/>
+                </a:solidFill>
+                <a:latin typeface="Courier"/>
+              </a:rPr>
+              <a:t> island, </a:t>
+            </a:r>
+            <a:r>
+              <a:rPr>
+                <a:solidFill>
+                  <a:srgbClr val="657422"/>
+                </a:solidFill>
+                <a:latin typeface="Courier"/>
+              </a:rPr>
+              <a:t>data =</a:t>
+            </a:r>
+            <a:r>
+              <a:rPr>
+                <a:solidFill>
+                  <a:srgbClr val="003B4F"/>
+                </a:solidFill>
+                <a:latin typeface="Courier"/>
+              </a:rPr>
+              <a:t> island_df)</a:t>
+            </a:r>
+            <a:br/>
+            <a:r>
+              <a:rPr>
+                <a:solidFill>
+                  <a:srgbClr val="4758AB"/>
+                </a:solidFill>
+                <a:latin typeface="Courier"/>
+              </a:rPr>
+              <a:t>Anova</a:t>
+            </a:r>
+            <a:r>
+              <a:rPr>
+                <a:solidFill>
+                  <a:srgbClr val="003B4F"/>
+                </a:solidFill>
+                <a:latin typeface="Courier"/>
+              </a:rPr>
+              <a:t>(island_model, </a:t>
+            </a:r>
+            <a:r>
+              <a:rPr>
+                <a:solidFill>
+                  <a:srgbClr val="657422"/>
+                </a:solidFill>
+                <a:latin typeface="Courier"/>
+              </a:rPr>
+              <a:t>type =</a:t>
+            </a:r>
+            <a:r>
+              <a:rPr>
+                <a:solidFill>
+                  <a:srgbClr val="003B4F"/>
+                </a:solidFill>
+                <a:latin typeface="Courier"/>
+              </a:rPr>
+              <a:t> </a:t>
+            </a:r>
+            <a:r>
+              <a:rPr>
+                <a:solidFill>
+                  <a:srgbClr val="20794D"/>
+                </a:solidFill>
+                <a:latin typeface="Courier"/>
+              </a:rPr>
+              <a:t>"II"</a:t>
+            </a:r>
+            <a:r>
+              <a:rPr>
+                <a:solidFill>
+                  <a:srgbClr val="003B4F"/>
+                </a:solidFill>
+                <a:latin typeface="Courier"/>
+              </a:rPr>
+              <a:t>)</a:t>
+            </a:r>
+          </a:p>
+          <a:p>
+            <a:pPr lvl="0" indent="0" marL="0">
+              <a:buNone/>
+            </a:pPr>
+            <a:r>
+              <a:rPr/>
+              <a:t>✏️ </a:t>
+            </a:r>
+            <a:r>
+              <a:rPr b="1"/>
+              <a:t>Your turn:</a:t>
+            </a:r>
+            <a:r>
+              <a:rPr/>
+              <a:t> Why might comparing by island be misleading here? (Hint: which species live on which islands?)</a:t>
+            </a:r>
+          </a:p>
+          <a:p>
+            <a:pPr lvl="0" indent="0">
+              <a:buNone/>
+            </a:pPr>
+            <a:r>
+              <a:rPr>
+                <a:latin typeface="Courier"/>
+              </a:rPr>
+              <a:t>Your answer:</a:t>
+            </a:r>
+          </a:p>
+        </p:txBody>
+      </p:sp>
+    </p:spTree>
+  </p:cSld>
+</p:sld>
+</file>
+
+<file path=ppt/slides/slide2.xml><?xml version="1.0" encoding="utf-8"?>
+<p:sld xmlns:a="http://schemas.openxmlformats.org/drawingml/2006/main" xmlns:r="http://schemas.openxmlformats.org/officeDocument/2006/relationships" xmlns:p="http://schemas.openxmlformats.org/presentationml/2006/main">
+  <p:cSld>
+    <p:spTree>
+      <p:nvGrpSpPr>
+        <p:cNvPr id="1" name=""/>
+        <p:cNvGrpSpPr/>
+        <p:nvPr/>
+      </p:nvGrpSpPr>
+      <p:grpSpPr>
+        <a:xfrm>
+          <a:off x="0" y="0"/>
+          <a:ext cx="0" cy="0"/>
+          <a:chOff x="0" y="0"/>
+          <a:chExt cx="0" cy="0"/>
+        </a:xfrm>
+      </p:grpSpPr>
+      <p:sp>
+        <p:nvSpPr>
+          <p:cNvPr id="2" name="Title 1"/>
+          <p:cNvSpPr>
+            <a:spLocks noGrp="1"/>
+          </p:cNvSpPr>
+          <p:nvPr>
+            <p:ph type="title"/>
+          </p:nvPr>
+        </p:nvSpPr>
+        <p:spPr>
+          <a:xfrm>
+            <a:off x="0" y="0"/>
+            <a:ext cx="9144000" cy="582780"/>
+          </a:xfrm>
+        </p:spPr>
+        <p:txBody>
+          <a:bodyPr/>
+          <a:lstStyle/>
+          <a:p>
+            <a:pPr lvl="0" indent="0" marL="0">
+              <a:buNone/>
+            </a:pPr>
+            <a:r>
+              <a:rPr/>
+              <a:t>One-Way ANOVA — Do Penguin Species Differ in Body Mass?</a:t>
+            </a:r>
+          </a:p>
+        </p:txBody>
+      </p:sp>
+      <p:sp>
+        <p:nvSpPr>
+          <p:cNvPr id="3" name="Content Placeholder 2"/>
+          <p:cNvSpPr>
+            <a:spLocks noGrp="1"/>
+          </p:cNvSpPr>
+          <p:nvPr>
+            <p:ph idx="1"/>
+          </p:nvPr>
+        </p:nvSpPr>
+        <p:spPr/>
+        <p:txBody>
+          <a:bodyPr/>
+          <a:lstStyle/>
+          <a:p>
+            <a:pPr lvl="0" indent="0" marL="0">
+              <a:spcBef>
+                <a:spcPts val="3000"/>
+              </a:spcBef>
+              <a:buNone/>
+            </a:pPr>
+            <a:r>
+              <a:rPr b="1"/>
+              <a:t>Recap from Worksheet 10</a:t>
+            </a:r>
+          </a:p>
+          <a:p>
+            <a:pPr lvl="0"/>
+            <a:r>
+              <a:rPr/>
+              <a:t>Turned categorical variables into ordered </a:t>
+            </a:r>
+            <a:r>
+              <a:rPr b="1"/>
+              <a:t>factors</a:t>
+            </a:r>
+          </a:p>
+          <a:p>
+            <a:pPr lvl="0"/>
+            <a:r>
+              <a:rPr/>
+              <a:t>Reordered levels for cleaner plots with </a:t>
+            </a:r>
+            <a:r>
+              <a:rPr>
+                <a:latin typeface="Courier"/>
+              </a:rPr>
+              <a:t>fct_reorder()</a:t>
+            </a:r>
+          </a:p>
+          <a:p>
+            <a:pPr lvl="0"/>
+            <a:r>
+              <a:rPr/>
+              <a:t>Set a model’s reference group with </a:t>
+            </a:r>
+            <a:r>
+              <a:rPr>
+                <a:latin typeface="Courier"/>
+              </a:rPr>
+              <a:t>fct_relevel()</a:t>
+            </a:r>
+          </a:p>
+          <a:p>
+            <a:pPr lvl="0" indent="0" marL="0">
+              <a:spcBef>
+                <a:spcPts val="3000"/>
+              </a:spcBef>
+              <a:buNone/>
+            </a:pPr>
+            <a:r>
+              <a:rPr b="1"/>
+              <a:t>Today’s Objectives</a:t>
+            </a:r>
+          </a:p>
+          <a:p>
+            <a:pPr lvl="0" indent="-342900" marL="342900">
+              <a:buAutoNum type="arabicPeriod"/>
+            </a:pPr>
+            <a:r>
+              <a:rPr/>
+              <a:t>Load and explore the Palmer penguins data</a:t>
+            </a:r>
+          </a:p>
+          <a:p>
+            <a:pPr lvl="0" indent="-342900" marL="342900">
+              <a:buAutoNum type="arabicPeriod"/>
+            </a:pPr>
+            <a:r>
+              <a:rPr/>
+              <a:t>State the ANOVA null and alternate hypotheses</a:t>
+            </a:r>
+          </a:p>
+          <a:p>
+            <a:pPr lvl="0" indent="-342900" marL="342900">
+              <a:buAutoNum type="arabicPeriod"/>
+            </a:pPr>
+            <a:r>
+              <a:rPr/>
+              <a:t>Fit a one-way ANOVA and check its assumptions</a:t>
+            </a:r>
+          </a:p>
+          <a:p>
+            <a:pPr lvl="0" indent="-342900" marL="342900">
+              <a:buAutoNum type="arabicPeriod"/>
+            </a:pPr>
+            <a:r>
+              <a:rPr/>
+              <a:t>Read the F table from </a:t>
+            </a:r>
+            <a:r>
+              <a:rPr>
+                <a:latin typeface="Courier"/>
+              </a:rPr>
+              <a:t>aov()</a:t>
+            </a:r>
+            <a:r>
+              <a:rPr/>
+              <a:t> and </a:t>
+            </a:r>
+            <a:r>
+              <a:rPr>
+                <a:latin typeface="Courier"/>
+              </a:rPr>
+              <a:t>car::Anova()</a:t>
+            </a:r>
+          </a:p>
+          <a:p>
+            <a:pPr lvl="0" indent="-342900" marL="342900">
+              <a:buAutoNum type="arabicPeriod"/>
+            </a:pPr>
+            <a:r>
+              <a:rPr/>
+              <a:t>Use </a:t>
+            </a:r>
+            <a:r>
+              <a:rPr>
+                <a:latin typeface="Courier"/>
+              </a:rPr>
+              <a:t>emmeans</a:t>
+            </a:r>
+            <a:r>
+              <a:rPr/>
+              <a:t> to find </a:t>
+            </a:r>
+            <a:r>
+              <a:rPr b="1"/>
+              <a:t>which</a:t>
+            </a:r>
+            <a:r>
+              <a:rPr/>
+              <a:t> species differ</a:t>
+            </a:r>
+          </a:p>
+          <a:p>
+            <a:pPr lvl="0" indent="-342900" marL="342900">
+              <a:buAutoNum type="arabicPeriod"/>
+            </a:pPr>
+            <a:r>
+              <a:rPr/>
+              <a:t>Write a complete results sentence</a:t>
+            </a:r>
+          </a:p>
+          <a:p>
+            <a:pPr lvl="0" indent="0" marL="0">
+              <a:spcBef>
+                <a:spcPts val="3000"/>
+              </a:spcBef>
+              <a:buNone/>
+            </a:pPr>
+            <a:r>
+              <a:rPr sz="2000" b="1"/>
+              <a:t>How to use this worksheet</a:t>
+            </a:r>
+          </a:p>
+          <a:p>
+            <a:pPr lvl="0"/>
+            <a:r>
+              <a:rPr sz="2000"/>
+              <a:t>Work through the parts in order. Type the code into a new R script in Positron and run it line by line.</a:t>
+            </a:r>
+          </a:p>
+          <a:p>
+            <a:pPr lvl="0"/>
+            <a:r>
+              <a:rPr sz="2000"/>
+              <a:t>Blocks marked </a:t>
+            </a:r>
+            <a:r>
+              <a:rPr sz="2000" b="1"/>
+              <a:t>▶ Run this</a:t>
+            </a:r>
+            <a:r>
+              <a:rPr sz="2000"/>
+              <a:t> should be executed as written.</a:t>
+            </a:r>
+          </a:p>
+          <a:p>
+            <a:pPr lvl="0"/>
+            <a:r>
+              <a:rPr sz="2000"/>
+              <a:t>Blocks marked </a:t>
+            </a:r>
+            <a:r>
+              <a:rPr sz="2000" b="1"/>
+              <a:t>✏️ Your turn</a:t>
+            </a:r>
+            <a:r>
+              <a:rPr sz="2000"/>
+              <a:t> ask you to write, modify, or interpret.</a:t>
+            </a:r>
+          </a:p>
+          <a:p>
+            <a:pPr lvl="0"/>
+            <a:r>
+              <a:rPr sz="2000"/>
+              <a:t>The </a:t>
+            </a:r>
+            <a:r>
+              <a:rPr sz="2000" b="1"/>
+              <a:t>Going further</a:t>
+            </a:r>
+            <a:r>
+              <a:rPr sz="2000"/>
+              <a:t> section is optional.</a:t>
+            </a:r>
+          </a:p>
+          <a:p>
+            <a:pPr lvl="0" indent="0" marL="1270000">
+              <a:buNone/>
+            </a:pPr>
+            <a:r>
+              <a:rPr sz="2000" b="1"/>
+              <a:t>🔮 Predict before you run — and type, don’t paste</a:t>
+            </a:r>
+          </a:p>
+          <a:p>
+            <a:pPr lvl="0" indent="0" marL="1270000">
+              <a:buNone/>
+            </a:pPr>
+            <a:r>
+              <a:rPr sz="2000"/>
+              <a:t>Before each </a:t>
+            </a:r>
+            <a:r>
+              <a:rPr sz="2000" b="1"/>
+              <a:t>▶ Run this</a:t>
+            </a:r>
+            <a:r>
+              <a:rPr sz="2000"/>
+              <a:t> block, cover the output and </a:t>
+            </a:r>
+            <a:r>
+              <a:rPr sz="2000" i="1"/>
+              <a:t>predict</a:t>
+            </a:r>
+            <a:r>
+              <a:rPr sz="2000"/>
+              <a:t> what R will print — the F, the </a:t>
+            </a:r>
+            <a:r>
+              <a:rPr sz="2000" i="1"/>
+              <a:t>p</a:t>
+            </a:r>
+            <a:r>
+              <a:rPr sz="2000"/>
+              <a:t>-value, which species differ. Then type the code yourself. Predicting first is what turns a test from a black box into something you understand; typing trains your eye for the small errors (</a:t>
+            </a:r>
+            <a:r>
+              <a:rPr sz="2000">
+                <a:latin typeface="Courier"/>
+              </a:rPr>
+              <a:t>anova</a:t>
+            </a:r>
+            <a:r>
+              <a:rPr sz="2000"/>
+              <a:t> vs </a:t>
+            </a:r>
+            <a:r>
+              <a:rPr sz="2000">
+                <a:latin typeface="Courier"/>
+              </a:rPr>
+              <a:t>Anova</a:t>
+            </a:r>
+            <a:r>
+              <a:rPr sz="2000"/>
+              <a:t>, a missing </a:t>
+            </a:r>
+            <a:r>
+              <a:rPr sz="2000">
+                <a:latin typeface="Courier"/>
+              </a:rPr>
+              <a:t>library()</a:t>
+            </a:r>
+            <a:r>
+              <a:rPr sz="2000"/>
+              <a:t>) that eat real time.</a:t>
+            </a:r>
+          </a:p>
+        </p:txBody>
+      </p:sp>
+    </p:spTree>
+  </p:cSld>
+</p:sld>
+</file>
+
+<file path=ppt/slides/slide20.xml><?xml version="1.0" encoding="utf-8"?>
+<p:sld xmlns:a="http://schemas.openxmlformats.org/drawingml/2006/main" xmlns:r="http://schemas.openxmlformats.org/officeDocument/2006/relationships" xmlns:p="http://schemas.openxmlformats.org/presentationml/2006/main">
+  <p:cSld>
+    <p:spTree>
+      <p:nvGrpSpPr>
+        <p:cNvPr id="1" name=""/>
+        <p:cNvGrpSpPr/>
+        <p:nvPr/>
+      </p:nvGrpSpPr>
+      <p:grpSpPr>
+        <a:xfrm>
+          <a:off x="0" y="0"/>
+          <a:ext cx="0" cy="0"/>
+          <a:chOff x="0" y="0"/>
+          <a:chExt cx="0" cy="0"/>
+        </a:xfrm>
+      </p:grpSpPr>
+      <p:sp>
+        <p:nvSpPr>
+          <p:cNvPr id="2" name="Title 1"/>
+          <p:cNvSpPr>
+            <a:spLocks noGrp="1"/>
+          </p:cNvSpPr>
+          <p:nvPr>
+            <p:ph type="title"/>
+          </p:nvPr>
+        </p:nvSpPr>
+        <p:spPr>
+          <a:xfrm>
+            <a:off x="0" y="0"/>
+            <a:ext cx="9144000" cy="582780"/>
+          </a:xfrm>
+        </p:spPr>
+        <p:txBody>
+          <a:bodyPr/>
+          <a:lstStyle/>
+          <a:p>
+            <a:pPr lvl="0" indent="0" marL="0">
+              <a:buNone/>
+            </a:pPr>
+            <a:r>
+              <a:rPr/>
+              <a:t>Getting unstuck</a:t>
+            </a:r>
+          </a:p>
+        </p:txBody>
+      </p:sp>
+      <p:sp>
+        <p:nvSpPr>
+          <p:cNvPr id="3" name="Content Placeholder 2"/>
+          <p:cNvSpPr>
+            <a:spLocks noGrp="1"/>
+          </p:cNvSpPr>
+          <p:nvPr>
+            <p:ph idx="1"/>
+          </p:nvPr>
+        </p:nvSpPr>
+        <p:spPr/>
+        <p:txBody>
+          <a:bodyPr/>
+          <a:lstStyle/>
+          <a:p>
+            <a:pPr lvl="0" indent="-342900" marL="342900">
+              <a:buAutoNum type="arabicPeriod"/>
+            </a:pPr>
+            <a:r>
+              <a:rPr b="1">
+                <a:latin typeface="Courier"/>
+              </a:rPr>
+              <a:t>could not find function "penguins"</a:t>
+            </a:r>
+            <a:r>
+              <a:rPr/>
+              <a:t> → </a:t>
+            </a:r>
+            <a:r>
+              <a:rPr>
+                <a:latin typeface="Courier"/>
+              </a:rPr>
+              <a:t>library(palmerpenguins)</a:t>
+            </a:r>
+            <a:r>
+              <a:rPr/>
+              <a:t>.</a:t>
+            </a:r>
+          </a:p>
+          <a:p>
+            <a:pPr lvl="0" indent="-342900" marL="342900">
+              <a:buAutoNum type="arabicPeriod"/>
+            </a:pPr>
+            <a:r>
+              <a:rPr b="1">
+                <a:latin typeface="Courier"/>
+              </a:rPr>
+              <a:t>could not find function "Anova"</a:t>
+            </a:r>
+            <a:r>
+              <a:rPr/>
+              <a:t> → </a:t>
+            </a:r>
+            <a:r>
+              <a:rPr>
+                <a:latin typeface="Courier"/>
+              </a:rPr>
+              <a:t>library(car)</a:t>
+            </a:r>
+            <a:r>
+              <a:rPr/>
+              <a:t>, and mind the capital </a:t>
+            </a:r>
+            <a:r>
+              <a:rPr b="1"/>
+              <a:t>A</a:t>
+            </a:r>
+            <a:r>
+              <a:rPr/>
+              <a:t> (base </a:t>
+            </a:r>
+            <a:r>
+              <a:rPr>
+                <a:latin typeface="Courier"/>
+              </a:rPr>
+              <a:t>anova()</a:t>
+            </a:r>
+            <a:r>
+              <a:rPr/>
+              <a:t> is different).</a:t>
+            </a:r>
+          </a:p>
+          <a:p>
+            <a:pPr lvl="0" indent="-342900" marL="342900">
+              <a:buAutoNum type="arabicPeriod"/>
+            </a:pPr>
+            <a:r>
+              <a:rPr b="1">
+                <a:latin typeface="Courier"/>
+              </a:rPr>
+              <a:t>could not find function "emmeans"</a:t>
+            </a:r>
+            <a:r>
+              <a:rPr/>
+              <a:t> → </a:t>
+            </a:r>
+            <a:r>
+              <a:rPr>
+                <a:latin typeface="Courier"/>
+              </a:rPr>
+              <a:t>library(emmeans)</a:t>
+            </a:r>
+            <a:r>
+              <a:rPr/>
+              <a:t>.</a:t>
+            </a:r>
+          </a:p>
+          <a:p>
+            <a:pPr lvl="0" indent="-342900" marL="342900">
+              <a:buAutoNum type="arabicPeriod"/>
+            </a:pPr>
+            <a:r>
+              <a:rPr b="1">
+                <a:latin typeface="Courier"/>
+              </a:rPr>
+              <a:t>cld</a:t>
+            </a:r>
+            <a:r>
+              <a:rPr b="1"/>
+              <a:t> not found</a:t>
+            </a:r>
+            <a:r>
+              <a:rPr/>
+              <a:t> → </a:t>
+            </a:r>
+            <a:r>
+              <a:rPr>
+                <a:latin typeface="Courier"/>
+              </a:rPr>
+              <a:t>install.packages("multcomp")</a:t>
+            </a:r>
+            <a:r>
+              <a:rPr/>
+              <a:t>, then </a:t>
+            </a:r>
+            <a:r>
+              <a:rPr>
+                <a:latin typeface="Courier"/>
+              </a:rPr>
+              <a:t>multcomp::cld(...)</a:t>
+            </a:r>
+            <a:r>
+              <a:rPr/>
+              <a:t>.</a:t>
+            </a:r>
+          </a:p>
+          <a:p>
+            <a:pPr lvl="0" indent="-342900" marL="342900">
+              <a:buAutoNum type="arabicPeriod"/>
+            </a:pPr>
+            <a:r>
+              <a:rPr b="1"/>
+              <a:t>Levene says unequal variance</a:t>
+            </a:r>
+            <a:r>
+              <a:rPr/>
+              <a:t> → use </a:t>
+            </a:r>
+            <a:r>
+              <a:rPr>
+                <a:latin typeface="Courier"/>
+              </a:rPr>
+              <a:t>oneway.test(y ~ group, var.equal = FALSE)</a:t>
+            </a:r>
+            <a:r>
+              <a:rPr/>
+              <a:t> (Welch’s ANOVA).</a:t>
+            </a:r>
+          </a:p>
+          <a:p>
+            <a:pPr lvl="0" indent="-342900" marL="342900">
+              <a:buAutoNum type="arabicPeriod"/>
+            </a:pPr>
+            <a:r>
+              <a:rPr b="1"/>
+              <a:t>Cheat sheets</a:t>
+            </a:r>
+            <a:r>
+              <a:rPr/>
+              <a:t> — </a:t>
+            </a:r>
+            <a:r>
+              <a:rPr>
+                <a:hlinkClick r:id="rId2"/>
+              </a:rPr>
+              <a:t>https://posit.co/resources/cheatsheets/</a:t>
+            </a:r>
+          </a:p>
+          <a:p>
+            <a:pPr lvl="0" indent="0" marL="1270000">
+              <a:buNone/>
+            </a:pPr>
+            <a:r>
+              <a:rPr sz="2000"/>
+              <a:t>💡 </a:t>
+            </a:r>
+            <a:r>
+              <a:rPr sz="2000" b="1"/>
+              <a:t>Key idea:</a:t>
+            </a:r>
+            <a:r>
+              <a:rPr sz="2000"/>
+              <a:t> One-way ANOVA → post-hoc is the exact template for comparing any 3+ groups you’ll meet — treatments, sites, species, seasons. Master it here and it transfers everywhere.</a:t>
+            </a:r>
+          </a:p>
+        </p:txBody>
+      </p:sp>
+    </p:spTree>
+  </p:cSld>
+</p:sld>
+</file>
+
+<file path=ppt/slides/slide21.xml><?xml version="1.0" encoding="utf-8"?>
+<p:sld xmlns:a="http://schemas.openxmlformats.org/drawingml/2006/main" xmlns:r="http://schemas.openxmlformats.org/officeDocument/2006/relationships" xmlns:p="http://schemas.openxmlformats.org/presentationml/2006/main">
+  <p:cSld>
+    <p:spTree>
+      <p:nvGrpSpPr>
+        <p:cNvPr id="1" name=""/>
+        <p:cNvGrpSpPr/>
+        <p:nvPr/>
+      </p:nvGrpSpPr>
+      <p:grpSpPr>
+        <a:xfrm>
+          <a:off x="0" y="0"/>
+          <a:ext cx="0" cy="0"/>
+          <a:chOff x="0" y="0"/>
+          <a:chExt cx="0" cy="0"/>
+        </a:xfrm>
+      </p:grpSpPr>
+      <p:sp>
+        <p:nvSpPr>
+          <p:cNvPr id="3" name="Content Placeholder 2"/>
+          <p:cNvSpPr>
+            <a:spLocks noGrp="1"/>
+          </p:cNvSpPr>
+          <p:nvPr>
+            <p:ph idx="1"/>
+          </p:nvPr>
+        </p:nvSpPr>
+        <p:spPr/>
+        <p:txBody>
+          <a:bodyPr/>
+          <a:lstStyle/>
+          <a:p>
+            <a:pPr lvl="0" indent="0" marL="0">
+              <a:buNone/>
+            </a:pPr>
+            <a:r>
+              <a:rPr i="1"/>
+              <a:t>End of Worksheet 10. Next: Worksheet 11 — factors, so your groups plot and model in the order you want.</a:t>
+            </a:r>
+          </a:p>
+        </p:txBody>
+      </p:sp>
+    </p:spTree>
+  </p:cSld>
+</p:sld>
+</file>
+
+<file path=ppt/slides/slide3.xml><?xml version="1.0" encoding="utf-8"?>
+<p:sld xmlns:a="http://schemas.openxmlformats.org/drawingml/2006/main" xmlns:r="http://schemas.openxmlformats.org/officeDocument/2006/relationships" xmlns:p="http://schemas.openxmlformats.org/presentationml/2006/main">
+  <p:cSld>
+    <p:spTree>
+      <p:nvGrpSpPr>
+        <p:cNvPr id="1" name=""/>
+        <p:cNvGrpSpPr/>
+        <p:nvPr/>
+      </p:nvGrpSpPr>
+      <p:grpSpPr>
+        <a:xfrm>
+          <a:off x="0" y="0"/>
+          <a:ext cx="0" cy="0"/>
+          <a:chOff x="0" y="0"/>
+          <a:chExt cx="0" cy="0"/>
+        </a:xfrm>
+      </p:grpSpPr>
+      <p:sp>
+        <p:nvSpPr>
+          <p:cNvPr id="3" name="Content Placeholder 2"/>
+          <p:cNvSpPr>
+            <a:spLocks noGrp="1"/>
+          </p:cNvSpPr>
+          <p:nvPr>
+            <p:ph idx="1"/>
+          </p:nvPr>
+        </p:nvSpPr>
+        <p:spPr/>
+        <p:txBody>
+          <a:bodyPr/>
+          <a:lstStyle/>
+          <a:p>
+            <a:pPr lvl="0" indent="0" marL="0">
+              <a:spcBef>
+                <a:spcPts val="3000"/>
+              </a:spcBef>
+              <a:buNone/>
+            </a:pPr>
+            <a:r>
+              <a:rPr sz="2000" b="1"/>
+              <a:t>🧩 Chunk 1 — Explore &amp; hypothesize </a:t>
+            </a:r>
+            <a:r>
+              <a:rPr sz="2000" b="1" i="1"/>
+              <a:t>(after lecture Chunk 1)</a:t>
+            </a:r>
+          </a:p>
+          <a:p>
+            <a:pPr lvl="0" indent="0" marL="1270000">
+              <a:buNone/>
+            </a:pPr>
+            <a:r>
+              <a:rPr sz="2000"/>
+              <a:t>Parts 1–3: load the penguins, plot body mass by species, and write your hypotheses.</a:t>
+            </a:r>
+          </a:p>
+        </p:txBody>
+      </p:sp>
+    </p:spTree>
+  </p:cSld>
+</p:sld>
+</file>
+
+<file path=ppt/slides/slide4.xml><?xml version="1.0" encoding="utf-8"?>
+<p:sld xmlns:a="http://schemas.openxmlformats.org/drawingml/2006/main" xmlns:r="http://schemas.openxmlformats.org/officeDocument/2006/relationships" xmlns:p="http://schemas.openxmlformats.org/presentationml/2006/main">
+  <p:cSld>
+    <p:spTree>
+      <p:nvGrpSpPr>
+        <p:cNvPr id="1" name=""/>
+        <p:cNvGrpSpPr/>
+        <p:nvPr/>
+      </p:nvGrpSpPr>
+      <p:grpSpPr>
+        <a:xfrm>
+          <a:off x="0" y="0"/>
+          <a:ext cx="0" cy="0"/>
+          <a:chOff x="0" y="0"/>
+          <a:chExt cx="0" cy="0"/>
+        </a:xfrm>
+      </p:grpSpPr>
+      <p:sp>
+        <p:nvSpPr>
+          <p:cNvPr id="2" name="Title 1"/>
+          <p:cNvSpPr>
+            <a:spLocks noGrp="1"/>
+          </p:cNvSpPr>
+          <p:nvPr>
+            <p:ph type="title"/>
+          </p:nvPr>
+        </p:nvSpPr>
+        <p:spPr>
+          <a:xfrm>
+            <a:off x="0" y="0"/>
+            <a:ext cx="9144000" cy="582780"/>
+          </a:xfrm>
+        </p:spPr>
+        <p:txBody>
+          <a:bodyPr/>
+          <a:lstStyle/>
+          <a:p>
+            <a:pPr lvl="0" indent="0" marL="0">
+              <a:buNone/>
+            </a:pPr>
+            <a:r>
+              <a:rPr/>
+              <a:t>Part 1 · Load libraries and data</a:t>
+            </a:r>
+          </a:p>
+        </p:txBody>
+      </p:sp>
+      <p:sp>
+        <p:nvSpPr>
+          <p:cNvPr id="3" name="Content Placeholder 2"/>
+          <p:cNvSpPr>
+            <a:spLocks noGrp="1"/>
+          </p:cNvSpPr>
+          <p:nvPr>
+            <p:ph idx="1"/>
+          </p:nvPr>
+        </p:nvSpPr>
+        <p:spPr/>
+        <p:txBody>
+          <a:bodyPr/>
+          <a:lstStyle/>
+          <a:p>
+            <a:pPr lvl="0" indent="0" marL="0">
+              <a:buNone/>
+            </a:pPr>
+            <a:r>
+              <a:rPr b="1"/>
+              <a:t>▶ Run this at the top of your script:</a:t>
+            </a:r>
+          </a:p>
+          <a:p>
+            <a:pPr lvl="0" indent="0">
+              <a:buNone/>
+            </a:pPr>
+            <a:r>
+              <a:rPr>
+                <a:solidFill>
+                  <a:srgbClr val="5E5E5E"/>
+                </a:solidFill>
+                <a:latin typeface="Courier"/>
+              </a:rPr>
+              <a:t># Load packages at the top — always ----------------------</a:t>
+            </a:r>
+            <a:br/>
+            <a:r>
+              <a:rPr>
+                <a:solidFill>
+                  <a:srgbClr val="4758AB"/>
+                </a:solidFill>
+                <a:latin typeface="Courier"/>
+              </a:rPr>
+              <a:t>library</a:t>
+            </a:r>
+            <a:r>
+              <a:rPr>
+                <a:solidFill>
+                  <a:srgbClr val="003B4F"/>
+                </a:solidFill>
+                <a:latin typeface="Courier"/>
+              </a:rPr>
+              <a:t>(tidyverse)      </a:t>
+            </a:r>
+            <a:r>
+              <a:rPr>
+                <a:solidFill>
+                  <a:srgbClr val="5E5E5E"/>
+                </a:solidFill>
+                <a:latin typeface="Courier"/>
+              </a:rPr>
+              <a:t># wrangling + ggplot2</a:t>
+            </a:r>
+            <a:br/>
+            <a:r>
+              <a:rPr>
+                <a:solidFill>
+                  <a:srgbClr val="4758AB"/>
+                </a:solidFill>
+                <a:latin typeface="Courier"/>
+              </a:rPr>
+              <a:t>library</a:t>
+            </a:r>
+            <a:r>
+              <a:rPr>
+                <a:solidFill>
+                  <a:srgbClr val="003B4F"/>
+                </a:solidFill>
+                <a:latin typeface="Courier"/>
+              </a:rPr>
+              <a:t>(palmerpenguins) </a:t>
+            </a:r>
+            <a:r>
+              <a:rPr>
+                <a:solidFill>
+                  <a:srgbClr val="5E5E5E"/>
+                </a:solidFill>
+                <a:latin typeface="Courier"/>
+              </a:rPr>
+              <a:t># the penguins data</a:t>
+            </a:r>
+            <a:br/>
+            <a:r>
+              <a:rPr>
+                <a:solidFill>
+                  <a:srgbClr val="4758AB"/>
+                </a:solidFill>
+                <a:latin typeface="Courier"/>
+              </a:rPr>
+              <a:t>library</a:t>
+            </a:r>
+            <a:r>
+              <a:rPr>
+                <a:solidFill>
+                  <a:srgbClr val="003B4F"/>
+                </a:solidFill>
+                <a:latin typeface="Courier"/>
+              </a:rPr>
+              <a:t>(car)            </a:t>
+            </a:r>
+            <a:r>
+              <a:rPr>
+                <a:solidFill>
+                  <a:srgbClr val="5E5E5E"/>
+                </a:solidFill>
+                <a:latin typeface="Courier"/>
+              </a:rPr>
+              <a:t># Levene's test, Anova()</a:t>
+            </a:r>
+            <a:br/>
+            <a:r>
+              <a:rPr>
+                <a:solidFill>
+                  <a:srgbClr val="4758AB"/>
+                </a:solidFill>
+                <a:latin typeface="Courier"/>
+              </a:rPr>
+              <a:t>library</a:t>
+            </a:r>
+            <a:r>
+              <a:rPr>
+                <a:solidFill>
+                  <a:srgbClr val="003B4F"/>
+                </a:solidFill>
+                <a:latin typeface="Courier"/>
+              </a:rPr>
+              <a:t>(emmeans)        </a:t>
+            </a:r>
+            <a:r>
+              <a:rPr>
+                <a:solidFill>
+                  <a:srgbClr val="5E5E5E"/>
+                </a:solidFill>
+                <a:latin typeface="Courier"/>
+              </a:rPr>
+              <a:t># post-hoc pairwise tests</a:t>
+            </a:r>
+          </a:p>
+          <a:p>
+            <a:pPr lvl="0" indent="0" marL="0">
+              <a:buNone/>
+            </a:pPr>
+            <a:r>
+              <a:rPr b="1"/>
+              <a:t>▶ Run this:</a:t>
+            </a:r>
+          </a:p>
+          <a:p>
+            <a:pPr lvl="0" indent="0">
+              <a:buNone/>
+            </a:pPr>
+            <a:r>
+              <a:rPr>
+                <a:solidFill>
+                  <a:srgbClr val="5E5E5E"/>
+                </a:solidFill>
+                <a:latin typeface="Courier"/>
+              </a:rPr>
+              <a:t># Drop rows missing mass or species ----------------------</a:t>
+            </a:r>
+            <a:br/>
+            <a:r>
+              <a:rPr>
+                <a:solidFill>
+                  <a:srgbClr val="003B4F"/>
+                </a:solidFill>
+                <a:latin typeface="Courier"/>
+              </a:rPr>
+              <a:t>penguins_df &lt;- penguins </a:t>
+            </a:r>
+            <a:r>
+              <a:rPr>
+                <a:solidFill>
+                  <a:srgbClr val="5E5E5E"/>
+                </a:solidFill>
+                <a:latin typeface="Courier"/>
+              </a:rPr>
+              <a:t>%&gt;%</a:t>
+            </a:r>
+            <a:br/>
+            <a:r>
+              <a:rPr>
+                <a:solidFill>
+                  <a:srgbClr val="003B4F"/>
+                </a:solidFill>
+                <a:latin typeface="Courier"/>
+              </a:rPr>
+              <a:t>  </a:t>
+            </a:r>
+            <a:r>
+              <a:rPr>
+                <a:solidFill>
+                  <a:srgbClr val="4758AB"/>
+                </a:solidFill>
+                <a:latin typeface="Courier"/>
+              </a:rPr>
+              <a:t>drop_na</a:t>
+            </a:r>
+            <a:r>
+              <a:rPr>
+                <a:solidFill>
+                  <a:srgbClr val="003B4F"/>
+                </a:solidFill>
+                <a:latin typeface="Courier"/>
+              </a:rPr>
+              <a:t>(body_mass_g, species)</a:t>
+            </a:r>
+            <a:br/>
+            <a:br/>
+            <a:r>
+              <a:rPr>
+                <a:solidFill>
+                  <a:srgbClr val="003B4F"/>
+                </a:solidFill>
+                <a:latin typeface="Courier"/>
+              </a:rPr>
+              <a:t>penguins_df </a:t>
+            </a:r>
+            <a:r>
+              <a:rPr>
+                <a:solidFill>
+                  <a:srgbClr val="5E5E5E"/>
+                </a:solidFill>
+                <a:latin typeface="Courier"/>
+              </a:rPr>
+              <a:t>%&gt;%</a:t>
+            </a:r>
+            <a:r>
+              <a:rPr>
+                <a:solidFill>
+                  <a:srgbClr val="003B4F"/>
+                </a:solidFill>
+                <a:latin typeface="Courier"/>
+              </a:rPr>
+              <a:t> </a:t>
+            </a:r>
+            <a:r>
+              <a:rPr>
+                <a:solidFill>
+                  <a:srgbClr val="4758AB"/>
+                </a:solidFill>
+                <a:latin typeface="Courier"/>
+              </a:rPr>
+              <a:t>count</a:t>
+            </a:r>
+            <a:r>
+              <a:rPr>
+                <a:solidFill>
+                  <a:srgbClr val="003B4F"/>
+                </a:solidFill>
+                <a:latin typeface="Courier"/>
+              </a:rPr>
+              <a:t>(species)</a:t>
+            </a:r>
+          </a:p>
+          <a:p>
+            <a:pPr lvl="0" indent="0" marL="0">
+              <a:buNone/>
+            </a:pPr>
+            <a:r>
+              <a:rPr/>
+              <a:t>✏️ </a:t>
+            </a:r>
+            <a:r>
+              <a:rPr b="1"/>
+              <a:t>Your turn:</a:t>
+            </a:r>
+            <a:r>
+              <a:rPr/>
+              <a:t> Record the sample sizes.</a:t>
+            </a:r>
+          </a:p>
+          <a:p>
+            <a:pPr lvl="0" indent="0">
+              <a:buNone/>
+            </a:pPr>
+            <a:r>
+              <a:rPr>
+                <a:latin typeface="Courier"/>
+              </a:rPr>
+              <a:t>n Adelie:
+n Chinstrap:
+n Gentoo:
+Are the groups balanced (equal n)?  Y / N</a:t>
+            </a:r>
+          </a:p>
+          <a:p>
+            <a:pPr lvl="0" indent="0" marL="1270000">
+              <a:buNone/>
+            </a:pPr>
+            <a:r>
+              <a:rPr sz="2000"/>
+              <a:t>⚠️ </a:t>
+            </a:r>
+            <a:r>
+              <a:rPr sz="2000" b="1"/>
+              <a:t>Watch out!</a:t>
+            </a:r>
+            <a:r>
+              <a:rPr sz="2000"/>
+              <a:t> If R says </a:t>
+            </a:r>
+            <a:r>
+              <a:rPr sz="2000">
+                <a:latin typeface="Courier"/>
+              </a:rPr>
+              <a:t>could not find function "penguins"</a:t>
+            </a:r>
+            <a:r>
+              <a:rPr sz="2000"/>
+              <a:t>, you forgot </a:t>
+            </a:r>
+            <a:r>
+              <a:rPr sz="2000">
+                <a:latin typeface="Courier"/>
+              </a:rPr>
+              <a:t>library(palmerpenguins)</a:t>
+            </a:r>
+            <a:r>
+              <a:rPr sz="2000"/>
+              <a:t>. Install it once with </a:t>
+            </a:r>
+            <a:r>
+              <a:rPr sz="2000">
+                <a:latin typeface="Courier"/>
+              </a:rPr>
+              <a:t>install.packages("palmerpenguins")</a:t>
+            </a:r>
+            <a:r>
+              <a:rPr sz="2000"/>
+              <a:t>.</a:t>
+            </a:r>
+          </a:p>
+        </p:txBody>
+      </p:sp>
+    </p:spTree>
+  </p:cSld>
+</p:sld>
+</file>
+
+<file path=ppt/slides/slide5.xml><?xml version="1.0" encoding="utf-8"?>
+<p:sld xmlns:a="http://schemas.openxmlformats.org/drawingml/2006/main" xmlns:r="http://schemas.openxmlformats.org/officeDocument/2006/relationships" xmlns:p="http://schemas.openxmlformats.org/presentationml/2006/main">
+  <p:cSld>
+    <p:spTree>
+      <p:nvGrpSpPr>
+        <p:cNvPr id="1" name=""/>
+        <p:cNvGrpSpPr/>
+        <p:nvPr/>
+      </p:nvGrpSpPr>
+      <p:grpSpPr>
+        <a:xfrm>
+          <a:off x="0" y="0"/>
+          <a:ext cx="0" cy="0"/>
+          <a:chOff x="0" y="0"/>
+          <a:chExt cx="0" cy="0"/>
+        </a:xfrm>
+      </p:grpSpPr>
+      <p:sp>
+        <p:nvSpPr>
+          <p:cNvPr id="2" name="Title 1"/>
+          <p:cNvSpPr>
+            <a:spLocks noGrp="1"/>
+          </p:cNvSpPr>
+          <p:nvPr>
+            <p:ph type="title"/>
+          </p:nvPr>
+        </p:nvSpPr>
+        <p:spPr>
+          <a:xfrm>
+            <a:off x="0" y="0"/>
+            <a:ext cx="9144000" cy="582780"/>
+          </a:xfrm>
+        </p:spPr>
+        <p:txBody>
+          <a:bodyPr/>
+          <a:lstStyle/>
+          <a:p>
+            <a:pPr lvl="0" indent="0" marL="0">
+              <a:buNone/>
+            </a:pPr>
+            <a:r>
+              <a:rPr/>
+              <a:t>Part 2 · Explore with a boxplot</a:t>
+            </a:r>
+          </a:p>
+        </p:txBody>
+      </p:sp>
+      <p:sp>
+        <p:nvSpPr>
+          <p:cNvPr id="3" name="Content Placeholder 2"/>
+          <p:cNvSpPr>
+            <a:spLocks noGrp="1"/>
+          </p:cNvSpPr>
+          <p:nvPr>
+            <p:ph idx="1"/>
+          </p:nvPr>
+        </p:nvSpPr>
+        <p:spPr/>
+        <p:txBody>
+          <a:bodyPr/>
+          <a:lstStyle/>
+          <a:p>
+            <a:pPr lvl="0" indent="0" marL="1270000">
+              <a:buNone/>
+            </a:pPr>
+            <a:r>
+              <a:rPr sz="2000"/>
+              <a:t>🔮 </a:t>
+            </a:r>
+            <a:r>
+              <a:rPr sz="2000" b="1"/>
+              <a:t>Predict first:</a:t>
+            </a:r>
+            <a:r>
+              <a:rPr sz="2000"/>
+              <a:t> Before you plot — which species do you think is heaviest? Do you expect all three to differ, or just one?</a:t>
+            </a:r>
+          </a:p>
+          <a:p>
+            <a:pPr lvl="0" indent="0" marL="0">
+              <a:buNone/>
+            </a:pPr>
+            <a:r>
+              <a:rPr b="1"/>
+              <a:t>▶ Run this:</a:t>
+            </a:r>
+          </a:p>
+          <a:p>
+            <a:pPr lvl="0" indent="0">
+              <a:buNone/>
+            </a:pPr>
+            <a:r>
+              <a:rPr>
+                <a:solidFill>
+                  <a:srgbClr val="5E5E5E"/>
+                </a:solidFill>
+                <a:latin typeface="Courier"/>
+              </a:rPr>
+              <a:t># Body mass by species -----------------------------------</a:t>
+            </a:r>
+            <a:br/>
+            <a:r>
+              <a:rPr>
+                <a:solidFill>
+                  <a:srgbClr val="003B4F"/>
+                </a:solidFill>
+                <a:latin typeface="Courier"/>
+              </a:rPr>
+              <a:t>mass_box_plot &lt;- penguins_df </a:t>
+            </a:r>
+            <a:r>
+              <a:rPr>
+                <a:solidFill>
+                  <a:srgbClr val="5E5E5E"/>
+                </a:solidFill>
+                <a:latin typeface="Courier"/>
+              </a:rPr>
+              <a:t>%&gt;%</a:t>
+            </a:r>
+            <a:br/>
+            <a:r>
+              <a:rPr>
+                <a:solidFill>
+                  <a:srgbClr val="003B4F"/>
+                </a:solidFill>
+                <a:latin typeface="Courier"/>
+              </a:rPr>
+              <a:t>  </a:t>
+            </a:r>
+            <a:r>
+              <a:rPr>
+                <a:solidFill>
+                  <a:srgbClr val="4758AB"/>
+                </a:solidFill>
+                <a:latin typeface="Courier"/>
+              </a:rPr>
+              <a:t>ggplot</a:t>
+            </a:r>
+            <a:r>
+              <a:rPr>
+                <a:solidFill>
+                  <a:srgbClr val="003B4F"/>
+                </a:solidFill>
+                <a:latin typeface="Courier"/>
+              </a:rPr>
+              <a:t>(</a:t>
+            </a:r>
+            <a:r>
+              <a:rPr>
+                <a:solidFill>
+                  <a:srgbClr val="4758AB"/>
+                </a:solidFill>
+                <a:latin typeface="Courier"/>
+              </a:rPr>
+              <a:t>aes</a:t>
+            </a:r>
+            <a:r>
+              <a:rPr>
+                <a:solidFill>
+                  <a:srgbClr val="003B4F"/>
+                </a:solidFill>
+                <a:latin typeface="Courier"/>
+              </a:rPr>
+              <a:t>(</a:t>
+            </a:r>
+            <a:r>
+              <a:rPr>
+                <a:solidFill>
+                  <a:srgbClr val="657422"/>
+                </a:solidFill>
+                <a:latin typeface="Courier"/>
+              </a:rPr>
+              <a:t>x =</a:t>
+            </a:r>
+            <a:r>
+              <a:rPr>
+                <a:solidFill>
+                  <a:srgbClr val="003B4F"/>
+                </a:solidFill>
+                <a:latin typeface="Courier"/>
+              </a:rPr>
+              <a:t> species, </a:t>
+            </a:r>
+            <a:r>
+              <a:rPr>
+                <a:solidFill>
+                  <a:srgbClr val="657422"/>
+                </a:solidFill>
+                <a:latin typeface="Courier"/>
+              </a:rPr>
+              <a:t>y =</a:t>
+            </a:r>
+            <a:r>
+              <a:rPr>
+                <a:solidFill>
+                  <a:srgbClr val="003B4F"/>
+                </a:solidFill>
+                <a:latin typeface="Courier"/>
+              </a:rPr>
+              <a:t> body_mass_g, </a:t>
+            </a:r>
+            <a:r>
+              <a:rPr>
+                <a:solidFill>
+                  <a:srgbClr val="657422"/>
+                </a:solidFill>
+                <a:latin typeface="Courier"/>
+              </a:rPr>
+              <a:t>fill =</a:t>
+            </a:r>
+            <a:r>
+              <a:rPr>
+                <a:solidFill>
+                  <a:srgbClr val="003B4F"/>
+                </a:solidFill>
+                <a:latin typeface="Courier"/>
+              </a:rPr>
+              <a:t> species)) </a:t>
+            </a:r>
+            <a:r>
+              <a:rPr>
+                <a:solidFill>
+                  <a:srgbClr val="5E5E5E"/>
+                </a:solidFill>
+                <a:latin typeface="Courier"/>
+              </a:rPr>
+              <a:t>+</a:t>
+            </a:r>
+            <a:br/>
+            <a:r>
+              <a:rPr>
+                <a:solidFill>
+                  <a:srgbClr val="003B4F"/>
+                </a:solidFill>
+                <a:latin typeface="Courier"/>
+              </a:rPr>
+              <a:t>  </a:t>
+            </a:r>
+            <a:r>
+              <a:rPr>
+                <a:solidFill>
+                  <a:srgbClr val="4758AB"/>
+                </a:solidFill>
+                <a:latin typeface="Courier"/>
+              </a:rPr>
+              <a:t>geom_boxplot</a:t>
+            </a:r>
+            <a:r>
+              <a:rPr>
+                <a:solidFill>
+                  <a:srgbClr val="003B4F"/>
+                </a:solidFill>
+                <a:latin typeface="Courier"/>
+              </a:rPr>
+              <a:t>(</a:t>
+            </a:r>
+            <a:r>
+              <a:rPr>
+                <a:solidFill>
+                  <a:srgbClr val="657422"/>
+                </a:solidFill>
+                <a:latin typeface="Courier"/>
+              </a:rPr>
+              <a:t>alpha =</a:t>
+            </a:r>
+            <a:r>
+              <a:rPr>
+                <a:solidFill>
+                  <a:srgbClr val="003B4F"/>
+                </a:solidFill>
+                <a:latin typeface="Courier"/>
+              </a:rPr>
+              <a:t> </a:t>
+            </a:r>
+            <a:r>
+              <a:rPr>
+                <a:solidFill>
+                  <a:srgbClr val="AD0000"/>
+                </a:solidFill>
+                <a:latin typeface="Courier"/>
+              </a:rPr>
+              <a:t>0.5</a:t>
+            </a:r>
+            <a:r>
+              <a:rPr>
+                <a:solidFill>
+                  <a:srgbClr val="003B4F"/>
+                </a:solidFill>
+                <a:latin typeface="Courier"/>
+              </a:rPr>
+              <a:t>, </a:t>
+            </a:r>
+            <a:r>
+              <a:rPr>
+                <a:solidFill>
+                  <a:srgbClr val="657422"/>
+                </a:solidFill>
+                <a:latin typeface="Courier"/>
+              </a:rPr>
+              <a:t>outlier.shape =</a:t>
+            </a:r>
+            <a:r>
+              <a:rPr>
+                <a:solidFill>
+                  <a:srgbClr val="003B4F"/>
+                </a:solidFill>
+                <a:latin typeface="Courier"/>
+              </a:rPr>
+              <a:t> </a:t>
+            </a:r>
+            <a:r>
+              <a:rPr>
+                <a:solidFill>
+                  <a:srgbClr val="8F5902"/>
+                </a:solidFill>
+                <a:latin typeface="Courier"/>
+              </a:rPr>
+              <a:t>NA</a:t>
+            </a:r>
+            <a:r>
+              <a:rPr>
+                <a:solidFill>
+                  <a:srgbClr val="003B4F"/>
+                </a:solidFill>
+                <a:latin typeface="Courier"/>
+              </a:rPr>
+              <a:t>) </a:t>
+            </a:r>
+            <a:r>
+              <a:rPr>
+                <a:solidFill>
+                  <a:srgbClr val="5E5E5E"/>
+                </a:solidFill>
+                <a:latin typeface="Courier"/>
+              </a:rPr>
+              <a:t>+</a:t>
+            </a:r>
+            <a:br/>
+            <a:r>
+              <a:rPr>
+                <a:solidFill>
+                  <a:srgbClr val="003B4F"/>
+                </a:solidFill>
+                <a:latin typeface="Courier"/>
+              </a:rPr>
+              <a:t>  </a:t>
+            </a:r>
+            <a:r>
+              <a:rPr>
+                <a:solidFill>
+                  <a:srgbClr val="4758AB"/>
+                </a:solidFill>
+                <a:latin typeface="Courier"/>
+              </a:rPr>
+              <a:t>geom_point</a:t>
+            </a:r>
+            <a:r>
+              <a:rPr>
+                <a:solidFill>
+                  <a:srgbClr val="003B4F"/>
+                </a:solidFill>
+                <a:latin typeface="Courier"/>
+              </a:rPr>
+              <a:t>(</a:t>
+            </a:r>
+            <a:r>
+              <a:rPr>
+                <a:solidFill>
+                  <a:srgbClr val="657422"/>
+                </a:solidFill>
+                <a:latin typeface="Courier"/>
+              </a:rPr>
+              <a:t>position =</a:t>
+            </a:r>
+            <a:r>
+              <a:rPr>
+                <a:solidFill>
+                  <a:srgbClr val="003B4F"/>
+                </a:solidFill>
+                <a:latin typeface="Courier"/>
+              </a:rPr>
+              <a:t> </a:t>
+            </a:r>
+            <a:r>
+              <a:rPr>
+                <a:solidFill>
+                  <a:srgbClr val="4758AB"/>
+                </a:solidFill>
+                <a:latin typeface="Courier"/>
+              </a:rPr>
+              <a:t>position_jitter</a:t>
+            </a:r>
+            <a:r>
+              <a:rPr>
+                <a:solidFill>
+                  <a:srgbClr val="003B4F"/>
+                </a:solidFill>
+                <a:latin typeface="Courier"/>
+              </a:rPr>
+              <a:t>(</a:t>
+            </a:r>
+            <a:r>
+              <a:rPr>
+                <a:solidFill>
+                  <a:srgbClr val="657422"/>
+                </a:solidFill>
+                <a:latin typeface="Courier"/>
+              </a:rPr>
+              <a:t>width =</a:t>
+            </a:r>
+            <a:r>
+              <a:rPr>
+                <a:solidFill>
+                  <a:srgbClr val="003B4F"/>
+                </a:solidFill>
+                <a:latin typeface="Courier"/>
+              </a:rPr>
+              <a:t> </a:t>
+            </a:r>
+            <a:r>
+              <a:rPr>
+                <a:solidFill>
+                  <a:srgbClr val="AD0000"/>
+                </a:solidFill>
+                <a:latin typeface="Courier"/>
+              </a:rPr>
+              <a:t>0.15</a:t>
+            </a:r>
+            <a:r>
+              <a:rPr>
+                <a:solidFill>
+                  <a:srgbClr val="003B4F"/>
+                </a:solidFill>
+                <a:latin typeface="Courier"/>
+              </a:rPr>
+              <a:t>, </a:t>
+            </a:r>
+            <a:r>
+              <a:rPr>
+                <a:solidFill>
+                  <a:srgbClr val="657422"/>
+                </a:solidFill>
+                <a:latin typeface="Courier"/>
+              </a:rPr>
+              <a:t>seed =</a:t>
+            </a:r>
+            <a:r>
+              <a:rPr>
+                <a:solidFill>
+                  <a:srgbClr val="003B4F"/>
+                </a:solidFill>
+                <a:latin typeface="Courier"/>
+              </a:rPr>
+              <a:t> </a:t>
+            </a:r>
+            <a:r>
+              <a:rPr>
+                <a:solidFill>
+                  <a:srgbClr val="AD0000"/>
+                </a:solidFill>
+                <a:latin typeface="Courier"/>
+              </a:rPr>
+              <a:t>42</a:t>
+            </a:r>
+            <a:r>
+              <a:rPr>
+                <a:solidFill>
+                  <a:srgbClr val="003B4F"/>
+                </a:solidFill>
+                <a:latin typeface="Courier"/>
+              </a:rPr>
+              <a:t>),</a:t>
+            </a:r>
+            <a:br/>
+            <a:r>
+              <a:rPr>
+                <a:solidFill>
+                  <a:srgbClr val="003B4F"/>
+                </a:solidFill>
+                <a:latin typeface="Courier"/>
+              </a:rPr>
+              <a:t>             </a:t>
+            </a:r>
+            <a:r>
+              <a:rPr>
+                <a:solidFill>
+                  <a:srgbClr val="657422"/>
+                </a:solidFill>
+                <a:latin typeface="Courier"/>
+              </a:rPr>
+              <a:t>alpha =</a:t>
+            </a:r>
+            <a:r>
+              <a:rPr>
+                <a:solidFill>
+                  <a:srgbClr val="003B4F"/>
+                </a:solidFill>
+                <a:latin typeface="Courier"/>
+              </a:rPr>
+              <a:t> </a:t>
+            </a:r>
+            <a:r>
+              <a:rPr>
+                <a:solidFill>
+                  <a:srgbClr val="AD0000"/>
+                </a:solidFill>
+                <a:latin typeface="Courier"/>
+              </a:rPr>
+              <a:t>0.3</a:t>
+            </a:r>
+            <a:r>
+              <a:rPr>
+                <a:solidFill>
+                  <a:srgbClr val="003B4F"/>
+                </a:solidFill>
+                <a:latin typeface="Courier"/>
+              </a:rPr>
+              <a:t>, </a:t>
+            </a:r>
+            <a:r>
+              <a:rPr>
+                <a:solidFill>
+                  <a:srgbClr val="657422"/>
+                </a:solidFill>
+                <a:latin typeface="Courier"/>
+              </a:rPr>
+              <a:t>size =</a:t>
+            </a:r>
+            <a:r>
+              <a:rPr>
+                <a:solidFill>
+                  <a:srgbClr val="003B4F"/>
+                </a:solidFill>
+                <a:latin typeface="Courier"/>
+              </a:rPr>
+              <a:t> </a:t>
+            </a:r>
+            <a:r>
+              <a:rPr>
+                <a:solidFill>
+                  <a:srgbClr val="AD0000"/>
+                </a:solidFill>
+                <a:latin typeface="Courier"/>
+              </a:rPr>
+              <a:t>1.5</a:t>
+            </a:r>
+            <a:r>
+              <a:rPr>
+                <a:solidFill>
+                  <a:srgbClr val="003B4F"/>
+                </a:solidFill>
+                <a:latin typeface="Courier"/>
+              </a:rPr>
+              <a:t>) </a:t>
+            </a:r>
+            <a:r>
+              <a:rPr>
+                <a:solidFill>
+                  <a:srgbClr val="5E5E5E"/>
+                </a:solidFill>
+                <a:latin typeface="Courier"/>
+              </a:rPr>
+              <a:t>+</a:t>
+            </a:r>
+            <a:br/>
+            <a:r>
+              <a:rPr>
+                <a:solidFill>
+                  <a:srgbClr val="003B4F"/>
+                </a:solidFill>
+                <a:latin typeface="Courier"/>
+              </a:rPr>
+              <a:t>  </a:t>
+            </a:r>
+            <a:r>
+              <a:rPr>
+                <a:solidFill>
+                  <a:srgbClr val="4758AB"/>
+                </a:solidFill>
+                <a:latin typeface="Courier"/>
+              </a:rPr>
+              <a:t>labs</a:t>
+            </a:r>
+            <a:r>
+              <a:rPr>
+                <a:solidFill>
+                  <a:srgbClr val="003B4F"/>
+                </a:solidFill>
+                <a:latin typeface="Courier"/>
+              </a:rPr>
+              <a:t>(</a:t>
+            </a:r>
+            <a:r>
+              <a:rPr>
+                <a:solidFill>
+                  <a:srgbClr val="657422"/>
+                </a:solidFill>
+                <a:latin typeface="Courier"/>
+              </a:rPr>
+              <a:t>x =</a:t>
+            </a:r>
+            <a:r>
+              <a:rPr>
+                <a:solidFill>
+                  <a:srgbClr val="003B4F"/>
+                </a:solidFill>
+                <a:latin typeface="Courier"/>
+              </a:rPr>
+              <a:t> </a:t>
+            </a:r>
+            <a:r>
+              <a:rPr>
+                <a:solidFill>
+                  <a:srgbClr val="20794D"/>
+                </a:solidFill>
+                <a:latin typeface="Courier"/>
+              </a:rPr>
+              <a:t>"Species"</a:t>
+            </a:r>
+            <a:r>
+              <a:rPr>
+                <a:solidFill>
+                  <a:srgbClr val="003B4F"/>
+                </a:solidFill>
+                <a:latin typeface="Courier"/>
+              </a:rPr>
+              <a:t>, </a:t>
+            </a:r>
+            <a:r>
+              <a:rPr>
+                <a:solidFill>
+                  <a:srgbClr val="657422"/>
+                </a:solidFill>
+                <a:latin typeface="Courier"/>
+              </a:rPr>
+              <a:t>y =</a:t>
+            </a:r>
+            <a:r>
+              <a:rPr>
+                <a:solidFill>
+                  <a:srgbClr val="003B4F"/>
+                </a:solidFill>
+                <a:latin typeface="Courier"/>
+              </a:rPr>
+              <a:t> </a:t>
+            </a:r>
+            <a:r>
+              <a:rPr>
+                <a:solidFill>
+                  <a:srgbClr val="20794D"/>
+                </a:solidFill>
+                <a:latin typeface="Courier"/>
+              </a:rPr>
+              <a:t>"Body Mass (g)"</a:t>
+            </a:r>
+            <a:r>
+              <a:rPr>
+                <a:solidFill>
+                  <a:srgbClr val="003B4F"/>
+                </a:solidFill>
+                <a:latin typeface="Courier"/>
+              </a:rPr>
+              <a:t>) </a:t>
+            </a:r>
+            <a:r>
+              <a:rPr>
+                <a:solidFill>
+                  <a:srgbClr val="5E5E5E"/>
+                </a:solidFill>
+                <a:latin typeface="Courier"/>
+              </a:rPr>
+              <a:t>+</a:t>
+            </a:r>
+            <a:br/>
+            <a:r>
+              <a:rPr>
+                <a:solidFill>
+                  <a:srgbClr val="003B4F"/>
+                </a:solidFill>
+                <a:latin typeface="Courier"/>
+              </a:rPr>
+              <a:t>  </a:t>
+            </a:r>
+            <a:r>
+              <a:rPr>
+                <a:solidFill>
+                  <a:srgbClr val="4758AB"/>
+                </a:solidFill>
+                <a:latin typeface="Courier"/>
+              </a:rPr>
+              <a:t>theme_minimal</a:t>
+            </a:r>
+            <a:r>
+              <a:rPr>
+                <a:solidFill>
+                  <a:srgbClr val="003B4F"/>
+                </a:solidFill>
+                <a:latin typeface="Courier"/>
+              </a:rPr>
+              <a:t>() </a:t>
+            </a:r>
+            <a:r>
+              <a:rPr>
+                <a:solidFill>
+                  <a:srgbClr val="5E5E5E"/>
+                </a:solidFill>
+                <a:latin typeface="Courier"/>
+              </a:rPr>
+              <a:t>+</a:t>
+            </a:r>
+            <a:br/>
+            <a:r>
+              <a:rPr>
+                <a:solidFill>
+                  <a:srgbClr val="003B4F"/>
+                </a:solidFill>
+                <a:latin typeface="Courier"/>
+              </a:rPr>
+              <a:t>  </a:t>
+            </a:r>
+            <a:r>
+              <a:rPr>
+                <a:solidFill>
+                  <a:srgbClr val="4758AB"/>
+                </a:solidFill>
+                <a:latin typeface="Courier"/>
+              </a:rPr>
+              <a:t>theme</a:t>
+            </a:r>
+            <a:r>
+              <a:rPr>
+                <a:solidFill>
+                  <a:srgbClr val="003B4F"/>
+                </a:solidFill>
+                <a:latin typeface="Courier"/>
+              </a:rPr>
+              <a:t>(</a:t>
+            </a:r>
+            <a:r>
+              <a:rPr>
+                <a:solidFill>
+                  <a:srgbClr val="657422"/>
+                </a:solidFill>
+                <a:latin typeface="Courier"/>
+              </a:rPr>
+              <a:t>legend.position =</a:t>
+            </a:r>
+            <a:r>
+              <a:rPr>
+                <a:solidFill>
+                  <a:srgbClr val="003B4F"/>
+                </a:solidFill>
+                <a:latin typeface="Courier"/>
+              </a:rPr>
+              <a:t> </a:t>
+            </a:r>
+            <a:r>
+              <a:rPr>
+                <a:solidFill>
+                  <a:srgbClr val="20794D"/>
+                </a:solidFill>
+                <a:latin typeface="Courier"/>
+              </a:rPr>
+              <a:t>"none"</a:t>
+            </a:r>
+            <a:r>
+              <a:rPr>
+                <a:solidFill>
+                  <a:srgbClr val="003B4F"/>
+                </a:solidFill>
+                <a:latin typeface="Courier"/>
+              </a:rPr>
+              <a:t>)</a:t>
+            </a:r>
+            <a:br/>
+            <a:br/>
+            <a:r>
+              <a:rPr>
+                <a:solidFill>
+                  <a:srgbClr val="003B4F"/>
+                </a:solidFill>
+                <a:latin typeface="Courier"/>
+              </a:rPr>
+              <a:t>mass_box_plot</a:t>
+            </a:r>
+          </a:p>
+          <a:p>
+            <a:pPr lvl="0" indent="0" marL="0">
+              <a:buNone/>
+            </a:pPr>
+            <a:r>
+              <a:rPr/>
+              <a:t>✏️ </a:t>
+            </a:r>
+            <a:r>
+              <a:rPr b="1"/>
+              <a:t>Your turn:</a:t>
+            </a:r>
+            <a:r>
+              <a:rPr/>
+              <a:t> Describe what you see.</a:t>
+            </a:r>
+          </a:p>
+          <a:p>
+            <a:pPr lvl="0" indent="0">
+              <a:buNone/>
+            </a:pPr>
+            <a:r>
+              <a:rPr>
+                <a:latin typeface="Courier"/>
+              </a:rPr>
+              <a:t>Heaviest species:
+Lightest species:
+Do the spreads (box heights) look similar across species?  Y / N</a:t>
+            </a:r>
+          </a:p>
+        </p:txBody>
+      </p:sp>
+    </p:spTree>
+  </p:cSld>
+</p:sld>
+</file>
+
+<file path=ppt/slides/slide6.xml><?xml version="1.0" encoding="utf-8"?>
+<p:sld xmlns:a="http://schemas.openxmlformats.org/drawingml/2006/main" xmlns:r="http://schemas.openxmlformats.org/officeDocument/2006/relationships" xmlns:p="http://schemas.openxmlformats.org/presentationml/2006/main">
+  <p:cSld>
+    <p:spTree>
+      <p:nvGrpSpPr>
+        <p:cNvPr id="1" name=""/>
+        <p:cNvGrpSpPr/>
+        <p:nvPr/>
+      </p:nvGrpSpPr>
+      <p:grpSpPr>
+        <a:xfrm>
+          <a:off x="0" y="0"/>
+          <a:ext cx="0" cy="0"/>
+          <a:chOff x="0" y="0"/>
+          <a:chExt cx="0" cy="0"/>
+        </a:xfrm>
+      </p:grpSpPr>
+      <p:sp>
+        <p:nvSpPr>
+          <p:cNvPr id="2" name="Title 1"/>
+          <p:cNvSpPr>
+            <a:spLocks noGrp="1"/>
+          </p:cNvSpPr>
+          <p:nvPr>
+            <p:ph type="title"/>
+          </p:nvPr>
+        </p:nvSpPr>
+        <p:spPr>
+          <a:xfrm>
+            <a:off x="0" y="0"/>
+            <a:ext cx="9144000" cy="582780"/>
+          </a:xfrm>
+        </p:spPr>
+        <p:txBody>
+          <a:bodyPr/>
+          <a:lstStyle/>
+          <a:p>
+            <a:pPr lvl="0" indent="0" marL="0">
+              <a:buNone/>
+            </a:pPr>
+            <a:r>
+              <a:rPr/>
+              <a:t>Part 3 · State your hypotheses</a:t>
+            </a:r>
+          </a:p>
+        </p:txBody>
+      </p:sp>
+      <p:sp>
+        <p:nvSpPr>
+          <p:cNvPr id="3" name="Content Placeholder 2"/>
+          <p:cNvSpPr>
+            <a:spLocks noGrp="1"/>
+          </p:cNvSpPr>
+          <p:nvPr>
+            <p:ph idx="1"/>
+          </p:nvPr>
+        </p:nvSpPr>
+        <p:spPr/>
+        <p:txBody>
+          <a:bodyPr/>
+          <a:lstStyle/>
+          <a:p>
+            <a:pPr lvl="0" indent="0" marL="0">
+              <a:buNone/>
+            </a:pPr>
+            <a:r>
+              <a:rPr/>
+              <a:t>✏️ </a:t>
+            </a:r>
+            <a:r>
+              <a:rPr b="1"/>
+              <a:t>Your turn:</a:t>
+            </a:r>
+            <a:r>
+              <a:rPr/>
+              <a:t> Write the ANOVA hypotheses in words and symbols.</a:t>
+            </a:r>
+          </a:p>
+          <a:p>
+            <a:pPr lvl="0" indent="0">
+              <a:buNone/>
+            </a:pPr>
+            <a:r>
+              <a:rPr>
+                <a:latin typeface="Courier"/>
+              </a:rPr>
+              <a:t>H₀ (null) in words:
+Hₐ (alternate) in words:
+In symbols:  H₀: μ_Adelie = μ_Chinstrap = μ_Gentoo
+             Hₐ:
+Significance level α:</a:t>
+            </a:r>
+          </a:p>
+          <a:p>
+            <a:pPr lvl="0" indent="0" marL="1270000">
+              <a:buNone/>
+            </a:pPr>
+            <a:r>
+              <a:rPr sz="2000"/>
+              <a:t>💡 </a:t>
+            </a:r>
+            <a:r>
+              <a:rPr sz="2000" b="1"/>
+              <a:t>Key idea:</a:t>
+            </a:r>
+            <a:r>
+              <a:rPr sz="2000"/>
+              <a:t> Hₐ only says “at least one differs” — it does </a:t>
+            </a:r>
+            <a:r>
+              <a:rPr sz="2000" b="1"/>
+              <a:t>not</a:t>
+            </a:r>
+            <a:r>
+              <a:rPr sz="2000"/>
+              <a:t> say which. Finding which is the job of the post-hoc test in Part 9.</a:t>
+            </a:r>
+          </a:p>
+        </p:txBody>
+      </p:sp>
+    </p:spTree>
+  </p:cSld>
+</p:sld>
+</file>
+
+<file path=ppt/slides/slide7.xml><?xml version="1.0" encoding="utf-8"?>
+<p:sld xmlns:a="http://schemas.openxmlformats.org/drawingml/2006/main" xmlns:r="http://schemas.openxmlformats.org/officeDocument/2006/relationships" xmlns:p="http://schemas.openxmlformats.org/presentationml/2006/main">
+  <p:cSld>
+    <p:spTree>
+      <p:nvGrpSpPr>
+        <p:cNvPr id="1" name=""/>
+        <p:cNvGrpSpPr/>
+        <p:nvPr/>
+      </p:nvGrpSpPr>
+      <p:grpSpPr>
+        <a:xfrm>
+          <a:off x="0" y="0"/>
+          <a:ext cx="0" cy="0"/>
+          <a:chOff x="0" y="0"/>
+          <a:chExt cx="0" cy="0"/>
+        </a:xfrm>
+      </p:grpSpPr>
+      <p:sp>
+        <p:nvSpPr>
+          <p:cNvPr id="3" name="Content Placeholder 2"/>
+          <p:cNvSpPr>
+            <a:spLocks noGrp="1"/>
+          </p:cNvSpPr>
+          <p:nvPr>
+            <p:ph idx="1"/>
+          </p:nvPr>
+        </p:nvSpPr>
+        <p:spPr/>
+        <p:txBody>
+          <a:bodyPr/>
+          <a:lstStyle/>
+          <a:p>
+            <a:pPr lvl="0" indent="0" marL="0">
+              <a:spcBef>
+                <a:spcPts val="3000"/>
+              </a:spcBef>
+              <a:buNone/>
+            </a:pPr>
+            <a:r>
+              <a:rPr sz="2000" b="1"/>
+              <a:t>🧩 Chunk 2 — Fit &amp; check assumptions </a:t>
+            </a:r>
+            <a:r>
+              <a:rPr sz="2000" b="1" i="1"/>
+              <a:t>(after lecture Chunk 2)</a:t>
+            </a:r>
+          </a:p>
+          <a:p>
+            <a:pPr lvl="0" indent="0" marL="1270000">
+              <a:buNone/>
+            </a:pPr>
+            <a:r>
+              <a:rPr sz="2000"/>
+              <a:t>Parts 4–6: fit the model, check residual normality, check equal variance.</a:t>
+            </a:r>
+          </a:p>
+        </p:txBody>
+      </p:sp>
+    </p:spTree>
+  </p:cSld>
+</p:sld>
+</file>
+
+<file path=ppt/slides/slide8.xml><?xml version="1.0" encoding="utf-8"?>
+<p:sld xmlns:a="http://schemas.openxmlformats.org/drawingml/2006/main" xmlns:r="http://schemas.openxmlformats.org/officeDocument/2006/relationships" xmlns:p="http://schemas.openxmlformats.org/presentationml/2006/main">
+  <p:cSld>
+    <p:spTree>
+      <p:nvGrpSpPr>
+        <p:cNvPr id="1" name=""/>
+        <p:cNvGrpSpPr/>
+        <p:nvPr/>
+      </p:nvGrpSpPr>
+      <p:grpSpPr>
+        <a:xfrm>
+          <a:off x="0" y="0"/>
+          <a:ext cx="0" cy="0"/>
+          <a:chOff x="0" y="0"/>
+          <a:chExt cx="0" cy="0"/>
+        </a:xfrm>
+      </p:grpSpPr>
+      <p:sp>
+        <p:nvSpPr>
+          <p:cNvPr id="2" name="Title 1"/>
+          <p:cNvSpPr>
+            <a:spLocks noGrp="1"/>
+          </p:cNvSpPr>
+          <p:nvPr>
+            <p:ph type="title"/>
+          </p:nvPr>
+        </p:nvSpPr>
+        <p:spPr>
+          <a:xfrm>
+            <a:off x="0" y="0"/>
+            <a:ext cx="9144000" cy="582780"/>
+          </a:xfrm>
+        </p:spPr>
+        <p:txBody>
+          <a:bodyPr/>
+          <a:lstStyle/>
+          <a:p>
+            <a:pPr lvl="0" indent="0" marL="0">
+              <a:buNone/>
+            </a:pPr>
+            <a:r>
+              <a:rPr/>
+              <a:t>Part 4 · Fit the model</a:t>
+            </a:r>
+          </a:p>
+        </p:txBody>
+      </p:sp>
+      <p:sp>
+        <p:nvSpPr>
+          <p:cNvPr id="3" name="Content Placeholder 2"/>
+          <p:cNvSpPr>
+            <a:spLocks noGrp="1"/>
+          </p:cNvSpPr>
+          <p:nvPr>
+            <p:ph idx="1"/>
+          </p:nvPr>
+        </p:nvSpPr>
+        <p:spPr/>
+        <p:txBody>
+          <a:bodyPr/>
+          <a:lstStyle/>
+          <a:p>
+            <a:pPr lvl="0" indent="0" marL="0">
+              <a:buNone/>
+            </a:pPr>
+            <a:r>
+              <a:rPr b="1"/>
+              <a:t>▶ Run this:</a:t>
+            </a:r>
+          </a:p>
+          <a:p>
+            <a:pPr lvl="0" indent="0">
+              <a:buNone/>
+            </a:pPr>
+            <a:r>
+              <a:rPr>
+                <a:solidFill>
+                  <a:srgbClr val="5E5E5E"/>
+                </a:solidFill>
+                <a:latin typeface="Courier"/>
+              </a:rPr>
+              <a:t># ANOVA is a linear model with a categorical X ----------</a:t>
+            </a:r>
+            <a:br/>
+            <a:r>
+              <a:rPr>
+                <a:solidFill>
+                  <a:srgbClr val="003B4F"/>
+                </a:solidFill>
+                <a:latin typeface="Courier"/>
+              </a:rPr>
+              <a:t>mass_model &lt;- </a:t>
+            </a:r>
+            <a:r>
+              <a:rPr>
+                <a:solidFill>
+                  <a:srgbClr val="4758AB"/>
+                </a:solidFill>
+                <a:latin typeface="Courier"/>
+              </a:rPr>
+              <a:t>lm</a:t>
+            </a:r>
+            <a:r>
+              <a:rPr>
+                <a:solidFill>
+                  <a:srgbClr val="003B4F"/>
+                </a:solidFill>
+                <a:latin typeface="Courier"/>
+              </a:rPr>
+              <a:t>(body_mass_g </a:t>
+            </a:r>
+            <a:r>
+              <a:rPr>
+                <a:solidFill>
+                  <a:srgbClr val="5E5E5E"/>
+                </a:solidFill>
+                <a:latin typeface="Courier"/>
+              </a:rPr>
+              <a:t>~</a:t>
+            </a:r>
+            <a:r>
+              <a:rPr>
+                <a:solidFill>
+                  <a:srgbClr val="003B4F"/>
+                </a:solidFill>
+                <a:latin typeface="Courier"/>
+              </a:rPr>
+              <a:t> species, </a:t>
+            </a:r>
+            <a:r>
+              <a:rPr>
+                <a:solidFill>
+                  <a:srgbClr val="657422"/>
+                </a:solidFill>
+                <a:latin typeface="Courier"/>
+              </a:rPr>
+              <a:t>data =</a:t>
+            </a:r>
+            <a:r>
+              <a:rPr>
+                <a:solidFill>
+                  <a:srgbClr val="003B4F"/>
+                </a:solidFill>
+                <a:latin typeface="Courier"/>
+              </a:rPr>
+              <a:t> penguins_df)</a:t>
+            </a:r>
+          </a:p>
+          <a:p>
+            <a:pPr lvl="0" indent="0" marL="0">
+              <a:buNone/>
+            </a:pPr>
+            <a:r>
+              <a:rPr/>
+              <a:t>✏️ </a:t>
+            </a:r>
+            <a:r>
+              <a:rPr b="1"/>
+              <a:t>Your turn:</a:t>
+            </a:r>
+            <a:r>
+              <a:rPr/>
+              <a:t> This is the same </a:t>
+            </a:r>
+            <a:r>
+              <a:rPr>
+                <a:latin typeface="Courier"/>
+              </a:rPr>
+              <a:t>lm()</a:t>
+            </a:r>
+            <a:r>
+              <a:rPr/>
+              <a:t> syntax as the regression worksheet. What is different about the X variable this time?</a:t>
+            </a:r>
+          </a:p>
+          <a:p>
+            <a:pPr lvl="0" indent="0">
+              <a:buNone/>
+            </a:pPr>
+            <a:r>
+              <a:rPr>
+                <a:latin typeface="Courier"/>
+              </a:rPr>
+              <a:t>Your answer:</a:t>
+            </a:r>
+          </a:p>
+        </p:txBody>
+      </p:sp>
+    </p:spTree>
+  </p:cSld>
+</p:sld>
+</file>
+
+<file path=ppt/slides/slide9.xml><?xml version="1.0" encoding="utf-8"?>
+<p:sld xmlns:a="http://schemas.openxmlformats.org/drawingml/2006/main" xmlns:r="http://schemas.openxmlformats.org/officeDocument/2006/relationships" xmlns:p="http://schemas.openxmlformats.org/presentationml/2006/main">
+  <p:cSld>
+    <p:spTree>
+      <p:nvGrpSpPr>
+        <p:cNvPr id="1" name=""/>
+        <p:cNvGrpSpPr/>
+        <p:nvPr/>
+      </p:nvGrpSpPr>
+      <p:grpSpPr>
+        <a:xfrm>
+          <a:off x="0" y="0"/>
+          <a:ext cx="0" cy="0"/>
+          <a:chOff x="0" y="0"/>
+          <a:chExt cx="0" cy="0"/>
+        </a:xfrm>
+      </p:grpSpPr>
+      <p:sp>
+        <p:nvSpPr>
+          <p:cNvPr id="2" name="Title 1"/>
+          <p:cNvSpPr>
+            <a:spLocks noGrp="1"/>
+          </p:cNvSpPr>
+          <p:nvPr>
+            <p:ph type="title"/>
+          </p:nvPr>
+        </p:nvSpPr>
+        <p:spPr>
+          <a:xfrm>
+            <a:off x="0" y="0"/>
+            <a:ext cx="9144000" cy="582780"/>
+          </a:xfrm>
+        </p:spPr>
+        <p:txBody>
+          <a:bodyPr/>
+          <a:lstStyle/>
+          <a:p>
+            <a:pPr lvl="0" indent="0" marL="0">
+              <a:buNone/>
+            </a:pPr>
+            <a:r>
+              <a:rPr/>
+              <a:t>Part 5 · Assumption 1 — normality of residuals</a:t>
+            </a:r>
+          </a:p>
+        </p:txBody>
+      </p:sp>
+      <p:sp>
+        <p:nvSpPr>
+          <p:cNvPr id="3" name="Content Placeholder 2"/>
+          <p:cNvSpPr>
+            <a:spLocks noGrp="1"/>
+          </p:cNvSpPr>
+          <p:nvPr>
+            <p:ph idx="1"/>
+          </p:nvPr>
+        </p:nvSpPr>
+        <p:spPr/>
+        <p:txBody>
+          <a:bodyPr/>
+          <a:lstStyle/>
+          <a:p>
+            <a:pPr lvl="0" indent="0" marL="0">
+              <a:buNone/>
+            </a:pPr>
+            <a:r>
+              <a:rPr b="1"/>
+              <a:t>▶ Run this:</a:t>
+            </a:r>
+          </a:p>
+          <a:p>
+            <a:pPr lvl="0" indent="0">
+              <a:buNone/>
+            </a:pPr>
+            <a:r>
+              <a:rPr>
+                <a:solidFill>
+                  <a:srgbClr val="5E5E5E"/>
+                </a:solidFill>
+                <a:latin typeface="Courier"/>
+              </a:rPr>
+              <a:t># QQ plot of residuals -----------------------------------</a:t>
+            </a:r>
+            <a:br/>
+            <a:r>
+              <a:rPr>
+                <a:solidFill>
+                  <a:srgbClr val="003B4F"/>
+                </a:solidFill>
+                <a:latin typeface="Courier"/>
+              </a:rPr>
+              <a:t>qq_mass_plot &lt;- penguins_df </a:t>
+            </a:r>
+            <a:r>
+              <a:rPr>
+                <a:solidFill>
+                  <a:srgbClr val="5E5E5E"/>
+                </a:solidFill>
+                <a:latin typeface="Courier"/>
+              </a:rPr>
+              <a:t>%&gt;%</a:t>
+            </a:r>
+            <a:br/>
+            <a:r>
+              <a:rPr>
+                <a:solidFill>
+                  <a:srgbClr val="003B4F"/>
+                </a:solidFill>
+                <a:latin typeface="Courier"/>
+              </a:rPr>
+              <a:t>  </a:t>
+            </a:r>
+            <a:r>
+              <a:rPr>
+                <a:solidFill>
+                  <a:srgbClr val="4758AB"/>
+                </a:solidFill>
+                <a:latin typeface="Courier"/>
+              </a:rPr>
+              <a:t>mutate</a:t>
+            </a:r>
+            <a:r>
+              <a:rPr>
+                <a:solidFill>
+                  <a:srgbClr val="003B4F"/>
+                </a:solidFill>
+                <a:latin typeface="Courier"/>
+              </a:rPr>
+              <a:t>(</a:t>
+            </a:r>
+            <a:r>
+              <a:rPr>
+                <a:solidFill>
+                  <a:srgbClr val="657422"/>
+                </a:solidFill>
+                <a:latin typeface="Courier"/>
+              </a:rPr>
+              <a:t>resid =</a:t>
+            </a:r>
+            <a:r>
+              <a:rPr>
+                <a:solidFill>
+                  <a:srgbClr val="003B4F"/>
+                </a:solidFill>
+                <a:latin typeface="Courier"/>
+              </a:rPr>
+              <a:t> </a:t>
+            </a:r>
+            <a:r>
+              <a:rPr>
+                <a:solidFill>
+                  <a:srgbClr val="4758AB"/>
+                </a:solidFill>
+                <a:latin typeface="Courier"/>
+              </a:rPr>
+              <a:t>residuals</a:t>
+            </a:r>
+            <a:r>
+              <a:rPr>
+                <a:solidFill>
+                  <a:srgbClr val="003B4F"/>
+                </a:solidFill>
+                <a:latin typeface="Courier"/>
+              </a:rPr>
+              <a:t>(mass_model)) </a:t>
+            </a:r>
+            <a:r>
+              <a:rPr>
+                <a:solidFill>
+                  <a:srgbClr val="5E5E5E"/>
+                </a:solidFill>
+                <a:latin typeface="Courier"/>
+              </a:rPr>
+              <a:t>%&gt;%</a:t>
+            </a:r>
+            <a:br/>
+            <a:r>
+              <a:rPr>
+                <a:solidFill>
+                  <a:srgbClr val="003B4F"/>
+                </a:solidFill>
+                <a:latin typeface="Courier"/>
+              </a:rPr>
+              <a:t>  </a:t>
+            </a:r>
+            <a:r>
+              <a:rPr>
+                <a:solidFill>
+                  <a:srgbClr val="4758AB"/>
+                </a:solidFill>
+                <a:latin typeface="Courier"/>
+              </a:rPr>
+              <a:t>ggplot</a:t>
+            </a:r>
+            <a:r>
+              <a:rPr>
+                <a:solidFill>
+                  <a:srgbClr val="003B4F"/>
+                </a:solidFill>
+                <a:latin typeface="Courier"/>
+              </a:rPr>
+              <a:t>(</a:t>
+            </a:r>
+            <a:r>
+              <a:rPr>
+                <a:solidFill>
+                  <a:srgbClr val="4758AB"/>
+                </a:solidFill>
+                <a:latin typeface="Courier"/>
+              </a:rPr>
+              <a:t>aes</a:t>
+            </a:r>
+            <a:r>
+              <a:rPr>
+                <a:solidFill>
+                  <a:srgbClr val="003B4F"/>
+                </a:solidFill>
+                <a:latin typeface="Courier"/>
+              </a:rPr>
+              <a:t>(</a:t>
+            </a:r>
+            <a:r>
+              <a:rPr>
+                <a:solidFill>
+                  <a:srgbClr val="657422"/>
+                </a:solidFill>
+                <a:latin typeface="Courier"/>
+              </a:rPr>
+              <a:t>sample =</a:t>
+            </a:r>
+            <a:r>
+              <a:rPr>
+                <a:solidFill>
+                  <a:srgbClr val="003B4F"/>
+                </a:solidFill>
+                <a:latin typeface="Courier"/>
+              </a:rPr>
+              <a:t> resid)) </a:t>
+            </a:r>
+            <a:r>
+              <a:rPr>
+                <a:solidFill>
+                  <a:srgbClr val="5E5E5E"/>
+                </a:solidFill>
+                <a:latin typeface="Courier"/>
+              </a:rPr>
+              <a:t>+</a:t>
+            </a:r>
+            <a:br/>
+            <a:r>
+              <a:rPr>
+                <a:solidFill>
+                  <a:srgbClr val="003B4F"/>
+                </a:solidFill>
+                <a:latin typeface="Courier"/>
+              </a:rPr>
+              <a:t>  </a:t>
+            </a:r>
+            <a:r>
+              <a:rPr>
+                <a:solidFill>
+                  <a:srgbClr val="4758AB"/>
+                </a:solidFill>
+                <a:latin typeface="Courier"/>
+              </a:rPr>
+              <a:t>stat_qq</a:t>
+            </a:r>
+            <a:r>
+              <a:rPr>
+                <a:solidFill>
+                  <a:srgbClr val="003B4F"/>
+                </a:solidFill>
+                <a:latin typeface="Courier"/>
+              </a:rPr>
+              <a:t>() </a:t>
+            </a:r>
+            <a:r>
+              <a:rPr>
+                <a:solidFill>
+                  <a:srgbClr val="5E5E5E"/>
+                </a:solidFill>
+                <a:latin typeface="Courier"/>
+              </a:rPr>
+              <a:t>+</a:t>
+            </a:r>
+            <a:br/>
+            <a:r>
+              <a:rPr>
+                <a:solidFill>
+                  <a:srgbClr val="003B4F"/>
+                </a:solidFill>
+                <a:latin typeface="Courier"/>
+              </a:rPr>
+              <a:t>  </a:t>
+            </a:r>
+            <a:r>
+              <a:rPr>
+                <a:solidFill>
+                  <a:srgbClr val="4758AB"/>
+                </a:solidFill>
+                <a:latin typeface="Courier"/>
+              </a:rPr>
+              <a:t>stat_qq_line</a:t>
+            </a:r>
+            <a:r>
+              <a:rPr>
+                <a:solidFill>
+                  <a:srgbClr val="003B4F"/>
+                </a:solidFill>
+                <a:latin typeface="Courier"/>
+              </a:rPr>
+              <a:t>(</a:t>
+            </a:r>
+            <a:r>
+              <a:rPr>
+                <a:solidFill>
+                  <a:srgbClr val="657422"/>
+                </a:solidFill>
+                <a:latin typeface="Courier"/>
+              </a:rPr>
+              <a:t>color =</a:t>
+            </a:r>
+            <a:r>
+              <a:rPr>
+                <a:solidFill>
+                  <a:srgbClr val="003B4F"/>
+                </a:solidFill>
+                <a:latin typeface="Courier"/>
+              </a:rPr>
+              <a:t> </a:t>
+            </a:r>
+            <a:r>
+              <a:rPr>
+                <a:solidFill>
+                  <a:srgbClr val="20794D"/>
+                </a:solidFill>
+                <a:latin typeface="Courier"/>
+              </a:rPr>
+              <a:t>"red"</a:t>
+            </a:r>
+            <a:r>
+              <a:rPr>
+                <a:solidFill>
+                  <a:srgbClr val="003B4F"/>
+                </a:solidFill>
+                <a:latin typeface="Courier"/>
+              </a:rPr>
+              <a:t>, </a:t>
+            </a:r>
+            <a:r>
+              <a:rPr>
+                <a:solidFill>
+                  <a:srgbClr val="657422"/>
+                </a:solidFill>
+                <a:latin typeface="Courier"/>
+              </a:rPr>
+              <a:t>linewidth =</a:t>
+            </a:r>
+            <a:r>
+              <a:rPr>
+                <a:solidFill>
+                  <a:srgbClr val="003B4F"/>
+                </a:solidFill>
+                <a:latin typeface="Courier"/>
+              </a:rPr>
+              <a:t> </a:t>
+            </a:r>
+            <a:r>
+              <a:rPr>
+                <a:solidFill>
+                  <a:srgbClr val="AD0000"/>
+                </a:solidFill>
+                <a:latin typeface="Courier"/>
+              </a:rPr>
+              <a:t>0.8</a:t>
+            </a:r>
+            <a:r>
+              <a:rPr>
+                <a:solidFill>
+                  <a:srgbClr val="003B4F"/>
+                </a:solidFill>
+                <a:latin typeface="Courier"/>
+              </a:rPr>
+              <a:t>) </a:t>
+            </a:r>
+            <a:r>
+              <a:rPr>
+                <a:solidFill>
+                  <a:srgbClr val="5E5E5E"/>
+                </a:solidFill>
+                <a:latin typeface="Courier"/>
+              </a:rPr>
+              <a:t>+</a:t>
+            </a:r>
+            <a:br/>
+            <a:r>
+              <a:rPr>
+                <a:solidFill>
+                  <a:srgbClr val="003B4F"/>
+                </a:solidFill>
+                <a:latin typeface="Courier"/>
+              </a:rPr>
+              <a:t>  </a:t>
+            </a:r>
+            <a:r>
+              <a:rPr>
+                <a:solidFill>
+                  <a:srgbClr val="4758AB"/>
+                </a:solidFill>
+                <a:latin typeface="Courier"/>
+              </a:rPr>
+              <a:t>labs</a:t>
+            </a:r>
+            <a:r>
+              <a:rPr>
+                <a:solidFill>
+                  <a:srgbClr val="003B4F"/>
+                </a:solidFill>
+                <a:latin typeface="Courier"/>
+              </a:rPr>
+              <a:t>(</a:t>
+            </a:r>
+            <a:r>
+              <a:rPr>
+                <a:solidFill>
+                  <a:srgbClr val="657422"/>
+                </a:solidFill>
+                <a:latin typeface="Courier"/>
+              </a:rPr>
+              <a:t>x =</a:t>
+            </a:r>
+            <a:r>
+              <a:rPr>
+                <a:solidFill>
+                  <a:srgbClr val="003B4F"/>
+                </a:solidFill>
+                <a:latin typeface="Courier"/>
+              </a:rPr>
+              <a:t> </a:t>
+            </a:r>
+            <a:r>
+              <a:rPr>
+                <a:solidFill>
+                  <a:srgbClr val="20794D"/>
+                </a:solidFill>
+                <a:latin typeface="Courier"/>
+              </a:rPr>
+              <a:t>"Theoretical"</a:t>
+            </a:r>
+            <a:r>
+              <a:rPr>
+                <a:solidFill>
+                  <a:srgbClr val="003B4F"/>
+                </a:solidFill>
+                <a:latin typeface="Courier"/>
+              </a:rPr>
+              <a:t>, </a:t>
+            </a:r>
+            <a:r>
+              <a:rPr>
+                <a:solidFill>
+                  <a:srgbClr val="657422"/>
+                </a:solidFill>
+                <a:latin typeface="Courier"/>
+              </a:rPr>
+              <a:t>y =</a:t>
+            </a:r>
+            <a:r>
+              <a:rPr>
+                <a:solidFill>
+                  <a:srgbClr val="003B4F"/>
+                </a:solidFill>
+                <a:latin typeface="Courier"/>
+              </a:rPr>
+              <a:t> </a:t>
+            </a:r>
+            <a:r>
+              <a:rPr>
+                <a:solidFill>
+                  <a:srgbClr val="20794D"/>
+                </a:solidFill>
+                <a:latin typeface="Courier"/>
+              </a:rPr>
+              <a:t>"Sample residuals"</a:t>
+            </a:r>
+            <a:r>
+              <a:rPr>
+                <a:solidFill>
+                  <a:srgbClr val="003B4F"/>
+                </a:solidFill>
+                <a:latin typeface="Courier"/>
+              </a:rPr>
+              <a:t>) </a:t>
+            </a:r>
+            <a:r>
+              <a:rPr>
+                <a:solidFill>
+                  <a:srgbClr val="5E5E5E"/>
+                </a:solidFill>
+                <a:latin typeface="Courier"/>
+              </a:rPr>
+              <a:t>+</a:t>
+            </a:r>
+            <a:br/>
+            <a:r>
+              <a:rPr>
+                <a:solidFill>
+                  <a:srgbClr val="003B4F"/>
+                </a:solidFill>
+                <a:latin typeface="Courier"/>
+              </a:rPr>
+              <a:t>  </a:t>
+            </a:r>
+            <a:r>
+              <a:rPr>
+                <a:solidFill>
+                  <a:srgbClr val="4758AB"/>
+                </a:solidFill>
+                <a:latin typeface="Courier"/>
+              </a:rPr>
+              <a:t>theme_minimal</a:t>
+            </a:r>
+            <a:r>
+              <a:rPr>
+                <a:solidFill>
+                  <a:srgbClr val="003B4F"/>
+                </a:solidFill>
+                <a:latin typeface="Courier"/>
+              </a:rPr>
+              <a:t>()</a:t>
+            </a:r>
+            <a:br/>
+            <a:br/>
+            <a:r>
+              <a:rPr>
+                <a:solidFill>
+                  <a:srgbClr val="003B4F"/>
+                </a:solidFill>
+                <a:latin typeface="Courier"/>
+              </a:rPr>
+              <a:t>qq_mass_plot</a:t>
+            </a:r>
+          </a:p>
+          <a:p>
+            <a:pPr lvl="0" indent="0">
+              <a:buNone/>
+            </a:pPr>
+            <a:r>
+              <a:rPr>
+                <a:solidFill>
+                  <a:srgbClr val="5E5E5E"/>
+                </a:solidFill>
+                <a:latin typeface="Courier"/>
+              </a:rPr>
+              <a:t># Formal test on the residuals ---------------------------</a:t>
+            </a:r>
+            <a:br/>
+            <a:r>
+              <a:rPr>
+                <a:solidFill>
+                  <a:srgbClr val="4758AB"/>
+                </a:solidFill>
+                <a:latin typeface="Courier"/>
+              </a:rPr>
+              <a:t>shapiro.test</a:t>
+            </a:r>
+            <a:r>
+              <a:rPr>
+                <a:solidFill>
+                  <a:srgbClr val="003B4F"/>
+                </a:solidFill>
+                <a:latin typeface="Courier"/>
+              </a:rPr>
+              <a:t>(</a:t>
+            </a:r>
+            <a:r>
+              <a:rPr>
+                <a:solidFill>
+                  <a:srgbClr val="4758AB"/>
+                </a:solidFill>
+                <a:latin typeface="Courier"/>
+              </a:rPr>
+              <a:t>residuals</a:t>
+            </a:r>
+            <a:r>
+              <a:rPr>
+                <a:solidFill>
+                  <a:srgbClr val="003B4F"/>
+                </a:solidFill>
+                <a:latin typeface="Courier"/>
+              </a:rPr>
+              <a:t>(mass_model))</a:t>
+            </a:r>
+          </a:p>
+          <a:p>
+            <a:pPr lvl="0" indent="0" marL="0">
+              <a:buNone/>
+            </a:pPr>
+            <a:r>
+              <a:rPr/>
+              <a:t>✏️ </a:t>
+            </a:r>
+            <a:r>
+              <a:rPr b="1"/>
+              <a:t>Your turn:</a:t>
+            </a:r>
+            <a:r>
+              <a:rPr/>
+              <a:t> Record and interpret.</a:t>
+            </a:r>
+          </a:p>
+          <a:p>
+            <a:pPr lvl="0" indent="0">
+              <a:buNone/>
+            </a:pPr>
+            <a:r>
+              <a:rPr>
+                <a:latin typeface="Courier"/>
+              </a:rPr>
+              <a:t>Do the QQ points track the red line?  Y / mostly / no
+Shapiro-Wilk p-value =</a:t>
+            </a:r>
+          </a:p>
+          <a:p>
+            <a:pPr lvl="0" indent="0" marL="0">
+              <a:buNone/>
+            </a:pPr>
+            <a:r>
+              <a:rPr/>
+              <a:t>✏️ </a:t>
+            </a:r>
+            <a:r>
+              <a:rPr b="1"/>
+              <a:t>Your turn:</a:t>
+            </a:r>
+            <a:r>
+              <a:rPr/>
+              <a:t> With ~340 penguins, Shapiro-Wilk is very sensitive and may flag tiny departures. Which should you trust more here — the QQ plot or the Shapiro p-value? Why?</a:t>
+            </a:r>
+          </a:p>
+          <a:p>
+            <a:pPr lvl="0" indent="0">
+              <a:buNone/>
+            </a:pPr>
+            <a:r>
+              <a:rPr>
+                <a:latin typeface="Courier"/>
+              </a:rPr>
+              <a:t>Your answer:</a:t>
             </a:r>
           </a:p>
         </p:txBody>

--- a/docs/content/one_way_anova/one_way_anova_activity.pptx
+++ b/docs/content/one_way_anova/one_way_anova_activity.pptx
@@ -18,6 +18,8 @@
     <p:sldId id="266" r:id="rId12"/>
     <p:sldId id="267" r:id="rId13"/>
     <p:sldId id="268" r:id="rId14"/>
+    <p:sldId id="269" r:id="rId15"/>
+    <p:sldId id="270" r:id="rId16"/>
   </p:sldIdLst>
   <p:sldSz cx="9144000" cy="5143500" type="screen16x9"/>
   <p:notesSz cx="6858000" cy="9144000"/>
@@ -3291,7 +3293,7 @@
             </a:pPr>
             <a:r>
               <a:rPr/>
-              <a:t>Worksheet 13 — One-Way ANOVA I: Setting Up the Test</a:t>
+              <a:t>Worksheet — One-Way ANOVA I: Setting Up the Test (with Factors)</a:t>
             </a:r>
           </a:p>
         </p:txBody>
@@ -3321,7 +3323,7 @@
             </a:pPr>
             <a:r>
               <a:rPr/>
-              <a:t>Exploring the penguins, fitting the model, and checking assumptions</a:t>
+              <a:t>Exploring the penguins, ordering groups with factors, fitting the model, and checking assumptions</a:t>
             </a:r>
             <a:br/>
             <a:br/>
@@ -3404,7 +3406,13 @@
             </a:pPr>
             <a:r>
               <a:rPr/>
-              <a:t>Part 6 · Assumption 2 — equal variance</a:t>
+              <a:t>Part 6 · Set the reference level with </a:t>
+            </a:r>
+            <a:r>
+              <a:rPr>
+                <a:latin typeface="Courier"/>
+              </a:rPr>
+              <a:t>fct_relevel()</a:t>
             </a:r>
           </a:p>
         </p:txBody>
@@ -3437,15 +3445,25 @@
             </a:r>
             <a:r>
               <a:rPr sz="2000"/>
-              <a:t> From the box heights in Part 2, predict — will Levene’s test say the variances are equal (</a:t>
-            </a:r>
-            <a:r>
-              <a:rPr sz="2000" i="1"/>
-              <a:t>p</a:t>
+              <a:t> </a:t>
+            </a:r>
+            <a:r>
+              <a:rPr sz="2000">
+                <a:latin typeface="Courier"/>
+              </a:rPr>
+              <a:t>lm()</a:t>
             </a:r>
             <a:r>
               <a:rPr sz="2000"/>
-              <a:t> &gt; 0.05) or unequal?</a:t>
+              <a:t> uses the </a:t>
+            </a:r>
+            <a:r>
+              <a:rPr sz="2000" b="1"/>
+              <a:t>first</a:t>
+            </a:r>
+            <a:r>
+              <a:rPr sz="2000"/>
+              <a:t> factor level as the baseline. If you move Gentoo to the front, will the overall F-test / p-value change, or only the coefficients?</a:t>
             </a:r>
           </a:p>
           <a:p>
@@ -3468,7 +3486,7 @@
                 </a:solidFill>
                 <a:latin typeface="Courier"/>
               </a:rPr>
-              <a:t># Levene's test — H0: all groups have equal variance ----</a:t>
+              <a:t># Coefficients are differences FROM the first level -----</a:t>
             </a:r>
             <a:br/>
             <a:r>
@@ -3478,7 +3496,148 @@
                 </a:solidFill>
                 <a:latin typeface="Courier"/>
               </a:rPr>
-              <a:t>leveneTest</a:t>
+              <a:t>coef</a:t>
+            </a:r>
+            <a:r>
+              <a:rPr>
+                <a:solidFill>
+                  <a:srgbClr val="003B4F"/>
+                </a:solidFill>
+                <a:latin typeface="Courier"/>
+              </a:rPr>
+              <a:t>(mass_model)</a:t>
+            </a:r>
+            <a:br/>
+            <a:br/>
+            <a:r>
+              <a:rPr>
+                <a:solidFill>
+                  <a:srgbClr val="5E5E5E"/>
+                </a:solidFill>
+                <a:latin typeface="Courier"/>
+              </a:rPr>
+              <a:t># Make Gentoo the reference, refit, compare ------------</a:t>
+            </a:r>
+            <a:br/>
+            <a:r>
+              <a:rPr>
+                <a:solidFill>
+                  <a:srgbClr val="003B4F"/>
+                </a:solidFill>
+                <a:latin typeface="Courier"/>
+              </a:rPr>
+              <a:t>penguins_relevel &lt;- penguins_df </a:t>
+            </a:r>
+            <a:r>
+              <a:rPr>
+                <a:solidFill>
+                  <a:srgbClr val="5E5E5E"/>
+                </a:solidFill>
+                <a:latin typeface="Courier"/>
+              </a:rPr>
+              <a:t>%&gt;%</a:t>
+            </a:r>
+            <a:br/>
+            <a:r>
+              <a:rPr>
+                <a:solidFill>
+                  <a:srgbClr val="003B4F"/>
+                </a:solidFill>
+                <a:latin typeface="Courier"/>
+              </a:rPr>
+              <a:t>  </a:t>
+            </a:r>
+            <a:r>
+              <a:rPr>
+                <a:solidFill>
+                  <a:srgbClr val="4758AB"/>
+                </a:solidFill>
+                <a:latin typeface="Courier"/>
+              </a:rPr>
+              <a:t>mutate</a:t>
+            </a:r>
+            <a:r>
+              <a:rPr>
+                <a:solidFill>
+                  <a:srgbClr val="003B4F"/>
+                </a:solidFill>
+                <a:latin typeface="Courier"/>
+              </a:rPr>
+              <a:t>(</a:t>
+            </a:r>
+            <a:r>
+              <a:rPr>
+                <a:solidFill>
+                  <a:srgbClr val="657422"/>
+                </a:solidFill>
+                <a:latin typeface="Courier"/>
+              </a:rPr>
+              <a:t>species =</a:t>
+            </a:r>
+            <a:r>
+              <a:rPr>
+                <a:solidFill>
+                  <a:srgbClr val="003B4F"/>
+                </a:solidFill>
+                <a:latin typeface="Courier"/>
+              </a:rPr>
+              <a:t> </a:t>
+            </a:r>
+            <a:r>
+              <a:rPr>
+                <a:solidFill>
+                  <a:srgbClr val="4758AB"/>
+                </a:solidFill>
+                <a:latin typeface="Courier"/>
+              </a:rPr>
+              <a:t>fct_relevel</a:t>
+            </a:r>
+            <a:r>
+              <a:rPr>
+                <a:solidFill>
+                  <a:srgbClr val="003B4F"/>
+                </a:solidFill>
+                <a:latin typeface="Courier"/>
+              </a:rPr>
+              <a:t>(species, </a:t>
+            </a:r>
+            <a:r>
+              <a:rPr>
+                <a:solidFill>
+                  <a:srgbClr val="20794D"/>
+                </a:solidFill>
+                <a:latin typeface="Courier"/>
+              </a:rPr>
+              <a:t>"Gentoo"</a:t>
+            </a:r>
+            <a:r>
+              <a:rPr>
+                <a:solidFill>
+                  <a:srgbClr val="003B4F"/>
+                </a:solidFill>
+                <a:latin typeface="Courier"/>
+              </a:rPr>
+              <a:t>))</a:t>
+            </a:r>
+            <a:br/>
+            <a:br/>
+            <a:r>
+              <a:rPr>
+                <a:solidFill>
+                  <a:srgbClr val="003B4F"/>
+                </a:solidFill>
+                <a:latin typeface="Courier"/>
+              </a:rPr>
+              <a:t>mass_model_gentoo &lt;- </a:t>
+            </a:r>
+            <a:r>
+              <a:rPr>
+                <a:solidFill>
+                  <a:srgbClr val="4758AB"/>
+                </a:solidFill>
+                <a:latin typeface="Courier"/>
+              </a:rPr>
+              <a:t>lm</a:t>
             </a:r>
             <a:r>
               <a:rPr>
@@ -3523,7 +3682,26 @@
                 </a:solidFill>
                 <a:latin typeface="Courier"/>
               </a:rPr>
-              <a:t> penguins_df)</a:t>
+              <a:t> penguins_relevel)</a:t>
+            </a:r>
+            <a:br/>
+            <a:r>
+              <a:rPr>
+                <a:solidFill>
+                  <a:srgbClr val="4758AB"/>
+                </a:solidFill>
+                <a:latin typeface="Courier"/>
+              </a:rPr>
+              <a:t>coef</a:t>
+            </a:r>
+            <a:r>
+              <a:rPr>
+                <a:solidFill>
+                  <a:srgbClr val="003B4F"/>
+                </a:solidFill>
+                <a:latin typeface="Courier"/>
+              </a:rPr>
+              <a:t>(mass_model_gentoo)</a:t>
             </a:r>
           </a:p>
           <a:p>
@@ -3540,7 +3718,7 @@
             </a:r>
             <a:r>
               <a:rPr/>
-              <a:t> Record and decide.</a:t>
+              <a:t> Compare the two coefficient sets.</a:t>
             </a:r>
           </a:p>
           <a:p>
@@ -3551,9 +3729,43 @@
               <a:rPr>
                 <a:latin typeface="Courier"/>
               </a:rPr>
-              <a:t>Levene's F =            p =
-Variances equal?  Y / N
-If NOT equal, which test would you use instead? (hint: Welch)</a:t>
+              <a:t>What (Intercept) represents in mass_model:
+What (Intercept) represents in mass_model_gentoo:
+Did the coefficient values change?  Y / N
+Would the overall F-statistic / p-value change?  Y / N</a:t>
+            </a:r>
+          </a:p>
+          <a:p>
+            <a:pPr lvl="0" indent="0" marL="1270000">
+              <a:buNone/>
+            </a:pPr>
+            <a:r>
+              <a:rPr sz="2000"/>
+              <a:t>💡 </a:t>
+            </a:r>
+            <a:r>
+              <a:rPr sz="2000" b="1"/>
+              <a:t>Key idea:</a:t>
+            </a:r>
+            <a:r>
+              <a:rPr sz="2000"/>
+              <a:t> releveling changes </a:t>
+            </a:r>
+            <a:r>
+              <a:rPr sz="2000" i="1"/>
+              <a:t>which comparison the coefficients show</a:t>
+            </a:r>
+            <a:r>
+              <a:rPr sz="2000"/>
+              <a:t>, not </a:t>
+            </a:r>
+            <a:r>
+              <a:rPr sz="2000" i="1"/>
+              <a:t>whether any means differ</a:t>
+            </a:r>
+            <a:r>
+              <a:rPr sz="2000"/>
+              <a:t>. Use it to make the baseline a group your reader cares about (a control, a reference site).</a:t>
             </a:r>
           </a:p>
         </p:txBody>
@@ -3605,7 +3817,7 @@
             </a:pPr>
             <a:r>
               <a:rPr/>
-              <a:t>Review and checkpoint</a:t>
+              <a:t>Part 7 · Assumption 1 — normality of residuals</a:t>
             </a:r>
           </a:p>
         </p:txBody>
@@ -3625,43 +3837,214 @@
           <a:bodyPr/>
           <a:lstStyle/>
           <a:p>
+            <a:pPr lvl="0" indent="0" marL="1270000">
+              <a:buNone/>
+            </a:pPr>
+            <a:r>
+              <a:rPr sz="2000"/>
+              <a:t>🔮 </a:t>
+            </a:r>
+            <a:r>
+              <a:rPr sz="2000" b="1"/>
+              <a:t>Predict first:</a:t>
+            </a:r>
+            <a:r>
+              <a:rPr sz="2000"/>
+              <a:t> </a:t>
+            </a:r>
+            <a:r>
+              <a:rPr sz="2000">
+                <a:latin typeface="Courier"/>
+              </a:rPr>
+              <a:t>plot(mass_model)</a:t>
+            </a:r>
+            <a:r>
+              <a:rPr sz="2000"/>
+              <a:t> gives the same four panels as the regression worksheet. Which panel checks normality?</a:t>
+            </a:r>
+          </a:p>
+          <a:p>
             <a:pPr lvl="0" indent="0" marL="0">
               <a:buNone/>
             </a:pPr>
             <a:r>
-              <a:rPr/>
-              <a:t>At this point you should be able to:</a:t>
-            </a:r>
-          </a:p>
-          <a:p>
-            <a:pPr lvl="0"/>
-            <a:r>
-              <a:rPr/>
-              <a:t>☐ Explain why many t-tests inflate the false-positive rate</a:t>
-            </a:r>
-          </a:p>
-          <a:p>
-            <a:pPr lvl="0"/>
-            <a:r>
-              <a:rPr/>
-              <a:t>☐ State ANOVA hypotheses with μ notation</a:t>
-            </a:r>
-          </a:p>
-          <a:p>
-            <a:pPr lvl="0"/>
-            <a:r>
-              <a:rPr/>
-              <a:t>☐ Fit </a:t>
-            </a:r>
-            <a:r>
-              <a:rPr>
-                <a:latin typeface="Courier"/>
-              </a:rPr>
-              <a:t>lm(Y ~ group)</a:t>
-            </a:r>
-            <a:r>
-              <a:rPr/>
-              <a:t> and check residual normality + equal variance</a:t>
+              <a:rPr b="1"/>
+              <a:t>▶ Run this:</a:t>
+            </a:r>
+          </a:p>
+          <a:p>
+            <a:pPr lvl="0" indent="0">
+              <a:buNone/>
+            </a:pPr>
+            <a:r>
+              <a:rPr>
+                <a:solidFill>
+                  <a:srgbClr val="5E5E5E"/>
+                </a:solidFill>
+                <a:latin typeface="Courier"/>
+              </a:rPr>
+              <a:t># plot() on an lm object gives all four diagnostics -------</a:t>
+            </a:r>
+            <a:br/>
+            <a:r>
+              <a:rPr>
+                <a:solidFill>
+                  <a:srgbClr val="4758AB"/>
+                </a:solidFill>
+                <a:latin typeface="Courier"/>
+              </a:rPr>
+              <a:t>par</a:t>
+            </a:r>
+            <a:r>
+              <a:rPr>
+                <a:solidFill>
+                  <a:srgbClr val="003B4F"/>
+                </a:solidFill>
+                <a:latin typeface="Courier"/>
+              </a:rPr>
+              <a:t>(</a:t>
+            </a:r>
+            <a:r>
+              <a:rPr>
+                <a:solidFill>
+                  <a:srgbClr val="657422"/>
+                </a:solidFill>
+                <a:latin typeface="Courier"/>
+              </a:rPr>
+              <a:t>mfrow =</a:t>
+            </a:r>
+            <a:r>
+              <a:rPr>
+                <a:solidFill>
+                  <a:srgbClr val="003B4F"/>
+                </a:solidFill>
+                <a:latin typeface="Courier"/>
+              </a:rPr>
+              <a:t> </a:t>
+            </a:r>
+            <a:r>
+              <a:rPr>
+                <a:solidFill>
+                  <a:srgbClr val="4758AB"/>
+                </a:solidFill>
+                <a:latin typeface="Courier"/>
+              </a:rPr>
+              <a:t>c</a:t>
+            </a:r>
+            <a:r>
+              <a:rPr>
+                <a:solidFill>
+                  <a:srgbClr val="003B4F"/>
+                </a:solidFill>
+                <a:latin typeface="Courier"/>
+              </a:rPr>
+              <a:t>(</a:t>
+            </a:r>
+            <a:r>
+              <a:rPr>
+                <a:solidFill>
+                  <a:srgbClr val="AD0000"/>
+                </a:solidFill>
+                <a:latin typeface="Courier"/>
+              </a:rPr>
+              <a:t>2</a:t>
+            </a:r>
+            <a:r>
+              <a:rPr>
+                <a:solidFill>
+                  <a:srgbClr val="003B4F"/>
+                </a:solidFill>
+                <a:latin typeface="Courier"/>
+              </a:rPr>
+              <a:t>, </a:t>
+            </a:r>
+            <a:r>
+              <a:rPr>
+                <a:solidFill>
+                  <a:srgbClr val="AD0000"/>
+                </a:solidFill>
+                <a:latin typeface="Courier"/>
+              </a:rPr>
+              <a:t>2</a:t>
+            </a:r>
+            <a:r>
+              <a:rPr>
+                <a:solidFill>
+                  <a:srgbClr val="003B4F"/>
+                </a:solidFill>
+                <a:latin typeface="Courier"/>
+              </a:rPr>
+              <a:t>))</a:t>
+            </a:r>
+            <a:br/>
+            <a:r>
+              <a:rPr>
+                <a:solidFill>
+                  <a:srgbClr val="4758AB"/>
+                </a:solidFill>
+                <a:latin typeface="Courier"/>
+              </a:rPr>
+              <a:t>plot</a:t>
+            </a:r>
+            <a:r>
+              <a:rPr>
+                <a:solidFill>
+                  <a:srgbClr val="003B4F"/>
+                </a:solidFill>
+                <a:latin typeface="Courier"/>
+              </a:rPr>
+              <a:t>(mass_model)</a:t>
+            </a:r>
+          </a:p>
+          <a:p>
+            <a:pPr lvl="0" indent="0">
+              <a:buNone/>
+            </a:pPr>
+            <a:r>
+              <a:rPr>
+                <a:solidFill>
+                  <a:srgbClr val="5E5E5E"/>
+                </a:solidFill>
+                <a:latin typeface="Courier"/>
+              </a:rPr>
+              <a:t># Formal test on the residuals ---------------------------</a:t>
+            </a:r>
+            <a:br/>
+            <a:r>
+              <a:rPr>
+                <a:solidFill>
+                  <a:srgbClr val="4758AB"/>
+                </a:solidFill>
+                <a:latin typeface="Courier"/>
+              </a:rPr>
+              <a:t>shapiro.test</a:t>
+            </a:r>
+            <a:r>
+              <a:rPr>
+                <a:solidFill>
+                  <a:srgbClr val="003B4F"/>
+                </a:solidFill>
+                <a:latin typeface="Courier"/>
+              </a:rPr>
+              <a:t>(</a:t>
+            </a:r>
+            <a:r>
+              <a:rPr>
+                <a:solidFill>
+                  <a:srgbClr val="4758AB"/>
+                </a:solidFill>
+                <a:latin typeface="Courier"/>
+              </a:rPr>
+              <a:t>residuals</a:t>
+            </a:r>
+            <a:r>
+              <a:rPr>
+                <a:solidFill>
+                  <a:srgbClr val="003B4F"/>
+                </a:solidFill>
+                <a:latin typeface="Courier"/>
+              </a:rPr>
+              <a:t>(mass_model))</a:t>
             </a:r>
           </a:p>
           <a:p>
@@ -3674,19 +4057,40 @@
             </a:r>
             <a:r>
               <a:rPr b="1"/>
-              <a:t>Your turn — before you move on:</a:t>
+              <a:t>Your turn:</a:t>
             </a:r>
             <a:r>
               <a:rPr/>
-              <a:t> Run your whole script top to bottom with </a:t>
+              <a:t> Record and interpret.</a:t>
+            </a:r>
+          </a:p>
+          <a:p>
+            <a:pPr lvl="0" indent="0">
+              <a:buNone/>
+            </a:pPr>
+            <a:r>
+              <a:rPr>
+                <a:latin typeface="Courier"/>
+              </a:rPr>
+              <a:t>Do the Normal Q-Q points (panel 2) track the dashed line?  Y / mostly / no
+Shapiro-Wilk p-value =</a:t>
+            </a:r>
+          </a:p>
+          <a:p>
+            <a:pPr lvl="0" indent="0" marL="0">
+              <a:buNone/>
+            </a:pPr>
+            <a:r>
+              <a:rPr/>
+              <a:t>✏️ </a:t>
             </a:r>
             <a:r>
               <a:rPr b="1"/>
-              <a:t>Ctrl/Cmd + Shift + Enter</a:t>
+              <a:t>Your turn:</a:t>
             </a:r>
             <a:r>
               <a:rPr/>
-              <a:t>. Does it run cleanly?</a:t>
+              <a:t> With ~340 penguins, Shapiro-Wilk is very sensitive and may flag tiny departures. Which should you trust more here — the Q-Q panel or the Shapiro p-value? Why?</a:t>
             </a:r>
           </a:p>
           <a:p>
@@ -3697,8 +4101,7 @@
               <a:rPr>
                 <a:latin typeface="Courier"/>
               </a:rPr>
-              <a:t>Ran cleanly?  Y / N
-If not, what error appeared:</a:t>
+              <a:t>Your answer:</a:t>
             </a:r>
           </a:p>
         </p:txBody>
@@ -3750,7 +4153,7 @@
             </a:pPr>
             <a:r>
               <a:rPr/>
-              <a:t>Getting unstuck</a:t>
+              <a:t>Part 8 · Assumption 2 — equal variance</a:t>
             </a:r>
           </a:p>
         </p:txBody>
@@ -3770,70 +4173,136 @@
           <a:bodyPr/>
           <a:lstStyle/>
           <a:p>
-            <a:pPr lvl="0" indent="-342900" marL="342900">
-              <a:buAutoNum type="arabicPeriod"/>
-            </a:pPr>
-            <a:r>
-              <a:rPr b="1">
-                <a:latin typeface="Courier"/>
-              </a:rPr>
-              <a:t>could not find function "penguins"</a:t>
-            </a:r>
+            <a:pPr lvl="0" indent="0" marL="1270000">
+              <a:buNone/>
+            </a:pPr>
+            <a:r>
+              <a:rPr sz="2000"/>
+              <a:t>🔮 </a:t>
+            </a:r>
+            <a:r>
+              <a:rPr sz="2000" b="1"/>
+              <a:t>Predict first:</a:t>
+            </a:r>
+            <a:r>
+              <a:rPr sz="2000"/>
+              <a:t> From the box heights in Part 2, predict — will Levene’s test say the variances are equal (</a:t>
+            </a:r>
+            <a:r>
+              <a:rPr sz="2000" i="1"/>
+              <a:t>p</a:t>
+            </a:r>
+            <a:r>
+              <a:rPr sz="2000"/>
+              <a:t> &gt; 0.05) or unequal?</a:t>
+            </a:r>
+          </a:p>
+          <a:p>
+            <a:pPr lvl="0" indent="0" marL="0">
+              <a:buNone/>
+            </a:pPr>
+            <a:r>
+              <a:rPr b="1"/>
+              <a:t>▶ Run this:</a:t>
+            </a:r>
+          </a:p>
+          <a:p>
+            <a:pPr lvl="0" indent="0">
+              <a:buNone/>
+            </a:pPr>
+            <a:r>
+              <a:rPr>
+                <a:solidFill>
+                  <a:srgbClr val="5E5E5E"/>
+                </a:solidFill>
+                <a:latin typeface="Courier"/>
+              </a:rPr>
+              <a:t># Levene's test — H0: all groups have equal variance ----</a:t>
+            </a:r>
+            <a:br/>
+            <a:r>
+              <a:rPr>
+                <a:solidFill>
+                  <a:srgbClr val="4758AB"/>
+                </a:solidFill>
+                <a:latin typeface="Courier"/>
+              </a:rPr>
+              <a:t>leveneTest</a:t>
+            </a:r>
+            <a:r>
+              <a:rPr>
+                <a:solidFill>
+                  <a:srgbClr val="003B4F"/>
+                </a:solidFill>
+                <a:latin typeface="Courier"/>
+              </a:rPr>
+              <a:t>(body_mass_g </a:t>
+            </a:r>
+            <a:r>
+              <a:rPr>
+                <a:solidFill>
+                  <a:srgbClr val="5E5E5E"/>
+                </a:solidFill>
+                <a:latin typeface="Courier"/>
+              </a:rPr>
+              <a:t>~</a:t>
+            </a:r>
+            <a:r>
+              <a:rPr>
+                <a:solidFill>
+                  <a:srgbClr val="003B4F"/>
+                </a:solidFill>
+                <a:latin typeface="Courier"/>
+              </a:rPr>
+              <a:t> species, </a:t>
+            </a:r>
+            <a:r>
+              <a:rPr>
+                <a:solidFill>
+                  <a:srgbClr val="657422"/>
+                </a:solidFill>
+                <a:latin typeface="Courier"/>
+              </a:rPr>
+              <a:t>data =</a:t>
+            </a:r>
+            <a:r>
+              <a:rPr>
+                <a:solidFill>
+                  <a:srgbClr val="003B4F"/>
+                </a:solidFill>
+                <a:latin typeface="Courier"/>
+              </a:rPr>
+              <a:t> penguins_df)</a:t>
+            </a:r>
+          </a:p>
+          <a:p>
+            <a:pPr lvl="0" indent="0" marL="0">
+              <a:buNone/>
+            </a:pPr>
             <a:r>
               <a:rPr/>
-              <a:t> → </a:t>
-            </a:r>
-            <a:r>
-              <a:rPr>
-                <a:latin typeface="Courier"/>
-              </a:rPr>
-              <a:t>library(palmerpenguins)</a:t>
+              <a:t>✏️ </a:t>
+            </a:r>
+            <a:r>
+              <a:rPr b="1"/>
+              <a:t>Your turn:</a:t>
             </a:r>
             <a:r>
               <a:rPr/>
-              <a:t>.</a:t>
-            </a:r>
-          </a:p>
-          <a:p>
-            <a:pPr lvl="0" indent="-342900" marL="342900">
-              <a:buAutoNum type="arabicPeriod"/>
-            </a:pPr>
-            <a:r>
-              <a:rPr b="1"/>
-              <a:t>Levene says unequal variance</a:t>
-            </a:r>
-            <a:r>
-              <a:rPr/>
-              <a:t> → use </a:t>
-            </a:r>
-            <a:r>
-              <a:rPr>
-                <a:latin typeface="Courier"/>
-              </a:rPr>
-              <a:t>oneway.test(y ~ group, var.equal = FALSE)</a:t>
-            </a:r>
-            <a:r>
-              <a:rPr/>
-              <a:t> (Welch’s ANOVA).</a:t>
-            </a:r>
-          </a:p>
-          <a:p>
-            <a:pPr lvl="0" indent="-342900" marL="342900">
-              <a:buAutoNum type="arabicPeriod"/>
-            </a:pPr>
-            <a:r>
-              <a:rPr b="1"/>
-              <a:t>Cheat sheets</a:t>
-            </a:r>
-            <a:r>
-              <a:rPr/>
-              <a:t> — </a:t>
-            </a:r>
-            <a:r>
-              <a:rPr>
-                <a:hlinkClick r:id="rId2"/>
-              </a:rPr>
-              <a:t>https://posit.co/resources/cheatsheets/</a:t>
+              <a:t> Record and decide.</a:t>
+            </a:r>
+          </a:p>
+          <a:p>
+            <a:pPr lvl="0" indent="0">
+              <a:buNone/>
+            </a:pPr>
+            <a:r>
+              <a:rPr>
+                <a:latin typeface="Courier"/>
+              </a:rPr>
+              <a:t>Levene's F =            p =
+Variances equal?  Y / N
+If NOT equal, which test would you use instead? (hint: Welch)</a:t>
             </a:r>
           </a:p>
         </p:txBody>
@@ -3862,15 +4331,20 @@
       </p:grpSpPr>
       <p:sp>
         <p:nvSpPr>
-          <p:cNvPr id="3" name="Content Placeholder 2"/>
-          <p:cNvSpPr>
-            <a:spLocks noGrp="1"/>
-          </p:cNvSpPr>
-          <p:nvPr>
-            <p:ph idx="1"/>
-          </p:nvPr>
-        </p:nvSpPr>
-        <p:spPr/>
+          <p:cNvPr id="2" name="Title 1"/>
+          <p:cNvSpPr>
+            <a:spLocks noGrp="1"/>
+          </p:cNvSpPr>
+          <p:nvPr>
+            <p:ph type="title"/>
+          </p:nvPr>
+        </p:nvSpPr>
+        <p:spPr>
+          <a:xfrm>
+            <a:off x="0" y="0"/>
+            <a:ext cx="9144000" cy="582780"/>
+          </a:xfrm>
+        </p:spPr>
         <p:txBody>
           <a:bodyPr/>
           <a:lstStyle/>
@@ -3879,8 +4353,368 @@
               <a:buNone/>
             </a:pPr>
             <a:r>
+              <a:rPr/>
+              <a:t>Review and checkpoint</a:t>
+            </a:r>
+          </a:p>
+        </p:txBody>
+      </p:sp>
+      <p:sp>
+        <p:nvSpPr>
+          <p:cNvPr id="3" name="Content Placeholder 2"/>
+          <p:cNvSpPr>
+            <a:spLocks noGrp="1"/>
+          </p:cNvSpPr>
+          <p:nvPr>
+            <p:ph idx="1"/>
+          </p:nvPr>
+        </p:nvSpPr>
+        <p:spPr/>
+        <p:txBody>
+          <a:bodyPr/>
+          <a:lstStyle/>
+          <a:p>
+            <a:pPr lvl="0" indent="0" marL="0">
+              <a:buNone/>
+            </a:pPr>
+            <a:r>
+              <a:rPr/>
+              <a:t>At this point you should be able to:</a:t>
+            </a:r>
+          </a:p>
+          <a:p>
+            <a:pPr lvl="0"/>
+            <a:r>
+              <a:rPr/>
+              <a:t>☐ Explain why many t-tests inflate the false-positive rate</a:t>
+            </a:r>
+          </a:p>
+          <a:p>
+            <a:pPr lvl="0"/>
+            <a:r>
+              <a:rPr/>
+              <a:t>☐ Order groups with </a:t>
+            </a:r>
+            <a:r>
+              <a:rPr>
+                <a:latin typeface="Courier"/>
+              </a:rPr>
+              <a:t>fct_reorder()</a:t>
+            </a:r>
+            <a:r>
+              <a:rPr/>
+              <a:t> and set a model baseline with </a:t>
+            </a:r>
+            <a:r>
+              <a:rPr>
+                <a:latin typeface="Courier"/>
+              </a:rPr>
+              <a:t>fct_relevel()</a:t>
+            </a:r>
+          </a:p>
+          <a:p>
+            <a:pPr lvl="0"/>
+            <a:r>
+              <a:rPr/>
+              <a:t>☐ State ANOVA hypotheses with μ notation</a:t>
+            </a:r>
+          </a:p>
+          <a:p>
+            <a:pPr lvl="0"/>
+            <a:r>
+              <a:rPr/>
+              <a:t>☐ Fit </a:t>
+            </a:r>
+            <a:r>
+              <a:rPr>
+                <a:latin typeface="Courier"/>
+              </a:rPr>
+              <a:t>lm(Y ~ group)</a:t>
+            </a:r>
+            <a:r>
+              <a:rPr/>
+              <a:t> and check residual normality + equal variance</a:t>
+            </a:r>
+          </a:p>
+          <a:p>
+            <a:pPr lvl="0" indent="0" marL="0">
+              <a:buNone/>
+            </a:pPr>
+            <a:r>
+              <a:rPr/>
+              <a:t>✏️ </a:t>
+            </a:r>
+            <a:r>
+              <a:rPr b="1"/>
+              <a:t>Your turn — before you move on:</a:t>
+            </a:r>
+            <a:r>
+              <a:rPr/>
+              <a:t> Run your whole script top to bottom with </a:t>
+            </a:r>
+            <a:r>
+              <a:rPr b="1"/>
+              <a:t>Ctrl/Cmd + Shift + Enter</a:t>
+            </a:r>
+            <a:r>
+              <a:rPr/>
+              <a:t>. Does it run cleanly?</a:t>
+            </a:r>
+          </a:p>
+          <a:p>
+            <a:pPr lvl="0" indent="0">
+              <a:buNone/>
+            </a:pPr>
+            <a:r>
+              <a:rPr>
+                <a:latin typeface="Courier"/>
+              </a:rPr>
+              <a:t>Ran cleanly?  Y / N
+If not, what error appeared:</a:t>
+            </a:r>
+          </a:p>
+        </p:txBody>
+      </p:sp>
+    </p:spTree>
+  </p:cSld>
+</p:sld>
+</file>
+
+<file path=ppt/slides/slide14.xml><?xml version="1.0" encoding="utf-8"?>
+<p:sld xmlns:a="http://schemas.openxmlformats.org/drawingml/2006/main" xmlns:r="http://schemas.openxmlformats.org/officeDocument/2006/relationships" xmlns:p="http://schemas.openxmlformats.org/presentationml/2006/main">
+  <p:cSld>
+    <p:spTree>
+      <p:nvGrpSpPr>
+        <p:cNvPr id="1" name=""/>
+        <p:cNvGrpSpPr/>
+        <p:nvPr/>
+      </p:nvGrpSpPr>
+      <p:grpSpPr>
+        <a:xfrm>
+          <a:off x="0" y="0"/>
+          <a:ext cx="0" cy="0"/>
+          <a:chOff x="0" y="0"/>
+          <a:chExt cx="0" cy="0"/>
+        </a:xfrm>
+      </p:grpSpPr>
+      <p:sp>
+        <p:nvSpPr>
+          <p:cNvPr id="2" name="Title 1"/>
+          <p:cNvSpPr>
+            <a:spLocks noGrp="1"/>
+          </p:cNvSpPr>
+          <p:nvPr>
+            <p:ph type="title"/>
+          </p:nvPr>
+        </p:nvSpPr>
+        <p:spPr>
+          <a:xfrm>
+            <a:off x="0" y="0"/>
+            <a:ext cx="9144000" cy="582780"/>
+          </a:xfrm>
+        </p:spPr>
+        <p:txBody>
+          <a:bodyPr/>
+          <a:lstStyle/>
+          <a:p>
+            <a:pPr lvl="0" indent="0" marL="0">
+              <a:buNone/>
+            </a:pPr>
+            <a:r>
+              <a:rPr/>
+              <a:t>Getting unstuck</a:t>
+            </a:r>
+          </a:p>
+        </p:txBody>
+      </p:sp>
+      <p:sp>
+        <p:nvSpPr>
+          <p:cNvPr id="3" name="Content Placeholder 2"/>
+          <p:cNvSpPr>
+            <a:spLocks noGrp="1"/>
+          </p:cNvSpPr>
+          <p:nvPr>
+            <p:ph idx="1"/>
+          </p:nvPr>
+        </p:nvSpPr>
+        <p:spPr/>
+        <p:txBody>
+          <a:bodyPr/>
+          <a:lstStyle/>
+          <a:p>
+            <a:pPr lvl="0" indent="-342900" marL="342900">
+              <a:buAutoNum type="arabicPeriod"/>
+            </a:pPr>
+            <a:r>
+              <a:rPr b="1">
+                <a:latin typeface="Courier"/>
+              </a:rPr>
+              <a:t>could not find function "penguins"</a:t>
+            </a:r>
+            <a:r>
+              <a:rPr/>
+              <a:t> → </a:t>
+            </a:r>
+            <a:r>
+              <a:rPr>
+                <a:latin typeface="Courier"/>
+              </a:rPr>
+              <a:t>library(palmerpenguins)</a:t>
+            </a:r>
+            <a:r>
+              <a:rPr/>
+              <a:t>.</a:t>
+            </a:r>
+          </a:p>
+          <a:p>
+            <a:pPr lvl="0" indent="-342900" marL="342900">
+              <a:buAutoNum type="arabicPeriod"/>
+            </a:pPr>
+            <a:r>
+              <a:rPr b="1">
+                <a:latin typeface="Courier"/>
+              </a:rPr>
+              <a:t>could not find function "fct_reorder"</a:t>
+            </a:r>
+            <a:r>
+              <a:rPr/>
+              <a:t> → </a:t>
+            </a:r>
+            <a:r>
+              <a:rPr>
+                <a:latin typeface="Courier"/>
+              </a:rPr>
+              <a:t>library(tidyverse)</a:t>
+            </a:r>
+            <a:r>
+              <a:rPr/>
+              <a:t> (forcats is inside it).</a:t>
+            </a:r>
+          </a:p>
+          <a:p>
+            <a:pPr lvl="0" indent="-342900" marL="342900">
+              <a:buAutoNum type="arabicPeriod"/>
+            </a:pPr>
+            <a:r>
+              <a:rPr b="1"/>
+              <a:t>Reordering “did nothing”</a:t>
+            </a:r>
+            <a:r>
+              <a:rPr/>
+              <a:t> → you must reorder </a:t>
+            </a:r>
+            <a:r>
+              <a:rPr b="1"/>
+              <a:t>inside </a:t>
+            </a:r>
+            <a:r>
+              <a:rPr b="1">
+                <a:latin typeface="Courier"/>
+              </a:rPr>
+              <a:t>mutate()</a:t>
+            </a:r>
+            <a:r>
+              <a:rPr/>
+              <a:t> and plot the result; reordering a copy doesn’t change the original.</a:t>
+            </a:r>
+          </a:p>
+          <a:p>
+            <a:pPr lvl="0" indent="-342900" marL="342900">
+              <a:buAutoNum type="arabicPeriod"/>
+            </a:pPr>
+            <a:r>
+              <a:rPr b="1"/>
+              <a:t>Levene says unequal variance</a:t>
+            </a:r>
+            <a:r>
+              <a:rPr/>
+              <a:t> → use </a:t>
+            </a:r>
+            <a:r>
+              <a:rPr>
+                <a:latin typeface="Courier"/>
+              </a:rPr>
+              <a:t>oneway.test(y ~ group, var.equal = FALSE)</a:t>
+            </a:r>
+            <a:r>
+              <a:rPr/>
+              <a:t> (Welch’s ANOVA).</a:t>
+            </a:r>
+          </a:p>
+          <a:p>
+            <a:pPr lvl="0" indent="-342900" marL="342900">
+              <a:buAutoNum type="arabicPeriod"/>
+            </a:pPr>
+            <a:r>
+              <a:rPr b="1"/>
+              <a:t>Cheat sheets</a:t>
+            </a:r>
+            <a:r>
+              <a:rPr/>
+              <a:t> — </a:t>
+            </a:r>
+            <a:r>
+              <a:rPr>
+                <a:hlinkClick r:id="rId2"/>
+              </a:rPr>
+              <a:t>https://posit.co/resources/cheatsheets/</a:t>
+            </a:r>
+            <a:r>
+              <a:rPr/>
+              <a:t> · Factors: </a:t>
+            </a:r>
+            <a:r>
+              <a:rPr>
+                <a:hlinkClick r:id="rId3"/>
+              </a:rPr>
+              <a:t>https://rstudio.github.io/cheatsheets/factors.pdf</a:t>
+            </a:r>
+          </a:p>
+        </p:txBody>
+      </p:sp>
+    </p:spTree>
+  </p:cSld>
+</p:sld>
+</file>
+
+<file path=ppt/slides/slide15.xml><?xml version="1.0" encoding="utf-8"?>
+<p:sld xmlns:a="http://schemas.openxmlformats.org/drawingml/2006/main" xmlns:r="http://schemas.openxmlformats.org/officeDocument/2006/relationships" xmlns:p="http://schemas.openxmlformats.org/presentationml/2006/main">
+  <p:cSld>
+    <p:spTree>
+      <p:nvGrpSpPr>
+        <p:cNvPr id="1" name=""/>
+        <p:cNvGrpSpPr/>
+        <p:nvPr/>
+      </p:nvGrpSpPr>
+      <p:grpSpPr>
+        <a:xfrm>
+          <a:off x="0" y="0"/>
+          <a:ext cx="0" cy="0"/>
+          <a:chOff x="0" y="0"/>
+          <a:chExt cx="0" cy="0"/>
+        </a:xfrm>
+      </p:grpSpPr>
+      <p:sp>
+        <p:nvSpPr>
+          <p:cNvPr id="3" name="Content Placeholder 2"/>
+          <p:cNvSpPr>
+            <a:spLocks noGrp="1"/>
+          </p:cNvSpPr>
+          <p:nvPr>
+            <p:ph idx="1"/>
+          </p:nvPr>
+        </p:nvSpPr>
+        <p:spPr/>
+        <p:txBody>
+          <a:bodyPr/>
+          <a:lstStyle/>
+          <a:p>
+            <a:pPr lvl="0" indent="0" marL="0">
+              <a:buNone/>
+            </a:pPr>
+            <a:r>
               <a:rPr i="1"/>
-              <a:t>End of Worksheet 13. Next: Worksheet 14 — running the ANOVA and finding which species differ.</a:t>
+              <a:t>End of the ANOVA I worksheet. Next: One-Way ANOVA II — running the test, post-hoc comparisons, and the out-of-class Extension.</a:t>
             </a:r>
           </a:p>
         </p:txBody>
@@ -4047,7 +4881,25 @@
             </a:pPr>
             <a:r>
               <a:rPr/>
-              <a:t>State the ANOVA null and alternate hypotheses</a:t>
+              <a:t>Order the groups with a </a:t>
+            </a:r>
+            <a:r>
+              <a:rPr b="1"/>
+              <a:t>factor</a:t>
+            </a:r>
+            <a:r>
+              <a:rPr/>
+              <a:t> (</a:t>
+            </a:r>
+            <a:r>
+              <a:rPr>
+                <a:latin typeface="Courier"/>
+              </a:rPr>
+              <a:t>fct_reorder</a:t>
+            </a:r>
+            <a:r>
+              <a:rPr/>
+              <a:t>) for a readable boxplot</a:t>
             </a:r>
           </a:p>
           <a:p>
@@ -4056,7 +4908,26 @@
             </a:pPr>
             <a:r>
               <a:rPr/>
-              <a:t>Fit a one-way ANOVA and check its assumptions</a:t>
+              <a:t>State the ANOVA null and alternate hypotheses</a:t>
+            </a:r>
+          </a:p>
+          <a:p>
+            <a:pPr lvl="0" indent="-342900" marL="342900">
+              <a:buAutoNum type="arabicPeriod"/>
+            </a:pPr>
+            <a:r>
+              <a:rPr/>
+              <a:t>Fit a one-way ANOVA, set its reference level (</a:t>
+            </a:r>
+            <a:r>
+              <a:rPr>
+                <a:latin typeface="Courier"/>
+              </a:rPr>
+              <a:t>fct_relevel</a:t>
+            </a:r>
+            <a:r>
+              <a:rPr/>
+              <a:t>), and check its assumptions</a:t>
             </a:r>
           </a:p>
           <a:p>
@@ -4112,15 +4983,15 @@
             <a:pPr lvl="0"/>
             <a:r>
               <a:rPr sz="2000"/>
-              <a:t>The </a:t>
+              <a:t>There’s no separate homework — the out-of-class </a:t>
             </a:r>
             <a:r>
               <a:rPr sz="2000" b="1"/>
-              <a:t>Going further</a:t>
+              <a:t>Extension</a:t>
             </a:r>
             <a:r>
               <a:rPr sz="2000"/>
-              <a:t> section is optional.</a:t>
+              <a:t> is on the ANOVA II worksheet.</a:t>
             </a:r>
           </a:p>
           <a:p>
@@ -4242,7 +5113,7 @@
             </a:pPr>
             <a:r>
               <a:rPr sz="2000" b="1"/>
-              <a:t>🧩 Chunk 1 — Explore &amp; hypothesize </a:t>
+              <a:t>🧩 Chunk 1 — Explore, order, hypothesize </a:t>
             </a:r>
             <a:r>
               <a:rPr sz="2000" b="1" i="1"/>
@@ -4255,7 +5126,7 @@
             </a:pPr>
             <a:r>
               <a:rPr sz="2000"/>
-              <a:t>Parts 1–3: load the penguins, plot body mass by species, and write your hypotheses.</a:t>
+              <a:t>Parts 1–4: load the penguins, plot body mass by species, reorder the boxplot with a factor, and write your hypotheses.</a:t>
             </a:r>
           </a:p>
         </p:txBody>
@@ -5476,7 +6347,8 @@
               </a:rPr>
               <a:t>Heaviest species:
 Lightest species:
-Do the spreads (box heights) look similar across species?  Y / N</a:t>
+Do the spreads (box heights) look similar across species?  Y / N
+What order are the species in on the x-axis, and why?</a:t>
             </a:r>
           </a:p>
         </p:txBody>
@@ -5528,7 +6400,7 @@
             </a:pPr>
             <a:r>
               <a:rPr/>
-              <a:t>Part 3 · State your hypotheses</a:t>
+              <a:t>Part 3 · Order the boxplot with a factor</a:t>
             </a:r>
           </a:p>
         </p:txBody>
@@ -5548,6 +6420,697 @@
           <a:bodyPr/>
           <a:lstStyle/>
           <a:p>
+            <a:pPr lvl="0" indent="0" marL="1270000">
+              <a:buNone/>
+            </a:pPr>
+            <a:r>
+              <a:rPr sz="2000"/>
+              <a:t>🔮 </a:t>
+            </a:r>
+            <a:r>
+              <a:rPr sz="2000" b="1"/>
+              <a:t>Predict first:</a:t>
+            </a:r>
+            <a:r>
+              <a:rPr sz="2000"/>
+              <a:t> </a:t>
+            </a:r>
+            <a:r>
+              <a:rPr sz="2000">
+                <a:latin typeface="Courier"/>
+              </a:rPr>
+              <a:t>species</a:t>
+            </a:r>
+            <a:r>
+              <a:rPr sz="2000"/>
+              <a:t> is a </a:t>
+            </a:r>
+            <a:r>
+              <a:rPr sz="2000" b="1"/>
+              <a:t>factor</a:t>
+            </a:r>
+            <a:r>
+              <a:rPr sz="2000"/>
+              <a:t>. Run </a:t>
+            </a:r>
+            <a:r>
+              <a:rPr sz="2000">
+                <a:latin typeface="Courier"/>
+              </a:rPr>
+              <a:t>levels(penguins_df$species)</a:t>
+            </a:r>
+            <a:r>
+              <a:rPr sz="2000"/>
+              <a:t> — what order are the levels in? Is that the order you want on the plot?</a:t>
+            </a:r>
+          </a:p>
+          <a:p>
+            <a:pPr lvl="0" indent="0" marL="0">
+              <a:buNone/>
+            </a:pPr>
+            <a:r>
+              <a:rPr b="1"/>
+              <a:t>▶ Run this:</a:t>
+            </a:r>
+          </a:p>
+          <a:p>
+            <a:pPr lvl="0" indent="0">
+              <a:buNone/>
+            </a:pPr>
+            <a:r>
+              <a:rPr>
+                <a:solidFill>
+                  <a:srgbClr val="5E5E5E"/>
+                </a:solidFill>
+                <a:latin typeface="Courier"/>
+              </a:rPr>
+              <a:t># What order does R store the species levels in? --------</a:t>
+            </a:r>
+            <a:br/>
+            <a:r>
+              <a:rPr>
+                <a:solidFill>
+                  <a:srgbClr val="4758AB"/>
+                </a:solidFill>
+                <a:latin typeface="Courier"/>
+              </a:rPr>
+              <a:t>class</a:t>
+            </a:r>
+            <a:r>
+              <a:rPr>
+                <a:solidFill>
+                  <a:srgbClr val="003B4F"/>
+                </a:solidFill>
+                <a:latin typeface="Courier"/>
+              </a:rPr>
+              <a:t>(penguins_df</a:t>
+            </a:r>
+            <a:r>
+              <a:rPr>
+                <a:solidFill>
+                  <a:srgbClr val="5E5E5E"/>
+                </a:solidFill>
+                <a:latin typeface="Courier"/>
+              </a:rPr>
+              <a:t>$</a:t>
+            </a:r>
+            <a:r>
+              <a:rPr>
+                <a:solidFill>
+                  <a:srgbClr val="003B4F"/>
+                </a:solidFill>
+                <a:latin typeface="Courier"/>
+              </a:rPr>
+              <a:t>species)</a:t>
+            </a:r>
+            <a:br/>
+            <a:r>
+              <a:rPr>
+                <a:solidFill>
+                  <a:srgbClr val="4758AB"/>
+                </a:solidFill>
+                <a:latin typeface="Courier"/>
+              </a:rPr>
+              <a:t>levels</a:t>
+            </a:r>
+            <a:r>
+              <a:rPr>
+                <a:solidFill>
+                  <a:srgbClr val="003B4F"/>
+                </a:solidFill>
+                <a:latin typeface="Courier"/>
+              </a:rPr>
+              <a:t>(penguins_df</a:t>
+            </a:r>
+            <a:r>
+              <a:rPr>
+                <a:solidFill>
+                  <a:srgbClr val="5E5E5E"/>
+                </a:solidFill>
+                <a:latin typeface="Courier"/>
+              </a:rPr>
+              <a:t>$</a:t>
+            </a:r>
+            <a:r>
+              <a:rPr>
+                <a:solidFill>
+                  <a:srgbClr val="003B4F"/>
+                </a:solidFill>
+                <a:latin typeface="Courier"/>
+              </a:rPr>
+              <a:t>species)</a:t>
+            </a:r>
+            <a:br/>
+            <a:br/>
+            <a:r>
+              <a:rPr>
+                <a:solidFill>
+                  <a:srgbClr val="5E5E5E"/>
+                </a:solidFill>
+                <a:latin typeface="Courier"/>
+              </a:rPr>
+              <a:t># Reorder species by MEDIAN body mass, then plot --------</a:t>
+            </a:r>
+            <a:br/>
+            <a:r>
+              <a:rPr>
+                <a:solidFill>
+                  <a:srgbClr val="003B4F"/>
+                </a:solidFill>
+                <a:latin typeface="Courier"/>
+              </a:rPr>
+              <a:t>penguins_df </a:t>
+            </a:r>
+            <a:r>
+              <a:rPr>
+                <a:solidFill>
+                  <a:srgbClr val="5E5E5E"/>
+                </a:solidFill>
+                <a:latin typeface="Courier"/>
+              </a:rPr>
+              <a:t>%&gt;%</a:t>
+            </a:r>
+            <a:br/>
+            <a:r>
+              <a:rPr>
+                <a:solidFill>
+                  <a:srgbClr val="003B4F"/>
+                </a:solidFill>
+                <a:latin typeface="Courier"/>
+              </a:rPr>
+              <a:t>  </a:t>
+            </a:r>
+            <a:r>
+              <a:rPr>
+                <a:solidFill>
+                  <a:srgbClr val="4758AB"/>
+                </a:solidFill>
+                <a:latin typeface="Courier"/>
+              </a:rPr>
+              <a:t>mutate</a:t>
+            </a:r>
+            <a:r>
+              <a:rPr>
+                <a:solidFill>
+                  <a:srgbClr val="003B4F"/>
+                </a:solidFill>
+                <a:latin typeface="Courier"/>
+              </a:rPr>
+              <a:t>(</a:t>
+            </a:r>
+            <a:r>
+              <a:rPr>
+                <a:solidFill>
+                  <a:srgbClr val="657422"/>
+                </a:solidFill>
+                <a:latin typeface="Courier"/>
+              </a:rPr>
+              <a:t>species =</a:t>
+            </a:r>
+            <a:r>
+              <a:rPr>
+                <a:solidFill>
+                  <a:srgbClr val="003B4F"/>
+                </a:solidFill>
+                <a:latin typeface="Courier"/>
+              </a:rPr>
+              <a:t> </a:t>
+            </a:r>
+            <a:r>
+              <a:rPr>
+                <a:solidFill>
+                  <a:srgbClr val="4758AB"/>
+                </a:solidFill>
+                <a:latin typeface="Courier"/>
+              </a:rPr>
+              <a:t>fct_reorder</a:t>
+            </a:r>
+            <a:r>
+              <a:rPr>
+                <a:solidFill>
+                  <a:srgbClr val="003B4F"/>
+                </a:solidFill>
+                <a:latin typeface="Courier"/>
+              </a:rPr>
+              <a:t>(species, body_mass_g, </a:t>
+            </a:r>
+            <a:r>
+              <a:rPr>
+                <a:solidFill>
+                  <a:srgbClr val="657422"/>
+                </a:solidFill>
+                <a:latin typeface="Courier"/>
+              </a:rPr>
+              <a:t>.fun =</a:t>
+            </a:r>
+            <a:r>
+              <a:rPr>
+                <a:solidFill>
+                  <a:srgbClr val="003B4F"/>
+                </a:solidFill>
+                <a:latin typeface="Courier"/>
+              </a:rPr>
+              <a:t> median)) </a:t>
+            </a:r>
+            <a:r>
+              <a:rPr>
+                <a:solidFill>
+                  <a:srgbClr val="5E5E5E"/>
+                </a:solidFill>
+                <a:latin typeface="Courier"/>
+              </a:rPr>
+              <a:t>%&gt;%</a:t>
+            </a:r>
+            <a:br/>
+            <a:r>
+              <a:rPr>
+                <a:solidFill>
+                  <a:srgbClr val="003B4F"/>
+                </a:solidFill>
+                <a:latin typeface="Courier"/>
+              </a:rPr>
+              <a:t>  </a:t>
+            </a:r>
+            <a:r>
+              <a:rPr>
+                <a:solidFill>
+                  <a:srgbClr val="4758AB"/>
+                </a:solidFill>
+                <a:latin typeface="Courier"/>
+              </a:rPr>
+              <a:t>ggplot</a:t>
+            </a:r>
+            <a:r>
+              <a:rPr>
+                <a:solidFill>
+                  <a:srgbClr val="003B4F"/>
+                </a:solidFill>
+                <a:latin typeface="Courier"/>
+              </a:rPr>
+              <a:t>(</a:t>
+            </a:r>
+            <a:r>
+              <a:rPr>
+                <a:solidFill>
+                  <a:srgbClr val="4758AB"/>
+                </a:solidFill>
+                <a:latin typeface="Courier"/>
+              </a:rPr>
+              <a:t>aes</a:t>
+            </a:r>
+            <a:r>
+              <a:rPr>
+                <a:solidFill>
+                  <a:srgbClr val="003B4F"/>
+                </a:solidFill>
+                <a:latin typeface="Courier"/>
+              </a:rPr>
+              <a:t>(</a:t>
+            </a:r>
+            <a:r>
+              <a:rPr>
+                <a:solidFill>
+                  <a:srgbClr val="657422"/>
+                </a:solidFill>
+                <a:latin typeface="Courier"/>
+              </a:rPr>
+              <a:t>x =</a:t>
+            </a:r>
+            <a:r>
+              <a:rPr>
+                <a:solidFill>
+                  <a:srgbClr val="003B4F"/>
+                </a:solidFill>
+                <a:latin typeface="Courier"/>
+              </a:rPr>
+              <a:t> species, </a:t>
+            </a:r>
+            <a:r>
+              <a:rPr>
+                <a:solidFill>
+                  <a:srgbClr val="657422"/>
+                </a:solidFill>
+                <a:latin typeface="Courier"/>
+              </a:rPr>
+              <a:t>y =</a:t>
+            </a:r>
+            <a:r>
+              <a:rPr>
+                <a:solidFill>
+                  <a:srgbClr val="003B4F"/>
+                </a:solidFill>
+                <a:latin typeface="Courier"/>
+              </a:rPr>
+              <a:t> body_mass_g, </a:t>
+            </a:r>
+            <a:r>
+              <a:rPr>
+                <a:solidFill>
+                  <a:srgbClr val="657422"/>
+                </a:solidFill>
+                <a:latin typeface="Courier"/>
+              </a:rPr>
+              <a:t>fill =</a:t>
+            </a:r>
+            <a:r>
+              <a:rPr>
+                <a:solidFill>
+                  <a:srgbClr val="003B4F"/>
+                </a:solidFill>
+                <a:latin typeface="Courier"/>
+              </a:rPr>
+              <a:t> species)) </a:t>
+            </a:r>
+            <a:r>
+              <a:rPr>
+                <a:solidFill>
+                  <a:srgbClr val="5E5E5E"/>
+                </a:solidFill>
+                <a:latin typeface="Courier"/>
+              </a:rPr>
+              <a:t>+</a:t>
+            </a:r>
+            <a:br/>
+            <a:r>
+              <a:rPr>
+                <a:solidFill>
+                  <a:srgbClr val="003B4F"/>
+                </a:solidFill>
+                <a:latin typeface="Courier"/>
+              </a:rPr>
+              <a:t>  </a:t>
+            </a:r>
+            <a:r>
+              <a:rPr>
+                <a:solidFill>
+                  <a:srgbClr val="4758AB"/>
+                </a:solidFill>
+                <a:latin typeface="Courier"/>
+              </a:rPr>
+              <a:t>geom_boxplot</a:t>
+            </a:r>
+            <a:r>
+              <a:rPr>
+                <a:solidFill>
+                  <a:srgbClr val="003B4F"/>
+                </a:solidFill>
+                <a:latin typeface="Courier"/>
+              </a:rPr>
+              <a:t>(</a:t>
+            </a:r>
+            <a:r>
+              <a:rPr>
+                <a:solidFill>
+                  <a:srgbClr val="657422"/>
+                </a:solidFill>
+                <a:latin typeface="Courier"/>
+              </a:rPr>
+              <a:t>alpha =</a:t>
+            </a:r>
+            <a:r>
+              <a:rPr>
+                <a:solidFill>
+                  <a:srgbClr val="003B4F"/>
+                </a:solidFill>
+                <a:latin typeface="Courier"/>
+              </a:rPr>
+              <a:t> </a:t>
+            </a:r>
+            <a:r>
+              <a:rPr>
+                <a:solidFill>
+                  <a:srgbClr val="AD0000"/>
+                </a:solidFill>
+                <a:latin typeface="Courier"/>
+              </a:rPr>
+              <a:t>0.5</a:t>
+            </a:r>
+            <a:r>
+              <a:rPr>
+                <a:solidFill>
+                  <a:srgbClr val="003B4F"/>
+                </a:solidFill>
+                <a:latin typeface="Courier"/>
+              </a:rPr>
+              <a:t>, </a:t>
+            </a:r>
+            <a:r>
+              <a:rPr>
+                <a:solidFill>
+                  <a:srgbClr val="657422"/>
+                </a:solidFill>
+                <a:latin typeface="Courier"/>
+              </a:rPr>
+              <a:t>outlier.shape =</a:t>
+            </a:r>
+            <a:r>
+              <a:rPr>
+                <a:solidFill>
+                  <a:srgbClr val="003B4F"/>
+                </a:solidFill>
+                <a:latin typeface="Courier"/>
+              </a:rPr>
+              <a:t> </a:t>
+            </a:r>
+            <a:r>
+              <a:rPr>
+                <a:solidFill>
+                  <a:srgbClr val="8F5902"/>
+                </a:solidFill>
+                <a:latin typeface="Courier"/>
+              </a:rPr>
+              <a:t>NA</a:t>
+            </a:r>
+            <a:r>
+              <a:rPr>
+                <a:solidFill>
+                  <a:srgbClr val="003B4F"/>
+                </a:solidFill>
+                <a:latin typeface="Courier"/>
+              </a:rPr>
+              <a:t>) </a:t>
+            </a:r>
+            <a:r>
+              <a:rPr>
+                <a:solidFill>
+                  <a:srgbClr val="5E5E5E"/>
+                </a:solidFill>
+                <a:latin typeface="Courier"/>
+              </a:rPr>
+              <a:t>+</a:t>
+            </a:r>
+            <a:br/>
+            <a:r>
+              <a:rPr>
+                <a:solidFill>
+                  <a:srgbClr val="003B4F"/>
+                </a:solidFill>
+                <a:latin typeface="Courier"/>
+              </a:rPr>
+              <a:t>  </a:t>
+            </a:r>
+            <a:r>
+              <a:rPr>
+                <a:solidFill>
+                  <a:srgbClr val="4758AB"/>
+                </a:solidFill>
+                <a:latin typeface="Courier"/>
+              </a:rPr>
+              <a:t>labs</a:t>
+            </a:r>
+            <a:r>
+              <a:rPr>
+                <a:solidFill>
+                  <a:srgbClr val="003B4F"/>
+                </a:solidFill>
+                <a:latin typeface="Courier"/>
+              </a:rPr>
+              <a:t>(</a:t>
+            </a:r>
+            <a:r>
+              <a:rPr>
+                <a:solidFill>
+                  <a:srgbClr val="657422"/>
+                </a:solidFill>
+                <a:latin typeface="Courier"/>
+              </a:rPr>
+              <a:t>x =</a:t>
+            </a:r>
+            <a:r>
+              <a:rPr>
+                <a:solidFill>
+                  <a:srgbClr val="003B4F"/>
+                </a:solidFill>
+                <a:latin typeface="Courier"/>
+              </a:rPr>
+              <a:t> </a:t>
+            </a:r>
+            <a:r>
+              <a:rPr>
+                <a:solidFill>
+                  <a:srgbClr val="20794D"/>
+                </a:solidFill>
+                <a:latin typeface="Courier"/>
+              </a:rPr>
+              <a:t>"Species (ordered by median mass)"</a:t>
+            </a:r>
+            <a:r>
+              <a:rPr>
+                <a:solidFill>
+                  <a:srgbClr val="003B4F"/>
+                </a:solidFill>
+                <a:latin typeface="Courier"/>
+              </a:rPr>
+              <a:t>, </a:t>
+            </a:r>
+            <a:r>
+              <a:rPr>
+                <a:solidFill>
+                  <a:srgbClr val="657422"/>
+                </a:solidFill>
+                <a:latin typeface="Courier"/>
+              </a:rPr>
+              <a:t>y =</a:t>
+            </a:r>
+            <a:r>
+              <a:rPr>
+                <a:solidFill>
+                  <a:srgbClr val="003B4F"/>
+                </a:solidFill>
+                <a:latin typeface="Courier"/>
+              </a:rPr>
+              <a:t> </a:t>
+            </a:r>
+            <a:r>
+              <a:rPr>
+                <a:solidFill>
+                  <a:srgbClr val="20794D"/>
+                </a:solidFill>
+                <a:latin typeface="Courier"/>
+              </a:rPr>
+              <a:t>"Body Mass (g)"</a:t>
+            </a:r>
+            <a:r>
+              <a:rPr>
+                <a:solidFill>
+                  <a:srgbClr val="003B4F"/>
+                </a:solidFill>
+                <a:latin typeface="Courier"/>
+              </a:rPr>
+              <a:t>) </a:t>
+            </a:r>
+            <a:r>
+              <a:rPr>
+                <a:solidFill>
+                  <a:srgbClr val="5E5E5E"/>
+                </a:solidFill>
+                <a:latin typeface="Courier"/>
+              </a:rPr>
+              <a:t>+</a:t>
+            </a:r>
+            <a:br/>
+            <a:r>
+              <a:rPr>
+                <a:solidFill>
+                  <a:srgbClr val="003B4F"/>
+                </a:solidFill>
+                <a:latin typeface="Courier"/>
+              </a:rPr>
+              <a:t>  </a:t>
+            </a:r>
+            <a:r>
+              <a:rPr>
+                <a:solidFill>
+                  <a:srgbClr val="4758AB"/>
+                </a:solidFill>
+                <a:latin typeface="Courier"/>
+              </a:rPr>
+              <a:t>theme_minimal</a:t>
+            </a:r>
+            <a:r>
+              <a:rPr>
+                <a:solidFill>
+                  <a:srgbClr val="003B4F"/>
+                </a:solidFill>
+                <a:latin typeface="Courier"/>
+              </a:rPr>
+              <a:t>() </a:t>
+            </a:r>
+            <a:r>
+              <a:rPr>
+                <a:solidFill>
+                  <a:srgbClr val="5E5E5E"/>
+                </a:solidFill>
+                <a:latin typeface="Courier"/>
+              </a:rPr>
+              <a:t>+</a:t>
+            </a:r>
+            <a:br/>
+            <a:r>
+              <a:rPr>
+                <a:solidFill>
+                  <a:srgbClr val="003B4F"/>
+                </a:solidFill>
+                <a:latin typeface="Courier"/>
+              </a:rPr>
+              <a:t>  </a:t>
+            </a:r>
+            <a:r>
+              <a:rPr>
+                <a:solidFill>
+                  <a:srgbClr val="4758AB"/>
+                </a:solidFill>
+                <a:latin typeface="Courier"/>
+              </a:rPr>
+              <a:t>theme</a:t>
+            </a:r>
+            <a:r>
+              <a:rPr>
+                <a:solidFill>
+                  <a:srgbClr val="003B4F"/>
+                </a:solidFill>
+                <a:latin typeface="Courier"/>
+              </a:rPr>
+              <a:t>(</a:t>
+            </a:r>
+            <a:r>
+              <a:rPr>
+                <a:solidFill>
+                  <a:srgbClr val="657422"/>
+                </a:solidFill>
+                <a:latin typeface="Courier"/>
+              </a:rPr>
+              <a:t>legend.position =</a:t>
+            </a:r>
+            <a:r>
+              <a:rPr>
+                <a:solidFill>
+                  <a:srgbClr val="003B4F"/>
+                </a:solidFill>
+                <a:latin typeface="Courier"/>
+              </a:rPr>
+              <a:t> </a:t>
+            </a:r>
+            <a:r>
+              <a:rPr>
+                <a:solidFill>
+                  <a:srgbClr val="20794D"/>
+                </a:solidFill>
+                <a:latin typeface="Courier"/>
+              </a:rPr>
+              <a:t>"none"</a:t>
+            </a:r>
+            <a:r>
+              <a:rPr>
+                <a:solidFill>
+                  <a:srgbClr val="003B4F"/>
+                </a:solidFill>
+                <a:latin typeface="Courier"/>
+              </a:rPr>
+              <a:t>)</a:t>
+            </a:r>
+          </a:p>
+          <a:p>
             <a:pPr lvl="0" indent="0" marL="0">
               <a:buNone/>
             </a:pPr>
@@ -5561,7 +7124,7 @@
             </a:r>
             <a:r>
               <a:rPr/>
-              <a:t> Write the ANOVA hypotheses in words and symbols.</a:t>
+              <a:t> Answer.</a:t>
             </a:r>
           </a:p>
           <a:p>
@@ -5572,11 +7135,81 @@
               <a:rPr>
                 <a:latin typeface="Courier"/>
               </a:rPr>
-              <a:t>H₀ (null) in words:
-Hₐ (alternate) in words:
-In symbols:  H₀: μ_Adelie = μ_Chinstrap = μ_Gentoo
-             Hₐ:
-Significance level α:</a:t>
+              <a:t>Stored level order:
+Order after fct_reorder():
+Does the reordered plot read more clearly?  Y / N</a:t>
+            </a:r>
+          </a:p>
+          <a:p>
+            <a:pPr lvl="0" indent="0" marL="0">
+              <a:buNone/>
+            </a:pPr>
+            <a:r>
+              <a:rPr/>
+              <a:t>✏️ </a:t>
+            </a:r>
+            <a:r>
+              <a:rPr b="1"/>
+              <a:t>Your turn:</a:t>
+            </a:r>
+            <a:r>
+              <a:rPr/>
+              <a:t> </a:t>
+            </a:r>
+            <a:r>
+              <a:rPr>
+                <a:latin typeface="Courier"/>
+              </a:rPr>
+              <a:t>fct_reorder()</a:t>
+            </a:r>
+            <a:r>
+              <a:rPr/>
+              <a:t> has to go </a:t>
+            </a:r>
+            <a:r>
+              <a:rPr b="1"/>
+              <a:t>inside </a:t>
+            </a:r>
+            <a:r>
+              <a:rPr b="1">
+                <a:latin typeface="Courier"/>
+              </a:rPr>
+              <a:t>mutate()</a:t>
+            </a:r>
+            <a:r>
+              <a:rPr/>
+              <a:t>. What happens if you just call </a:t>
+            </a:r>
+            <a:r>
+              <a:rPr>
+                <a:latin typeface="Courier"/>
+              </a:rPr>
+              <a:t>fct_reorder()</a:t>
+            </a:r>
+            <a:r>
+              <a:rPr/>
+              <a:t> on its own and then plot </a:t>
+            </a:r>
+            <a:r>
+              <a:rPr>
+                <a:latin typeface="Courier"/>
+              </a:rPr>
+              <a:t>penguins_df</a:t>
+            </a:r>
+            <a:r>
+              <a:rPr/>
+              <a:t>?</a:t>
+            </a:r>
+          </a:p>
+          <a:p>
+            <a:pPr lvl="0" indent="0">
+              <a:buNone/>
+            </a:pPr>
+            <a:r>
+              <a:rPr>
+                <a:latin typeface="Courier"/>
+              </a:rPr>
+              <a:t>Your answer:</a:t>
             </a:r>
           </a:p>
           <a:p>
@@ -5593,15 +7226,45 @@
             </a:r>
             <a:r>
               <a:rPr sz="2000"/>
-              <a:t> Hₐ only says “at least one differs” — it does </a:t>
+              <a:t> the whole </a:t>
+            </a:r>
+            <a:r>
+              <a:rPr sz="2000">
+                <a:latin typeface="Courier"/>
+              </a:rPr>
+              <a:t>fct_*</a:t>
+            </a:r>
+            <a:r>
+              <a:rPr sz="2000"/>
+              <a:t> family (rename, merge, lump levels) lives in </a:t>
             </a:r>
             <a:r>
               <a:rPr sz="2000" b="1"/>
-              <a:t>not</a:t>
+              <a:t>Common Code 15 · Factors</a:t>
             </a:r>
             <a:r>
               <a:rPr sz="2000"/>
-              <a:t> say which. Finding which is the job of the post-hoc test in Part 9.</a:t>
+              <a:t>. Today you only need </a:t>
+            </a:r>
+            <a:r>
+              <a:rPr sz="2000">
+                <a:latin typeface="Courier"/>
+              </a:rPr>
+              <a:t>fct_reorder()</a:t>
+            </a:r>
+            <a:r>
+              <a:rPr sz="2000"/>
+              <a:t> here and </a:t>
+            </a:r>
+            <a:r>
+              <a:rPr sz="2000">
+                <a:latin typeface="Courier"/>
+              </a:rPr>
+              <a:t>fct_relevel()</a:t>
+            </a:r>
+            <a:r>
+              <a:rPr sz="2000"/>
+              <a:t> in Part 6.</a:t>
             </a:r>
           </a:p>
         </p:txBody>
@@ -5630,41 +7293,111 @@
       </p:grpSpPr>
       <p:sp>
         <p:nvSpPr>
-          <p:cNvPr id="3" name="Content Placeholder 2"/>
-          <p:cNvSpPr>
-            <a:spLocks noGrp="1"/>
-          </p:cNvSpPr>
-          <p:nvPr>
-            <p:ph idx="1"/>
-          </p:nvPr>
-        </p:nvSpPr>
-        <p:spPr/>
+          <p:cNvPr id="2" name="Title 1"/>
+          <p:cNvSpPr>
+            <a:spLocks noGrp="1"/>
+          </p:cNvSpPr>
+          <p:nvPr>
+            <p:ph type="title"/>
+          </p:nvPr>
+        </p:nvSpPr>
+        <p:spPr>
+          <a:xfrm>
+            <a:off x="0" y="0"/>
+            <a:ext cx="9144000" cy="582780"/>
+          </a:xfrm>
+        </p:spPr>
         <p:txBody>
           <a:bodyPr/>
           <a:lstStyle/>
           <a:p>
             <a:pPr lvl="0" indent="0" marL="0">
-              <a:spcBef>
-                <a:spcPts val="3000"/>
-              </a:spcBef>
-              <a:buNone/>
-            </a:pPr>
+              <a:buNone/>
+            </a:pPr>
+            <a:r>
+              <a:rPr/>
+              <a:t>Part 4 · State your hypotheses</a:t>
+            </a:r>
+          </a:p>
+        </p:txBody>
+      </p:sp>
+      <p:sp>
+        <p:nvSpPr>
+          <p:cNvPr id="3" name="Content Placeholder 2"/>
+          <p:cNvSpPr>
+            <a:spLocks noGrp="1"/>
+          </p:cNvSpPr>
+          <p:nvPr>
+            <p:ph idx="1"/>
+          </p:nvPr>
+        </p:nvSpPr>
+        <p:spPr/>
+        <p:txBody>
+          <a:bodyPr/>
+          <a:lstStyle/>
+          <a:p>
+            <a:pPr lvl="0" indent="0" marL="0">
+              <a:buNone/>
+            </a:pPr>
+            <a:r>
+              <a:rPr/>
+              <a:t>✏️ </a:t>
+            </a:r>
+            <a:r>
+              <a:rPr b="1"/>
+              <a:t>Your turn:</a:t>
+            </a:r>
+            <a:r>
+              <a:rPr/>
+              <a:t> Write the ANOVA hypotheses in words and symbols.</a:t>
+            </a:r>
+          </a:p>
+          <a:p>
+            <a:pPr lvl="0" indent="0">
+              <a:buNone/>
+            </a:pPr>
+            <a:r>
+              <a:rPr>
+                <a:latin typeface="Courier"/>
+              </a:rPr>
+              <a:t>H₀ (null) in words:
+Hₐ (alternate) in words:
+In symbols:  H₀: μ_Adelie = μ_Chinstrap = μ_Gentoo
+             Hₐ:
+Significance level α:</a:t>
+            </a:r>
+          </a:p>
+          <a:p>
+            <a:pPr lvl="0" indent="0" marL="1270000">
+              <a:buNone/>
+            </a:pPr>
+            <a:r>
+              <a:rPr sz="2000"/>
+              <a:t>💡 </a:t>
+            </a:r>
             <a:r>
               <a:rPr sz="2000" b="1"/>
-              <a:t>🧩 Chunk 2 — Fit &amp; check assumptions </a:t>
-            </a:r>
-            <a:r>
-              <a:rPr sz="2000" b="1" i="1"/>
-              <a:t>(after lecture Chunk 2)</a:t>
-            </a:r>
-          </a:p>
-          <a:p>
-            <a:pPr lvl="0" indent="0" marL="1270000">
-              <a:buNone/>
-            </a:pPr>
+              <a:t>Key idea:</a:t>
+            </a:r>
             <a:r>
               <a:rPr sz="2000"/>
-              <a:t>Parts 4–6: fit the model, check residual normality, check equal variance.</a:t>
+              <a:t> Hₐ only says “at least one differs” — it does </a:t>
+            </a:r>
+            <a:r>
+              <a:rPr sz="2000" b="1"/>
+              <a:t>not</a:t>
+            </a:r>
+            <a:r>
+              <a:rPr sz="2000"/>
+              <a:t> say which. Finding which is the job of the post-hoc test in </a:t>
+            </a:r>
+            <a:r>
+              <a:rPr sz="2000" i="1"/>
+              <a:t>ANOVA II</a:t>
+            </a:r>
+            <a:r>
+              <a:rPr sz="2000"/>
+              <a:t>.</a:t>
             </a:r>
           </a:p>
         </p:txBody>
@@ -5693,171 +7426,41 @@
       </p:grpSpPr>
       <p:sp>
         <p:nvSpPr>
-          <p:cNvPr id="2" name="Title 1"/>
-          <p:cNvSpPr>
-            <a:spLocks noGrp="1"/>
-          </p:cNvSpPr>
-          <p:nvPr>
-            <p:ph type="title"/>
-          </p:nvPr>
-        </p:nvSpPr>
-        <p:spPr>
-          <a:xfrm>
-            <a:off x="0" y="0"/>
-            <a:ext cx="9144000" cy="582780"/>
-          </a:xfrm>
-        </p:spPr>
+          <p:cNvPr id="3" name="Content Placeholder 2"/>
+          <p:cNvSpPr>
+            <a:spLocks noGrp="1"/>
+          </p:cNvSpPr>
+          <p:nvPr>
+            <p:ph idx="1"/>
+          </p:nvPr>
+        </p:nvSpPr>
+        <p:spPr/>
         <p:txBody>
           <a:bodyPr/>
           <a:lstStyle/>
           <a:p>
             <a:pPr lvl="0" indent="0" marL="0">
-              <a:buNone/>
-            </a:pPr>
-            <a:r>
-              <a:rPr/>
-              <a:t>Part 4 · Fit the model</a:t>
-            </a:r>
-          </a:p>
-        </p:txBody>
-      </p:sp>
-      <p:sp>
-        <p:nvSpPr>
-          <p:cNvPr id="3" name="Content Placeholder 2"/>
-          <p:cNvSpPr>
-            <a:spLocks noGrp="1"/>
-          </p:cNvSpPr>
-          <p:nvPr>
-            <p:ph idx="1"/>
-          </p:nvPr>
-        </p:nvSpPr>
-        <p:spPr/>
-        <p:txBody>
-          <a:bodyPr/>
-          <a:lstStyle/>
-          <a:p>
-            <a:pPr lvl="0" indent="0" marL="0">
-              <a:buNone/>
-            </a:pPr>
-            <a:r>
-              <a:rPr b="1"/>
-              <a:t>▶ Run this:</a:t>
-            </a:r>
-          </a:p>
-          <a:p>
-            <a:pPr lvl="0" indent="0">
-              <a:buNone/>
-            </a:pPr>
-            <a:r>
-              <a:rPr>
-                <a:solidFill>
-                  <a:srgbClr val="5E5E5E"/>
-                </a:solidFill>
-                <a:latin typeface="Courier"/>
-              </a:rPr>
-              <a:t># ANOVA is a linear model with a categorical X ----------</a:t>
-            </a:r>
-            <a:br/>
-            <a:r>
-              <a:rPr>
-                <a:solidFill>
-                  <a:srgbClr val="003B4F"/>
-                </a:solidFill>
-                <a:latin typeface="Courier"/>
-              </a:rPr>
-              <a:t>mass_model &lt;- </a:t>
-            </a:r>
-            <a:r>
-              <a:rPr>
-                <a:solidFill>
-                  <a:srgbClr val="4758AB"/>
-                </a:solidFill>
-                <a:latin typeface="Courier"/>
-              </a:rPr>
-              <a:t>lm</a:t>
-            </a:r>
-            <a:r>
-              <a:rPr>
-                <a:solidFill>
-                  <a:srgbClr val="003B4F"/>
-                </a:solidFill>
-                <a:latin typeface="Courier"/>
-              </a:rPr>
-              <a:t>(body_mass_g </a:t>
-            </a:r>
-            <a:r>
-              <a:rPr>
-                <a:solidFill>
-                  <a:srgbClr val="5E5E5E"/>
-                </a:solidFill>
-                <a:latin typeface="Courier"/>
-              </a:rPr>
-              <a:t>~</a:t>
-            </a:r>
-            <a:r>
-              <a:rPr>
-                <a:solidFill>
-                  <a:srgbClr val="003B4F"/>
-                </a:solidFill>
-                <a:latin typeface="Courier"/>
-              </a:rPr>
-              <a:t> species, </a:t>
-            </a:r>
-            <a:r>
-              <a:rPr>
-                <a:solidFill>
-                  <a:srgbClr val="657422"/>
-                </a:solidFill>
-                <a:latin typeface="Courier"/>
-              </a:rPr>
-              <a:t>data =</a:t>
-            </a:r>
-            <a:r>
-              <a:rPr>
-                <a:solidFill>
-                  <a:srgbClr val="003B4F"/>
-                </a:solidFill>
-                <a:latin typeface="Courier"/>
-              </a:rPr>
-              <a:t> penguins_df)</a:t>
-            </a:r>
-          </a:p>
-          <a:p>
-            <a:pPr lvl="0" indent="0" marL="0">
-              <a:buNone/>
-            </a:pPr>
-            <a:r>
-              <a:rPr/>
-              <a:t>✏️ </a:t>
-            </a:r>
-            <a:r>
-              <a:rPr b="1"/>
-              <a:t>Your turn:</a:t>
-            </a:r>
-            <a:r>
-              <a:rPr/>
-              <a:t> This is the same </a:t>
-            </a:r>
-            <a:r>
-              <a:rPr>
-                <a:latin typeface="Courier"/>
-              </a:rPr>
-              <a:t>lm()</a:t>
-            </a:r>
-            <a:r>
-              <a:rPr/>
-              <a:t> syntax as the regression worksheet. What is different about the X variable this time?</a:t>
-            </a:r>
-          </a:p>
-          <a:p>
-            <a:pPr lvl="0" indent="0">
-              <a:buNone/>
-            </a:pPr>
-            <a:r>
-              <a:rPr>
-                <a:latin typeface="Courier"/>
-              </a:rPr>
-              <a:t>Your answer:</a:t>
+              <a:spcBef>
+                <a:spcPts val="3000"/>
+              </a:spcBef>
+              <a:buNone/>
+            </a:pPr>
+            <a:r>
+              <a:rPr sz="2000" b="1"/>
+              <a:t>🧩 Chunk 2 — Fit &amp; check assumptions </a:t>
+            </a:r>
+            <a:r>
+              <a:rPr sz="2000" b="1" i="1"/>
+              <a:t>(after lecture Chunk 2)</a:t>
+            </a:r>
+          </a:p>
+          <a:p>
+            <a:pPr lvl="0" indent="0" marL="1270000">
+              <a:buNone/>
+            </a:pPr>
+            <a:r>
+              <a:rPr sz="2000"/>
+              <a:t>Parts 5–8: fit the model, set the reference level, check residual normality, check equal variance.</a:t>
             </a:r>
           </a:p>
         </p:txBody>
@@ -5909,7 +7512,7 @@
             </a:pPr>
             <a:r>
               <a:rPr/>
-              <a:t>Part 5 · Assumption 1 — normality of residuals</a:t>
+              <a:t>Part 5 · Fit the model</a:t>
             </a:r>
           </a:p>
         </p:txBody>
@@ -5929,33 +7532,6 @@
           <a:bodyPr/>
           <a:lstStyle/>
           <a:p>
-            <a:pPr lvl="0" indent="0" marL="1270000">
-              <a:buNone/>
-            </a:pPr>
-            <a:r>
-              <a:rPr sz="2000"/>
-              <a:t>🔮 </a:t>
-            </a:r>
-            <a:r>
-              <a:rPr sz="2000" b="1"/>
-              <a:t>Predict first:</a:t>
-            </a:r>
-            <a:r>
-              <a:rPr sz="2000"/>
-              <a:t> </a:t>
-            </a:r>
-            <a:r>
-              <a:rPr sz="2000">
-                <a:latin typeface="Courier"/>
-              </a:rPr>
-              <a:t>plot(mass_model)</a:t>
-            </a:r>
-            <a:r>
-              <a:rPr sz="2000"/>
-              <a:t> gives the same four panels as the regression worksheet. Which panel checks normality?</a:t>
-            </a:r>
-          </a:p>
-          <a:p>
             <a:pPr lvl="0" indent="0" marL="0">
               <a:buNone/>
             </a:pPr>
@@ -5975,26 +7551,53 @@
                 </a:solidFill>
                 <a:latin typeface="Courier"/>
               </a:rPr>
-              <a:t># plot() on an lm object gives all four diagnostics -------</a:t>
+              <a:t># ANOVA is a linear model with a categorical X ----------</a:t>
             </a:r>
             <a:br/>
             <a:r>
               <a:rPr>
                 <a:solidFill>
+                  <a:srgbClr val="003B4F"/>
+                </a:solidFill>
+                <a:latin typeface="Courier"/>
+              </a:rPr>
+              <a:t>mass_model &lt;- </a:t>
+            </a:r>
+            <a:r>
+              <a:rPr>
+                <a:solidFill>
                   <a:srgbClr val="4758AB"/>
                 </a:solidFill>
                 <a:latin typeface="Courier"/>
               </a:rPr>
-              <a:t>par</a:t>
-            </a:r>
-            <a:r>
-              <a:rPr>
-                <a:solidFill>
-                  <a:srgbClr val="003B4F"/>
-                </a:solidFill>
-                <a:latin typeface="Courier"/>
-              </a:rPr>
-              <a:t>(</a:t>
+              <a:t>lm</a:t>
+            </a:r>
+            <a:r>
+              <a:rPr>
+                <a:solidFill>
+                  <a:srgbClr val="003B4F"/>
+                </a:solidFill>
+                <a:latin typeface="Courier"/>
+              </a:rPr>
+              <a:t>(body_mass_g </a:t>
+            </a:r>
+            <a:r>
+              <a:rPr>
+                <a:solidFill>
+                  <a:srgbClr val="5E5E5E"/>
+                </a:solidFill>
+                <a:latin typeface="Courier"/>
+              </a:rPr>
+              <a:t>~</a:t>
+            </a:r>
+            <a:r>
+              <a:rPr>
+                <a:solidFill>
+                  <a:srgbClr val="003B4F"/>
+                </a:solidFill>
+                <a:latin typeface="Courier"/>
+              </a:rPr>
+              <a:t> species, </a:t>
             </a:r>
             <a:r>
               <a:rPr>
@@ -6003,140 +7606,16 @@
                 </a:solidFill>
                 <a:latin typeface="Courier"/>
               </a:rPr>
-              <a:t>mfrow =</a:t>
-            </a:r>
-            <a:r>
-              <a:rPr>
-                <a:solidFill>
-                  <a:srgbClr val="003B4F"/>
-                </a:solidFill>
-                <a:latin typeface="Courier"/>
-              </a:rPr>
-              <a:t> </a:t>
-            </a:r>
-            <a:r>
-              <a:rPr>
-                <a:solidFill>
-                  <a:srgbClr val="4758AB"/>
-                </a:solidFill>
-                <a:latin typeface="Courier"/>
-              </a:rPr>
-              <a:t>c</a:t>
-            </a:r>
-            <a:r>
-              <a:rPr>
-                <a:solidFill>
-                  <a:srgbClr val="003B4F"/>
-                </a:solidFill>
-                <a:latin typeface="Courier"/>
-              </a:rPr>
-              <a:t>(</a:t>
-            </a:r>
-            <a:r>
-              <a:rPr>
-                <a:solidFill>
-                  <a:srgbClr val="AD0000"/>
-                </a:solidFill>
-                <a:latin typeface="Courier"/>
-              </a:rPr>
-              <a:t>2</a:t>
-            </a:r>
-            <a:r>
-              <a:rPr>
-                <a:solidFill>
-                  <a:srgbClr val="003B4F"/>
-                </a:solidFill>
-                <a:latin typeface="Courier"/>
-              </a:rPr>
-              <a:t>, </a:t>
-            </a:r>
-            <a:r>
-              <a:rPr>
-                <a:solidFill>
-                  <a:srgbClr val="AD0000"/>
-                </a:solidFill>
-                <a:latin typeface="Courier"/>
-              </a:rPr>
-              <a:t>2</a:t>
-            </a:r>
-            <a:r>
-              <a:rPr>
-                <a:solidFill>
-                  <a:srgbClr val="003B4F"/>
-                </a:solidFill>
-                <a:latin typeface="Courier"/>
-              </a:rPr>
-              <a:t>))</a:t>
-            </a:r>
-            <a:br/>
-            <a:r>
-              <a:rPr>
-                <a:solidFill>
-                  <a:srgbClr val="4758AB"/>
-                </a:solidFill>
-                <a:latin typeface="Courier"/>
-              </a:rPr>
-              <a:t>plot</a:t>
-            </a:r>
-            <a:r>
-              <a:rPr>
-                <a:solidFill>
-                  <a:srgbClr val="003B4F"/>
-                </a:solidFill>
-                <a:latin typeface="Courier"/>
-              </a:rPr>
-              <a:t>(mass_model)</a:t>
-            </a:r>
-          </a:p>
-          <a:p>
-            <a:pPr lvl="0" indent="0">
-              <a:buNone/>
-            </a:pPr>
-            <a:r>
-              <a:rPr>
-                <a:solidFill>
-                  <a:srgbClr val="5E5E5E"/>
-                </a:solidFill>
-                <a:latin typeface="Courier"/>
-              </a:rPr>
-              <a:t># Formal test on the residuals ---------------------------</a:t>
-            </a:r>
-            <a:br/>
-            <a:r>
-              <a:rPr>
-                <a:solidFill>
-                  <a:srgbClr val="4758AB"/>
-                </a:solidFill>
-                <a:latin typeface="Courier"/>
-              </a:rPr>
-              <a:t>shapiro.test</a:t>
-            </a:r>
-            <a:r>
-              <a:rPr>
-                <a:solidFill>
-                  <a:srgbClr val="003B4F"/>
-                </a:solidFill>
-                <a:latin typeface="Courier"/>
-              </a:rPr>
-              <a:t>(</a:t>
-            </a:r>
-            <a:r>
-              <a:rPr>
-                <a:solidFill>
-                  <a:srgbClr val="4758AB"/>
-                </a:solidFill>
-                <a:latin typeface="Courier"/>
-              </a:rPr>
-              <a:t>residuals</a:t>
-            </a:r>
-            <a:r>
-              <a:rPr>
-                <a:solidFill>
-                  <a:srgbClr val="003B4F"/>
-                </a:solidFill>
-                <a:latin typeface="Courier"/>
-              </a:rPr>
-              <a:t>(mass_model))</a:t>
+              <a:t>data =</a:t>
+            </a:r>
+            <a:r>
+              <a:rPr>
+                <a:solidFill>
+                  <a:srgbClr val="003B4F"/>
+                </a:solidFill>
+                <a:latin typeface="Courier"/>
+              </a:rPr>
+              <a:t> penguins_df)</a:t>
             </a:r>
           </a:p>
           <a:p>
@@ -6153,36 +7632,17 @@
             </a:r>
             <a:r>
               <a:rPr/>
-              <a:t> Record and interpret.</a:t>
-            </a:r>
-          </a:p>
-          <a:p>
-            <a:pPr lvl="0" indent="0">
-              <a:buNone/>
-            </a:pPr>
-            <a:r>
-              <a:rPr>
-                <a:latin typeface="Courier"/>
-              </a:rPr>
-              <a:t>Do the Normal Q-Q points (panel 2) track the dashed line?  Y / mostly / no
-Shapiro-Wilk p-value =</a:t>
-            </a:r>
-          </a:p>
-          <a:p>
-            <a:pPr lvl="0" indent="0" marL="0">
-              <a:buNone/>
-            </a:pPr>
+              <a:t> This is the same </a:t>
+            </a:r>
+            <a:r>
+              <a:rPr>
+                <a:latin typeface="Courier"/>
+              </a:rPr>
+              <a:t>lm()</a:t>
+            </a:r>
             <a:r>
               <a:rPr/>
-              <a:t>✏️ </a:t>
-            </a:r>
-            <a:r>
-              <a:rPr b="1"/>
-              <a:t>Your turn:</a:t>
-            </a:r>
-            <a:r>
-              <a:rPr/>
-              <a:t> With ~340 penguins, Shapiro-Wilk is very sensitive and may flag tiny departures. Which should you trust more here — the Q-Q panel or the Shapiro p-value? Why?</a:t>
+              <a:t> syntax as the regression worksheet. What is different about the X variable this time?</a:t>
             </a:r>
           </a:p>
           <a:p>
